--- a/09-clustering-and-text-as-data/slides.pptx
+++ b/09-clustering-and-text-as-data/slides.pptx
@@ -944,7 +944,7 @@
           <a:bodyPr anchor="t"/>
           <a:lstStyle>
             <a:lvl1pPr algn="l">
-              <a:defRPr sz="3000" b="1" cap="all"/>
+              <a:defRPr sz="2350" b="1" cap="all"/>
             </a:lvl1pPr>
           </a:lstStyle>
           <a:p>
@@ -976,7 +976,7 @@
           <a:lstStyle>
             <a:lvl1pPr marL="0" indent="0">
               <a:buNone/>
-              <a:defRPr sz="1500">
+              <a:defRPr sz="1150">
                 <a:solidFill>
                   <a:schemeClr val="tx1">
                     <a:tint val="75000"/>
@@ -986,7 +986,7 @@
             </a:lvl1pPr>
             <a:lvl2pPr marL="342900" indent="0">
               <a:buNone/>
-              <a:defRPr sz="1350">
+              <a:defRPr sz="1050">
                 <a:solidFill>
                   <a:schemeClr val="tx1">
                     <a:tint val="75000"/>
@@ -996,7 +996,7 @@
             </a:lvl2pPr>
             <a:lvl3pPr marL="685800" indent="0">
               <a:buNone/>
-              <a:defRPr sz="1200">
+              <a:defRPr sz="950">
                 <a:solidFill>
                   <a:schemeClr val="tx1">
                     <a:tint val="75000"/>
@@ -1006,7 +1006,7 @@
             </a:lvl3pPr>
             <a:lvl4pPr marL="1028700" indent="0">
               <a:buNone/>
-              <a:defRPr sz="1050">
+              <a:defRPr sz="800">
                 <a:solidFill>
                   <a:schemeClr val="tx1">
                     <a:tint val="75000"/>
@@ -1016,7 +1016,7 @@
             </a:lvl4pPr>
             <a:lvl5pPr marL="1371600" indent="0">
               <a:buNone/>
-              <a:defRPr sz="1050">
+              <a:defRPr sz="800">
                 <a:solidFill>
                   <a:schemeClr val="tx1">
                     <a:tint val="75000"/>
@@ -1026,7 +1026,7 @@
             </a:lvl5pPr>
             <a:lvl6pPr marL="1714500" indent="0">
               <a:buNone/>
-              <a:defRPr sz="1050">
+              <a:defRPr sz="800">
                 <a:solidFill>
                   <a:schemeClr val="tx1">
                     <a:tint val="75000"/>
@@ -1036,7 +1036,7 @@
             </a:lvl6pPr>
             <a:lvl7pPr marL="2057400" indent="0">
               <a:buNone/>
-              <a:defRPr sz="1050">
+              <a:defRPr sz="800">
                 <a:solidFill>
                   <a:schemeClr val="tx1">
                     <a:tint val="75000"/>
@@ -1046,7 +1046,7 @@
             </a:lvl7pPr>
             <a:lvl8pPr marL="2400300" indent="0">
               <a:buNone/>
-              <a:defRPr sz="1050">
+              <a:defRPr sz="800">
                 <a:solidFill>
                   <a:schemeClr val="tx1">
                     <a:tint val="75000"/>
@@ -1056,7 +1056,7 @@
             </a:lvl8pPr>
             <a:lvl9pPr marL="2743200" indent="0">
               <a:buNone/>
-              <a:defRPr sz="1050">
+              <a:defRPr sz="800">
                 <a:solidFill>
                   <a:schemeClr val="tx1">
                     <a:tint val="75000"/>
@@ -1211,31 +1211,31 @@
           <a:bodyPr/>
           <a:lstStyle>
             <a:lvl1pPr>
-              <a:defRPr sz="2100"/>
+              <a:defRPr sz="1650"/>
             </a:lvl1pPr>
             <a:lvl2pPr>
-              <a:defRPr sz="1800"/>
+              <a:defRPr sz="1400"/>
             </a:lvl2pPr>
             <a:lvl3pPr>
-              <a:defRPr sz="1500"/>
+              <a:defRPr sz="1150"/>
             </a:lvl3pPr>
             <a:lvl4pPr>
-              <a:defRPr sz="1350"/>
+              <a:defRPr sz="1050"/>
             </a:lvl4pPr>
             <a:lvl5pPr>
-              <a:defRPr sz="1350"/>
+              <a:defRPr sz="1050"/>
             </a:lvl5pPr>
             <a:lvl6pPr>
-              <a:defRPr sz="1350"/>
+              <a:defRPr sz="1050"/>
             </a:lvl6pPr>
             <a:lvl7pPr>
-              <a:defRPr sz="1350"/>
+              <a:defRPr sz="1050"/>
             </a:lvl7pPr>
             <a:lvl8pPr>
-              <a:defRPr sz="1350"/>
+              <a:defRPr sz="1050"/>
             </a:lvl8pPr>
             <a:lvl9pPr>
-              <a:defRPr sz="1350"/>
+              <a:defRPr sz="1050"/>
             </a:lvl9pPr>
           </a:lstStyle>
           <a:p>
@@ -1295,31 +1295,31 @@
           <a:bodyPr/>
           <a:lstStyle>
             <a:lvl1pPr>
-              <a:defRPr sz="2100"/>
+              <a:defRPr sz="1650"/>
             </a:lvl1pPr>
             <a:lvl2pPr>
-              <a:defRPr sz="1800"/>
+              <a:defRPr sz="1400"/>
             </a:lvl2pPr>
             <a:lvl3pPr>
-              <a:defRPr sz="1500"/>
+              <a:defRPr sz="1150"/>
             </a:lvl3pPr>
             <a:lvl4pPr>
-              <a:defRPr sz="1350"/>
+              <a:defRPr sz="1050"/>
             </a:lvl4pPr>
             <a:lvl5pPr>
-              <a:defRPr sz="1350"/>
+              <a:defRPr sz="1050"/>
             </a:lvl5pPr>
             <a:lvl6pPr>
-              <a:defRPr sz="1350"/>
+              <a:defRPr sz="1050"/>
             </a:lvl6pPr>
             <a:lvl7pPr>
-              <a:defRPr sz="1350"/>
+              <a:defRPr sz="1050"/>
             </a:lvl7pPr>
             <a:lvl8pPr>
-              <a:defRPr sz="1350"/>
+              <a:defRPr sz="1050"/>
             </a:lvl8pPr>
             <a:lvl9pPr>
-              <a:defRPr sz="1350"/>
+              <a:defRPr sz="1050"/>
             </a:lvl9pPr>
           </a:lstStyle>
           <a:p>
@@ -1501,39 +1501,39 @@
           <a:lstStyle>
             <a:lvl1pPr marL="0" indent="0">
               <a:buNone/>
-              <a:defRPr sz="1800" b="1"/>
+              <a:defRPr sz="1400" b="1"/>
             </a:lvl1pPr>
             <a:lvl2pPr marL="342900" indent="0">
               <a:buNone/>
-              <a:defRPr sz="1500" b="1"/>
+              <a:defRPr sz="1150" b="1"/>
             </a:lvl2pPr>
             <a:lvl3pPr marL="685800" indent="0">
               <a:buNone/>
-              <a:defRPr sz="1350" b="1"/>
+              <a:defRPr sz="1050" b="1"/>
             </a:lvl3pPr>
             <a:lvl4pPr marL="1028700" indent="0">
               <a:buNone/>
-              <a:defRPr sz="1200" b="1"/>
+              <a:defRPr sz="950" b="1"/>
             </a:lvl4pPr>
             <a:lvl5pPr marL="1371600" indent="0">
               <a:buNone/>
-              <a:defRPr sz="1200" b="1"/>
+              <a:defRPr sz="950" b="1"/>
             </a:lvl5pPr>
             <a:lvl6pPr marL="1714500" indent="0">
               <a:buNone/>
-              <a:defRPr sz="1200" b="1"/>
+              <a:defRPr sz="950" b="1"/>
             </a:lvl6pPr>
             <a:lvl7pPr marL="2057400" indent="0">
               <a:buNone/>
-              <a:defRPr sz="1200" b="1"/>
+              <a:defRPr sz="950" b="1"/>
             </a:lvl7pPr>
             <a:lvl8pPr marL="2400300" indent="0">
               <a:buNone/>
-              <a:defRPr sz="1200" b="1"/>
+              <a:defRPr sz="950" b="1"/>
             </a:lvl8pPr>
             <a:lvl9pPr marL="2743200" indent="0">
               <a:buNone/>
-              <a:defRPr sz="1200" b="1"/>
+              <a:defRPr sz="950" b="1"/>
             </a:lvl9pPr>
           </a:lstStyle>
           <a:p>
@@ -1565,31 +1565,31 @@
           <a:bodyPr/>
           <a:lstStyle>
             <a:lvl1pPr>
-              <a:defRPr sz="1800"/>
+              <a:defRPr sz="1400"/>
             </a:lvl1pPr>
             <a:lvl2pPr>
-              <a:defRPr sz="1500"/>
+              <a:defRPr sz="1150"/>
             </a:lvl2pPr>
             <a:lvl3pPr>
-              <a:defRPr sz="1350"/>
+              <a:defRPr sz="1050"/>
             </a:lvl3pPr>
             <a:lvl4pPr>
-              <a:defRPr sz="1200"/>
+              <a:defRPr sz="950"/>
             </a:lvl4pPr>
             <a:lvl5pPr>
-              <a:defRPr sz="1200"/>
+              <a:defRPr sz="950"/>
             </a:lvl5pPr>
             <a:lvl6pPr>
-              <a:defRPr sz="1200"/>
+              <a:defRPr sz="950"/>
             </a:lvl6pPr>
             <a:lvl7pPr>
-              <a:defRPr sz="1200"/>
+              <a:defRPr sz="950"/>
             </a:lvl7pPr>
             <a:lvl8pPr>
-              <a:defRPr sz="1200"/>
+              <a:defRPr sz="950"/>
             </a:lvl8pPr>
             <a:lvl9pPr>
-              <a:defRPr sz="1200"/>
+              <a:defRPr sz="950"/>
             </a:lvl9pPr>
           </a:lstStyle>
           <a:p>
@@ -1650,39 +1650,39 @@
           <a:lstStyle>
             <a:lvl1pPr marL="0" indent="0">
               <a:buNone/>
-              <a:defRPr sz="1800" b="1"/>
+              <a:defRPr sz="1400" b="1"/>
             </a:lvl1pPr>
             <a:lvl2pPr marL="342900" indent="0">
               <a:buNone/>
-              <a:defRPr sz="1500" b="1"/>
+              <a:defRPr sz="1150" b="1"/>
             </a:lvl2pPr>
             <a:lvl3pPr marL="685800" indent="0">
               <a:buNone/>
-              <a:defRPr sz="1350" b="1"/>
+              <a:defRPr sz="1050" b="1"/>
             </a:lvl3pPr>
             <a:lvl4pPr marL="1028700" indent="0">
               <a:buNone/>
-              <a:defRPr sz="1200" b="1"/>
+              <a:defRPr sz="950" b="1"/>
             </a:lvl4pPr>
             <a:lvl5pPr marL="1371600" indent="0">
               <a:buNone/>
-              <a:defRPr sz="1200" b="1"/>
+              <a:defRPr sz="950" b="1"/>
             </a:lvl5pPr>
             <a:lvl6pPr marL="1714500" indent="0">
               <a:buNone/>
-              <a:defRPr sz="1200" b="1"/>
+              <a:defRPr sz="950" b="1"/>
             </a:lvl6pPr>
             <a:lvl7pPr marL="2057400" indent="0">
               <a:buNone/>
-              <a:defRPr sz="1200" b="1"/>
+              <a:defRPr sz="950" b="1"/>
             </a:lvl7pPr>
             <a:lvl8pPr marL="2400300" indent="0">
               <a:buNone/>
-              <a:defRPr sz="1200" b="1"/>
+              <a:defRPr sz="950" b="1"/>
             </a:lvl8pPr>
             <a:lvl9pPr marL="2743200" indent="0">
               <a:buNone/>
-              <a:defRPr sz="1200" b="1"/>
+              <a:defRPr sz="950" b="1"/>
             </a:lvl9pPr>
           </a:lstStyle>
           <a:p>
@@ -1714,31 +1714,31 @@
           <a:bodyPr/>
           <a:lstStyle>
             <a:lvl1pPr>
-              <a:defRPr sz="1800"/>
+              <a:defRPr sz="1400"/>
             </a:lvl1pPr>
             <a:lvl2pPr>
-              <a:defRPr sz="1500"/>
+              <a:defRPr sz="1150"/>
             </a:lvl2pPr>
             <a:lvl3pPr>
-              <a:defRPr sz="1350"/>
+              <a:defRPr sz="1050"/>
             </a:lvl3pPr>
             <a:lvl4pPr>
-              <a:defRPr sz="1200"/>
+              <a:defRPr sz="950"/>
             </a:lvl4pPr>
             <a:lvl5pPr>
-              <a:defRPr sz="1200"/>
+              <a:defRPr sz="950"/>
             </a:lvl5pPr>
             <a:lvl6pPr>
-              <a:defRPr sz="1200"/>
+              <a:defRPr sz="950"/>
             </a:lvl6pPr>
             <a:lvl7pPr>
-              <a:defRPr sz="1200"/>
+              <a:defRPr sz="950"/>
             </a:lvl7pPr>
             <a:lvl8pPr>
-              <a:defRPr sz="1200"/>
+              <a:defRPr sz="950"/>
             </a:lvl8pPr>
             <a:lvl9pPr>
-              <a:defRPr sz="1200"/>
+              <a:defRPr sz="950"/>
             </a:lvl9pPr>
           </a:lstStyle>
           <a:p>
@@ -2105,7 +2105,7 @@
           <a:bodyPr anchor="b"/>
           <a:lstStyle>
             <a:lvl1pPr algn="l">
-              <a:defRPr sz="1500" b="1"/>
+              <a:defRPr sz="1150" b="1"/>
             </a:lvl1pPr>
           </a:lstStyle>
           <a:p>
@@ -2136,31 +2136,31 @@
           <a:bodyPr/>
           <a:lstStyle>
             <a:lvl1pPr>
-              <a:defRPr sz="2400"/>
+              <a:defRPr sz="1850"/>
             </a:lvl1pPr>
             <a:lvl2pPr>
-              <a:defRPr sz="2100"/>
+              <a:defRPr sz="1650"/>
             </a:lvl2pPr>
             <a:lvl3pPr>
-              <a:defRPr sz="1800"/>
+              <a:defRPr sz="1400"/>
             </a:lvl3pPr>
             <a:lvl4pPr>
-              <a:defRPr sz="1500"/>
+              <a:defRPr sz="1150"/>
             </a:lvl4pPr>
             <a:lvl5pPr>
-              <a:defRPr sz="1500"/>
+              <a:defRPr sz="1150"/>
             </a:lvl5pPr>
             <a:lvl6pPr>
-              <a:defRPr sz="1500"/>
+              <a:defRPr sz="1150"/>
             </a:lvl6pPr>
             <a:lvl7pPr>
-              <a:defRPr sz="1500"/>
+              <a:defRPr sz="1150"/>
             </a:lvl7pPr>
             <a:lvl8pPr>
-              <a:defRPr sz="1500"/>
+              <a:defRPr sz="1150"/>
             </a:lvl8pPr>
             <a:lvl9pPr>
-              <a:defRPr sz="1500"/>
+              <a:defRPr sz="1150"/>
             </a:lvl9pPr>
           </a:lstStyle>
           <a:p>
@@ -2221,39 +2221,39 @@
           <a:lstStyle>
             <a:lvl1pPr marL="0" indent="0">
               <a:buNone/>
-              <a:defRPr sz="1050"/>
+              <a:defRPr sz="800"/>
             </a:lvl1pPr>
             <a:lvl2pPr marL="342900" indent="0">
               <a:buNone/>
-              <a:defRPr sz="900"/>
+              <a:defRPr sz="700"/>
             </a:lvl2pPr>
             <a:lvl3pPr marL="685800" indent="0">
               <a:buNone/>
-              <a:defRPr sz="750"/>
+              <a:defRPr sz="700"/>
             </a:lvl3pPr>
             <a:lvl4pPr marL="1028700" indent="0">
               <a:buNone/>
-              <a:defRPr sz="675"/>
+              <a:defRPr sz="700"/>
             </a:lvl4pPr>
             <a:lvl5pPr marL="1371600" indent="0">
               <a:buNone/>
-              <a:defRPr sz="675"/>
+              <a:defRPr sz="700"/>
             </a:lvl5pPr>
             <a:lvl6pPr marL="1714500" indent="0">
               <a:buNone/>
-              <a:defRPr sz="675"/>
+              <a:defRPr sz="700"/>
             </a:lvl6pPr>
             <a:lvl7pPr marL="2057400" indent="0">
               <a:buNone/>
-              <a:defRPr sz="675"/>
+              <a:defRPr sz="700"/>
             </a:lvl7pPr>
             <a:lvl8pPr marL="2400300" indent="0">
               <a:buNone/>
-              <a:defRPr sz="675"/>
+              <a:defRPr sz="700"/>
             </a:lvl8pPr>
             <a:lvl9pPr marL="2743200" indent="0">
               <a:buNone/>
-              <a:defRPr sz="675"/>
+              <a:defRPr sz="700"/>
             </a:lvl9pPr>
           </a:lstStyle>
           <a:p>
@@ -2380,7 +2380,7 @@
           <a:bodyPr anchor="b"/>
           <a:lstStyle>
             <a:lvl1pPr algn="l">
-              <a:defRPr sz="1500" b="1"/>
+              <a:defRPr sz="1150" b="1"/>
             </a:lvl1pPr>
           </a:lstStyle>
           <a:p>
@@ -2412,39 +2412,39 @@
           <a:lstStyle>
             <a:lvl1pPr marL="0" indent="0">
               <a:buNone/>
-              <a:defRPr sz="2400"/>
+              <a:defRPr sz="1850"/>
             </a:lvl1pPr>
             <a:lvl2pPr marL="342900" indent="0">
               <a:buNone/>
-              <a:defRPr sz="2100"/>
+              <a:defRPr sz="1650"/>
             </a:lvl2pPr>
             <a:lvl3pPr marL="685800" indent="0">
               <a:buNone/>
-              <a:defRPr sz="1800"/>
+              <a:defRPr sz="1400"/>
             </a:lvl3pPr>
             <a:lvl4pPr marL="1028700" indent="0">
               <a:buNone/>
-              <a:defRPr sz="1500"/>
+              <a:defRPr sz="1150"/>
             </a:lvl4pPr>
             <a:lvl5pPr marL="1371600" indent="0">
               <a:buNone/>
-              <a:defRPr sz="1500"/>
+              <a:defRPr sz="1150"/>
             </a:lvl5pPr>
             <a:lvl6pPr marL="1714500" indent="0">
               <a:buNone/>
-              <a:defRPr sz="1500"/>
+              <a:defRPr sz="1150"/>
             </a:lvl6pPr>
             <a:lvl7pPr marL="2057400" indent="0">
               <a:buNone/>
-              <a:defRPr sz="1500"/>
+              <a:defRPr sz="1150"/>
             </a:lvl7pPr>
             <a:lvl8pPr marL="2400300" indent="0">
               <a:buNone/>
-              <a:defRPr sz="1500"/>
+              <a:defRPr sz="1150"/>
             </a:lvl8pPr>
             <a:lvl9pPr marL="2743200" indent="0">
               <a:buNone/>
-              <a:defRPr sz="1500"/>
+              <a:defRPr sz="1150"/>
             </a:lvl9pPr>
           </a:lstStyle>
           <a:p>
@@ -2473,39 +2473,39 @@
           <a:lstStyle>
             <a:lvl1pPr marL="0" indent="0">
               <a:buNone/>
-              <a:defRPr sz="1050"/>
+              <a:defRPr sz="800"/>
             </a:lvl1pPr>
             <a:lvl2pPr marL="342900" indent="0">
               <a:buNone/>
-              <a:defRPr sz="900"/>
+              <a:defRPr sz="700"/>
             </a:lvl2pPr>
             <a:lvl3pPr marL="685800" indent="0">
               <a:buNone/>
-              <a:defRPr sz="750"/>
+              <a:defRPr sz="700"/>
             </a:lvl3pPr>
             <a:lvl4pPr marL="1028700" indent="0">
               <a:buNone/>
-              <a:defRPr sz="675"/>
+              <a:defRPr sz="700"/>
             </a:lvl4pPr>
             <a:lvl5pPr marL="1371600" indent="0">
               <a:buNone/>
-              <a:defRPr sz="675"/>
+              <a:defRPr sz="700"/>
             </a:lvl5pPr>
             <a:lvl6pPr marL="1714500" indent="0">
               <a:buNone/>
-              <a:defRPr sz="675"/>
+              <a:defRPr sz="700"/>
             </a:lvl6pPr>
             <a:lvl7pPr marL="2057400" indent="0">
               <a:buNone/>
-              <a:defRPr sz="675"/>
+              <a:defRPr sz="700"/>
             </a:lvl7pPr>
             <a:lvl8pPr marL="2400300" indent="0">
               <a:buNone/>
-              <a:defRPr sz="675"/>
+              <a:defRPr sz="700"/>
             </a:lvl8pPr>
             <a:lvl9pPr marL="2743200" indent="0">
               <a:buNone/>
-              <a:defRPr sz="675"/>
+              <a:defRPr sz="700"/>
             </a:lvl9pPr>
           </a:lstStyle>
           <a:p>
@@ -2733,7 +2733,7 @@
           <a:bodyPr anchor="ctr" bIns="45720" lIns="91440" rIns="91440" rtlCol="0" tIns="45720" vert="horz"/>
           <a:lstStyle>
             <a:lvl1pPr algn="l">
-              <a:defRPr sz="900">
+              <a:defRPr sz="700">
                 <a:solidFill>
                   <a:schemeClr val="tx1">
                     <a:tint val="75000"/>
@@ -2774,7 +2774,7 @@
           <a:bodyPr anchor="ctr" bIns="45720" lIns="91440" rIns="91440" rtlCol="0" tIns="45720" vert="horz"/>
           <a:lstStyle>
             <a:lvl1pPr algn="ctr">
-              <a:defRPr sz="900">
+              <a:defRPr sz="700">
                 <a:solidFill>
                   <a:schemeClr val="tx1">
                     <a:tint val="75000"/>
@@ -2811,7 +2811,7 @@
           <a:bodyPr anchor="ctr" bIns="45720" lIns="91440" rIns="91440" rtlCol="0" tIns="45720" vert="horz"/>
           <a:lstStyle>
             <a:lvl1pPr algn="r">
-              <a:defRPr sz="900">
+              <a:defRPr sz="700">
                 <a:solidFill>
                   <a:schemeClr val="tx1">
                     <a:tint val="75000"/>
@@ -2857,7 +2857,7 @@
           <a:spcPct val="0"/>
         </a:spcBef>
         <a:buNone/>
-        <a:defRPr kern="1200" sz="3300">
+        <a:defRPr kern="1200" sz="2550">
           <a:solidFill>
             <a:schemeClr val="tx1"/>
           </a:solidFill>
@@ -2874,7 +2874,7 @@
         </a:spcBef>
         <a:buFont typeface="Arial"/>
         <a:buChar char="•"/>
-        <a:defRPr kern="1200" sz="2400">
+        <a:defRPr kern="1200" sz="1850">
           <a:solidFill>
             <a:schemeClr val="tx1"/>
           </a:solidFill>
@@ -2889,7 +2889,7 @@
         </a:spcBef>
         <a:buFont typeface="Arial"/>
         <a:buChar char="–"/>
-        <a:defRPr kern="1200" sz="2100">
+        <a:defRPr kern="1200" sz="1650">
           <a:solidFill>
             <a:schemeClr val="tx1"/>
           </a:solidFill>
@@ -2904,7 +2904,7 @@
         </a:spcBef>
         <a:buFont typeface="Arial"/>
         <a:buChar char="•"/>
-        <a:defRPr kern="1200" sz="1800">
+        <a:defRPr kern="1200" sz="1400">
           <a:solidFill>
             <a:schemeClr val="tx1"/>
           </a:solidFill>
@@ -2919,7 +2919,7 @@
         </a:spcBef>
         <a:buFont typeface="Arial"/>
         <a:buChar char="–"/>
-        <a:defRPr kern="1200" sz="1500">
+        <a:defRPr kern="1200" sz="1150">
           <a:solidFill>
             <a:schemeClr val="tx1"/>
           </a:solidFill>
@@ -2934,7 +2934,7 @@
         </a:spcBef>
         <a:buFont typeface="Arial"/>
         <a:buChar char="»"/>
-        <a:defRPr kern="1200" sz="1500">
+        <a:defRPr kern="1200" sz="1150">
           <a:solidFill>
             <a:schemeClr val="tx1"/>
           </a:solidFill>
@@ -2949,7 +2949,7 @@
         </a:spcBef>
         <a:buFont typeface="Arial"/>
         <a:buChar char="•"/>
-        <a:defRPr kern="1200" sz="1500">
+        <a:defRPr kern="1200" sz="1150">
           <a:solidFill>
             <a:schemeClr val="tx1"/>
           </a:solidFill>
@@ -2964,7 +2964,7 @@
         </a:spcBef>
         <a:buFont typeface="Arial"/>
         <a:buChar char="•"/>
-        <a:defRPr kern="1200" sz="1500">
+        <a:defRPr kern="1200" sz="1150">
           <a:solidFill>
             <a:schemeClr val="tx1"/>
           </a:solidFill>
@@ -2979,7 +2979,7 @@
         </a:spcBef>
         <a:buFont typeface="Arial"/>
         <a:buChar char="•"/>
-        <a:defRPr kern="1200" sz="1500">
+        <a:defRPr kern="1200" sz="1150">
           <a:solidFill>
             <a:schemeClr val="tx1"/>
           </a:solidFill>
@@ -2994,7 +2994,7 @@
         </a:spcBef>
         <a:buFont typeface="Arial"/>
         <a:buChar char="•"/>
-        <a:defRPr kern="1200" sz="1500">
+        <a:defRPr kern="1200" sz="1150">
           <a:solidFill>
             <a:schemeClr val="tx1"/>
           </a:solidFill>
@@ -3009,7 +3009,7 @@
         <a:defRPr lang="en-US"/>
       </a:defPPr>
       <a:lvl1pPr algn="l" defTabSz="342900" eaLnBrk="1" hangingPunct="1" latinLnBrk="0" marL="0" rtl="0">
-        <a:defRPr kern="1200" sz="1350">
+        <a:defRPr kern="1200" sz="1050">
           <a:solidFill>
             <a:schemeClr val="tx1"/>
           </a:solidFill>
@@ -3019,7 +3019,7 @@
         </a:defRPr>
       </a:lvl1pPr>
       <a:lvl2pPr algn="l" defTabSz="342900" eaLnBrk="1" hangingPunct="1" latinLnBrk="0" marL="342900" rtl="0">
-        <a:defRPr kern="1200" sz="1350">
+        <a:defRPr kern="1200" sz="1050">
           <a:solidFill>
             <a:schemeClr val="tx1"/>
           </a:solidFill>
@@ -3029,7 +3029,7 @@
         </a:defRPr>
       </a:lvl2pPr>
       <a:lvl3pPr algn="l" defTabSz="342900" eaLnBrk="1" hangingPunct="1" latinLnBrk="0" marL="685800" rtl="0">
-        <a:defRPr kern="1200" sz="1350">
+        <a:defRPr kern="1200" sz="1050">
           <a:solidFill>
             <a:schemeClr val="tx1"/>
           </a:solidFill>
@@ -3039,7 +3039,7 @@
         </a:defRPr>
       </a:lvl3pPr>
       <a:lvl4pPr algn="l" defTabSz="342900" eaLnBrk="1" hangingPunct="1" latinLnBrk="0" marL="1028700" rtl="0">
-        <a:defRPr kern="1200" sz="1350">
+        <a:defRPr kern="1200" sz="1050">
           <a:solidFill>
             <a:schemeClr val="tx1"/>
           </a:solidFill>
@@ -3049,7 +3049,7 @@
         </a:defRPr>
       </a:lvl4pPr>
       <a:lvl5pPr algn="l" defTabSz="342900" eaLnBrk="1" hangingPunct="1" latinLnBrk="0" marL="1371600" rtl="0">
-        <a:defRPr kern="1200" sz="1350">
+        <a:defRPr kern="1200" sz="1050">
           <a:solidFill>
             <a:schemeClr val="tx1"/>
           </a:solidFill>
@@ -3059,7 +3059,7 @@
         </a:defRPr>
       </a:lvl5pPr>
       <a:lvl6pPr algn="l" defTabSz="342900" eaLnBrk="1" hangingPunct="1" latinLnBrk="0" marL="1714500" rtl="0">
-        <a:defRPr kern="1200" sz="1350">
+        <a:defRPr kern="1200" sz="1050">
           <a:solidFill>
             <a:schemeClr val="tx1"/>
           </a:solidFill>
@@ -3069,7 +3069,7 @@
         </a:defRPr>
       </a:lvl6pPr>
       <a:lvl7pPr algn="l" defTabSz="342900" eaLnBrk="1" hangingPunct="1" latinLnBrk="0" marL="2057400" rtl="0">
-        <a:defRPr kern="1200" sz="1350">
+        <a:defRPr kern="1200" sz="1050">
           <a:solidFill>
             <a:schemeClr val="tx1"/>
           </a:solidFill>
@@ -3079,7 +3079,7 @@
         </a:defRPr>
       </a:lvl7pPr>
       <a:lvl8pPr algn="l" defTabSz="342900" eaLnBrk="1" hangingPunct="1" latinLnBrk="0" marL="2400300" rtl="0">
-        <a:defRPr kern="1200" sz="1350">
+        <a:defRPr kern="1200" sz="1050">
           <a:solidFill>
             <a:schemeClr val="tx1"/>
           </a:solidFill>
@@ -3089,7 +3089,7 @@
         </a:defRPr>
       </a:lvl8pPr>
       <a:lvl9pPr algn="l" defTabSz="342900" eaLnBrk="1" hangingPunct="1" latinLnBrk="0" marL="2743200" rtl="0">
-        <a:defRPr kern="1200" sz="1350">
+        <a:defRPr kern="1200" sz="1050">
           <a:solidFill>
             <a:schemeClr val="tx1"/>
           </a:solidFill>

--- a/09-clustering-and-text-as-data/slides.pptx
+++ b/09-clustering-and-text-as-data/slides.pptx
@@ -944,7 +944,7 @@
           <a:bodyPr anchor="t"/>
           <a:lstStyle>
             <a:lvl1pPr algn="l">
-              <a:defRPr sz="2350" b="1" cap="all"/>
+              <a:defRPr sz="1850" b="1" cap="all"/>
             </a:lvl1pPr>
           </a:lstStyle>
           <a:p>
@@ -976,7 +976,7 @@
           <a:lstStyle>
             <a:lvl1pPr marL="0" indent="0">
               <a:buNone/>
-              <a:defRPr sz="1150">
+              <a:defRPr sz="950">
                 <a:solidFill>
                   <a:schemeClr val="tx1">
                     <a:tint val="75000"/>
@@ -986,7 +986,7 @@
             </a:lvl1pPr>
             <a:lvl2pPr marL="342900" indent="0">
               <a:buNone/>
-              <a:defRPr sz="1050">
+              <a:defRPr sz="850">
                 <a:solidFill>
                   <a:schemeClr val="tx1">
                     <a:tint val="75000"/>
@@ -996,7 +996,7 @@
             </a:lvl2pPr>
             <a:lvl3pPr marL="685800" indent="0">
               <a:buNone/>
-              <a:defRPr sz="950">
+              <a:defRPr sz="750">
                 <a:solidFill>
                   <a:schemeClr val="tx1">
                     <a:tint val="75000"/>
@@ -1006,7 +1006,7 @@
             </a:lvl3pPr>
             <a:lvl4pPr marL="1028700" indent="0">
               <a:buNone/>
-              <a:defRPr sz="800">
+              <a:defRPr sz="650">
                 <a:solidFill>
                   <a:schemeClr val="tx1">
                     <a:tint val="75000"/>
@@ -1016,7 +1016,7 @@
             </a:lvl4pPr>
             <a:lvl5pPr marL="1371600" indent="0">
               <a:buNone/>
-              <a:defRPr sz="800">
+              <a:defRPr sz="650">
                 <a:solidFill>
                   <a:schemeClr val="tx1">
                     <a:tint val="75000"/>
@@ -1026,7 +1026,7 @@
             </a:lvl5pPr>
             <a:lvl6pPr marL="1714500" indent="0">
               <a:buNone/>
-              <a:defRPr sz="800">
+              <a:defRPr sz="650">
                 <a:solidFill>
                   <a:schemeClr val="tx1">
                     <a:tint val="75000"/>
@@ -1036,7 +1036,7 @@
             </a:lvl6pPr>
             <a:lvl7pPr marL="2057400" indent="0">
               <a:buNone/>
-              <a:defRPr sz="800">
+              <a:defRPr sz="650">
                 <a:solidFill>
                   <a:schemeClr val="tx1">
                     <a:tint val="75000"/>
@@ -1046,7 +1046,7 @@
             </a:lvl7pPr>
             <a:lvl8pPr marL="2400300" indent="0">
               <a:buNone/>
-              <a:defRPr sz="800">
+              <a:defRPr sz="650">
                 <a:solidFill>
                   <a:schemeClr val="tx1">
                     <a:tint val="75000"/>
@@ -1056,7 +1056,7 @@
             </a:lvl8pPr>
             <a:lvl9pPr marL="2743200" indent="0">
               <a:buNone/>
-              <a:defRPr sz="800">
+              <a:defRPr sz="650">
                 <a:solidFill>
                   <a:schemeClr val="tx1">
                     <a:tint val="75000"/>
@@ -1211,31 +1211,31 @@
           <a:bodyPr/>
           <a:lstStyle>
             <a:lvl1pPr>
-              <a:defRPr sz="1650"/>
+              <a:defRPr sz="1300"/>
             </a:lvl1pPr>
             <a:lvl2pPr>
-              <a:defRPr sz="1400"/>
+              <a:defRPr sz="1100"/>
             </a:lvl2pPr>
             <a:lvl3pPr>
-              <a:defRPr sz="1150"/>
+              <a:defRPr sz="950"/>
             </a:lvl3pPr>
             <a:lvl4pPr>
-              <a:defRPr sz="1050"/>
+              <a:defRPr sz="850"/>
             </a:lvl4pPr>
             <a:lvl5pPr>
-              <a:defRPr sz="1050"/>
+              <a:defRPr sz="850"/>
             </a:lvl5pPr>
             <a:lvl6pPr>
-              <a:defRPr sz="1050"/>
+              <a:defRPr sz="850"/>
             </a:lvl6pPr>
             <a:lvl7pPr>
-              <a:defRPr sz="1050"/>
+              <a:defRPr sz="850"/>
             </a:lvl7pPr>
             <a:lvl8pPr>
-              <a:defRPr sz="1050"/>
+              <a:defRPr sz="850"/>
             </a:lvl8pPr>
             <a:lvl9pPr>
-              <a:defRPr sz="1050"/>
+              <a:defRPr sz="850"/>
             </a:lvl9pPr>
           </a:lstStyle>
           <a:p>
@@ -1295,31 +1295,31 @@
           <a:bodyPr/>
           <a:lstStyle>
             <a:lvl1pPr>
-              <a:defRPr sz="1650"/>
+              <a:defRPr sz="1300"/>
             </a:lvl1pPr>
             <a:lvl2pPr>
-              <a:defRPr sz="1400"/>
+              <a:defRPr sz="1100"/>
             </a:lvl2pPr>
             <a:lvl3pPr>
-              <a:defRPr sz="1150"/>
+              <a:defRPr sz="950"/>
             </a:lvl3pPr>
             <a:lvl4pPr>
-              <a:defRPr sz="1050"/>
+              <a:defRPr sz="850"/>
             </a:lvl4pPr>
             <a:lvl5pPr>
-              <a:defRPr sz="1050"/>
+              <a:defRPr sz="850"/>
             </a:lvl5pPr>
             <a:lvl6pPr>
-              <a:defRPr sz="1050"/>
+              <a:defRPr sz="850"/>
             </a:lvl6pPr>
             <a:lvl7pPr>
-              <a:defRPr sz="1050"/>
+              <a:defRPr sz="850"/>
             </a:lvl7pPr>
             <a:lvl8pPr>
-              <a:defRPr sz="1050"/>
+              <a:defRPr sz="850"/>
             </a:lvl8pPr>
             <a:lvl9pPr>
-              <a:defRPr sz="1050"/>
+              <a:defRPr sz="850"/>
             </a:lvl9pPr>
           </a:lstStyle>
           <a:p>
@@ -1501,39 +1501,39 @@
           <a:lstStyle>
             <a:lvl1pPr marL="0" indent="0">
               <a:buNone/>
-              <a:defRPr sz="1400" b="1"/>
+              <a:defRPr sz="1100" b="1"/>
             </a:lvl1pPr>
             <a:lvl2pPr marL="342900" indent="0">
               <a:buNone/>
-              <a:defRPr sz="1150" b="1"/>
+              <a:defRPr sz="950" b="1"/>
             </a:lvl2pPr>
             <a:lvl3pPr marL="685800" indent="0">
               <a:buNone/>
-              <a:defRPr sz="1050" b="1"/>
+              <a:defRPr sz="850" b="1"/>
             </a:lvl3pPr>
             <a:lvl4pPr marL="1028700" indent="0">
               <a:buNone/>
-              <a:defRPr sz="950" b="1"/>
+              <a:defRPr sz="750" b="1"/>
             </a:lvl4pPr>
             <a:lvl5pPr marL="1371600" indent="0">
               <a:buNone/>
-              <a:defRPr sz="950" b="1"/>
+              <a:defRPr sz="750" b="1"/>
             </a:lvl5pPr>
             <a:lvl6pPr marL="1714500" indent="0">
               <a:buNone/>
-              <a:defRPr sz="950" b="1"/>
+              <a:defRPr sz="750" b="1"/>
             </a:lvl6pPr>
             <a:lvl7pPr marL="2057400" indent="0">
               <a:buNone/>
-              <a:defRPr sz="950" b="1"/>
+              <a:defRPr sz="750" b="1"/>
             </a:lvl7pPr>
             <a:lvl8pPr marL="2400300" indent="0">
               <a:buNone/>
-              <a:defRPr sz="950" b="1"/>
+              <a:defRPr sz="750" b="1"/>
             </a:lvl8pPr>
             <a:lvl9pPr marL="2743200" indent="0">
               <a:buNone/>
-              <a:defRPr sz="950" b="1"/>
+              <a:defRPr sz="750" b="1"/>
             </a:lvl9pPr>
           </a:lstStyle>
           <a:p>
@@ -1565,31 +1565,31 @@
           <a:bodyPr/>
           <a:lstStyle>
             <a:lvl1pPr>
-              <a:defRPr sz="1400"/>
+              <a:defRPr sz="1100"/>
             </a:lvl1pPr>
             <a:lvl2pPr>
-              <a:defRPr sz="1150"/>
+              <a:defRPr sz="950"/>
             </a:lvl2pPr>
             <a:lvl3pPr>
-              <a:defRPr sz="1050"/>
+              <a:defRPr sz="850"/>
             </a:lvl3pPr>
             <a:lvl4pPr>
-              <a:defRPr sz="950"/>
+              <a:defRPr sz="750"/>
             </a:lvl4pPr>
             <a:lvl5pPr>
-              <a:defRPr sz="950"/>
+              <a:defRPr sz="750"/>
             </a:lvl5pPr>
             <a:lvl6pPr>
-              <a:defRPr sz="950"/>
+              <a:defRPr sz="750"/>
             </a:lvl6pPr>
             <a:lvl7pPr>
-              <a:defRPr sz="950"/>
+              <a:defRPr sz="750"/>
             </a:lvl7pPr>
             <a:lvl8pPr>
-              <a:defRPr sz="950"/>
+              <a:defRPr sz="750"/>
             </a:lvl8pPr>
             <a:lvl9pPr>
-              <a:defRPr sz="950"/>
+              <a:defRPr sz="750"/>
             </a:lvl9pPr>
           </a:lstStyle>
           <a:p>
@@ -1650,39 +1650,39 @@
           <a:lstStyle>
             <a:lvl1pPr marL="0" indent="0">
               <a:buNone/>
-              <a:defRPr sz="1400" b="1"/>
+              <a:defRPr sz="1100" b="1"/>
             </a:lvl1pPr>
             <a:lvl2pPr marL="342900" indent="0">
               <a:buNone/>
-              <a:defRPr sz="1150" b="1"/>
+              <a:defRPr sz="950" b="1"/>
             </a:lvl2pPr>
             <a:lvl3pPr marL="685800" indent="0">
               <a:buNone/>
-              <a:defRPr sz="1050" b="1"/>
+              <a:defRPr sz="850" b="1"/>
             </a:lvl3pPr>
             <a:lvl4pPr marL="1028700" indent="0">
               <a:buNone/>
-              <a:defRPr sz="950" b="1"/>
+              <a:defRPr sz="750" b="1"/>
             </a:lvl4pPr>
             <a:lvl5pPr marL="1371600" indent="0">
               <a:buNone/>
-              <a:defRPr sz="950" b="1"/>
+              <a:defRPr sz="750" b="1"/>
             </a:lvl5pPr>
             <a:lvl6pPr marL="1714500" indent="0">
               <a:buNone/>
-              <a:defRPr sz="950" b="1"/>
+              <a:defRPr sz="750" b="1"/>
             </a:lvl6pPr>
             <a:lvl7pPr marL="2057400" indent="0">
               <a:buNone/>
-              <a:defRPr sz="950" b="1"/>
+              <a:defRPr sz="750" b="1"/>
             </a:lvl7pPr>
             <a:lvl8pPr marL="2400300" indent="0">
               <a:buNone/>
-              <a:defRPr sz="950" b="1"/>
+              <a:defRPr sz="750" b="1"/>
             </a:lvl8pPr>
             <a:lvl9pPr marL="2743200" indent="0">
               <a:buNone/>
-              <a:defRPr sz="950" b="1"/>
+              <a:defRPr sz="750" b="1"/>
             </a:lvl9pPr>
           </a:lstStyle>
           <a:p>
@@ -1714,31 +1714,31 @@
           <a:bodyPr/>
           <a:lstStyle>
             <a:lvl1pPr>
-              <a:defRPr sz="1400"/>
+              <a:defRPr sz="1100"/>
             </a:lvl1pPr>
             <a:lvl2pPr>
-              <a:defRPr sz="1150"/>
+              <a:defRPr sz="950"/>
             </a:lvl2pPr>
             <a:lvl3pPr>
-              <a:defRPr sz="1050"/>
+              <a:defRPr sz="850"/>
             </a:lvl3pPr>
             <a:lvl4pPr>
-              <a:defRPr sz="950"/>
+              <a:defRPr sz="750"/>
             </a:lvl4pPr>
             <a:lvl5pPr>
-              <a:defRPr sz="950"/>
+              <a:defRPr sz="750"/>
             </a:lvl5pPr>
             <a:lvl6pPr>
-              <a:defRPr sz="950"/>
+              <a:defRPr sz="750"/>
             </a:lvl6pPr>
             <a:lvl7pPr>
-              <a:defRPr sz="950"/>
+              <a:defRPr sz="750"/>
             </a:lvl7pPr>
             <a:lvl8pPr>
-              <a:defRPr sz="950"/>
+              <a:defRPr sz="750"/>
             </a:lvl8pPr>
             <a:lvl9pPr>
-              <a:defRPr sz="950"/>
+              <a:defRPr sz="750"/>
             </a:lvl9pPr>
           </a:lstStyle>
           <a:p>
@@ -2105,7 +2105,7 @@
           <a:bodyPr anchor="b"/>
           <a:lstStyle>
             <a:lvl1pPr algn="l">
-              <a:defRPr sz="1150" b="1"/>
+              <a:defRPr sz="950" b="1"/>
             </a:lvl1pPr>
           </a:lstStyle>
           <a:p>
@@ -2136,31 +2136,31 @@
           <a:bodyPr/>
           <a:lstStyle>
             <a:lvl1pPr>
-              <a:defRPr sz="1850"/>
+              <a:defRPr sz="1500"/>
             </a:lvl1pPr>
             <a:lvl2pPr>
-              <a:defRPr sz="1650"/>
+              <a:defRPr sz="1300"/>
             </a:lvl2pPr>
             <a:lvl3pPr>
-              <a:defRPr sz="1400"/>
+              <a:defRPr sz="1100"/>
             </a:lvl3pPr>
             <a:lvl4pPr>
-              <a:defRPr sz="1150"/>
+              <a:defRPr sz="950"/>
             </a:lvl4pPr>
             <a:lvl5pPr>
-              <a:defRPr sz="1150"/>
+              <a:defRPr sz="950"/>
             </a:lvl5pPr>
             <a:lvl6pPr>
-              <a:defRPr sz="1150"/>
+              <a:defRPr sz="950"/>
             </a:lvl6pPr>
             <a:lvl7pPr>
-              <a:defRPr sz="1150"/>
+              <a:defRPr sz="950"/>
             </a:lvl7pPr>
             <a:lvl8pPr>
-              <a:defRPr sz="1150"/>
+              <a:defRPr sz="950"/>
             </a:lvl8pPr>
             <a:lvl9pPr>
-              <a:defRPr sz="1150"/>
+              <a:defRPr sz="950"/>
             </a:lvl9pPr>
           </a:lstStyle>
           <a:p>
@@ -2221,39 +2221,39 @@
           <a:lstStyle>
             <a:lvl1pPr marL="0" indent="0">
               <a:buNone/>
-              <a:defRPr sz="800"/>
+              <a:defRPr sz="650"/>
             </a:lvl1pPr>
             <a:lvl2pPr marL="342900" indent="0">
               <a:buNone/>
-              <a:defRPr sz="700"/>
+              <a:defRPr sz="550"/>
             </a:lvl2pPr>
             <a:lvl3pPr marL="685800" indent="0">
               <a:buNone/>
-              <a:defRPr sz="700"/>
+              <a:defRPr sz="550"/>
             </a:lvl3pPr>
             <a:lvl4pPr marL="1028700" indent="0">
               <a:buNone/>
-              <a:defRPr sz="700"/>
+              <a:defRPr sz="550"/>
             </a:lvl4pPr>
             <a:lvl5pPr marL="1371600" indent="0">
               <a:buNone/>
-              <a:defRPr sz="700"/>
+              <a:defRPr sz="550"/>
             </a:lvl5pPr>
             <a:lvl6pPr marL="1714500" indent="0">
               <a:buNone/>
-              <a:defRPr sz="700"/>
+              <a:defRPr sz="550"/>
             </a:lvl6pPr>
             <a:lvl7pPr marL="2057400" indent="0">
               <a:buNone/>
-              <a:defRPr sz="700"/>
+              <a:defRPr sz="550"/>
             </a:lvl7pPr>
             <a:lvl8pPr marL="2400300" indent="0">
               <a:buNone/>
-              <a:defRPr sz="700"/>
+              <a:defRPr sz="550"/>
             </a:lvl8pPr>
             <a:lvl9pPr marL="2743200" indent="0">
               <a:buNone/>
-              <a:defRPr sz="700"/>
+              <a:defRPr sz="550"/>
             </a:lvl9pPr>
           </a:lstStyle>
           <a:p>
@@ -2380,7 +2380,7 @@
           <a:bodyPr anchor="b"/>
           <a:lstStyle>
             <a:lvl1pPr algn="l">
-              <a:defRPr sz="1150" b="1"/>
+              <a:defRPr sz="950" b="1"/>
             </a:lvl1pPr>
           </a:lstStyle>
           <a:p>
@@ -2412,39 +2412,39 @@
           <a:lstStyle>
             <a:lvl1pPr marL="0" indent="0">
               <a:buNone/>
-              <a:defRPr sz="1850"/>
+              <a:defRPr sz="1500"/>
             </a:lvl1pPr>
             <a:lvl2pPr marL="342900" indent="0">
               <a:buNone/>
-              <a:defRPr sz="1650"/>
+              <a:defRPr sz="1300"/>
             </a:lvl2pPr>
             <a:lvl3pPr marL="685800" indent="0">
               <a:buNone/>
-              <a:defRPr sz="1400"/>
+              <a:defRPr sz="1100"/>
             </a:lvl3pPr>
             <a:lvl4pPr marL="1028700" indent="0">
               <a:buNone/>
-              <a:defRPr sz="1150"/>
+              <a:defRPr sz="950"/>
             </a:lvl4pPr>
             <a:lvl5pPr marL="1371600" indent="0">
               <a:buNone/>
-              <a:defRPr sz="1150"/>
+              <a:defRPr sz="950"/>
             </a:lvl5pPr>
             <a:lvl6pPr marL="1714500" indent="0">
               <a:buNone/>
-              <a:defRPr sz="1150"/>
+              <a:defRPr sz="950"/>
             </a:lvl6pPr>
             <a:lvl7pPr marL="2057400" indent="0">
               <a:buNone/>
-              <a:defRPr sz="1150"/>
+              <a:defRPr sz="950"/>
             </a:lvl7pPr>
             <a:lvl8pPr marL="2400300" indent="0">
               <a:buNone/>
-              <a:defRPr sz="1150"/>
+              <a:defRPr sz="950"/>
             </a:lvl8pPr>
             <a:lvl9pPr marL="2743200" indent="0">
               <a:buNone/>
-              <a:defRPr sz="1150"/>
+              <a:defRPr sz="950"/>
             </a:lvl9pPr>
           </a:lstStyle>
           <a:p>
@@ -2473,39 +2473,39 @@
           <a:lstStyle>
             <a:lvl1pPr marL="0" indent="0">
               <a:buNone/>
-              <a:defRPr sz="800"/>
+              <a:defRPr sz="650"/>
             </a:lvl1pPr>
             <a:lvl2pPr marL="342900" indent="0">
               <a:buNone/>
-              <a:defRPr sz="700"/>
+              <a:defRPr sz="550"/>
             </a:lvl2pPr>
             <a:lvl3pPr marL="685800" indent="0">
               <a:buNone/>
-              <a:defRPr sz="700"/>
+              <a:defRPr sz="550"/>
             </a:lvl3pPr>
             <a:lvl4pPr marL="1028700" indent="0">
               <a:buNone/>
-              <a:defRPr sz="700"/>
+              <a:defRPr sz="550"/>
             </a:lvl4pPr>
             <a:lvl5pPr marL="1371600" indent="0">
               <a:buNone/>
-              <a:defRPr sz="700"/>
+              <a:defRPr sz="550"/>
             </a:lvl5pPr>
             <a:lvl6pPr marL="1714500" indent="0">
               <a:buNone/>
-              <a:defRPr sz="700"/>
+              <a:defRPr sz="550"/>
             </a:lvl6pPr>
             <a:lvl7pPr marL="2057400" indent="0">
               <a:buNone/>
-              <a:defRPr sz="700"/>
+              <a:defRPr sz="550"/>
             </a:lvl7pPr>
             <a:lvl8pPr marL="2400300" indent="0">
               <a:buNone/>
-              <a:defRPr sz="700"/>
+              <a:defRPr sz="550"/>
             </a:lvl8pPr>
             <a:lvl9pPr marL="2743200" indent="0">
               <a:buNone/>
-              <a:defRPr sz="700"/>
+              <a:defRPr sz="550"/>
             </a:lvl9pPr>
           </a:lstStyle>
           <a:p>
@@ -2733,7 +2733,7 @@
           <a:bodyPr anchor="ctr" bIns="45720" lIns="91440" rIns="91440" rtlCol="0" tIns="45720" vert="horz"/>
           <a:lstStyle>
             <a:lvl1pPr algn="l">
-              <a:defRPr sz="700">
+              <a:defRPr sz="550">
                 <a:solidFill>
                   <a:schemeClr val="tx1">
                     <a:tint val="75000"/>
@@ -2774,7 +2774,7 @@
           <a:bodyPr anchor="ctr" bIns="45720" lIns="91440" rIns="91440" rtlCol="0" tIns="45720" vert="horz"/>
           <a:lstStyle>
             <a:lvl1pPr algn="ctr">
-              <a:defRPr sz="700">
+              <a:defRPr sz="550">
                 <a:solidFill>
                   <a:schemeClr val="tx1">
                     <a:tint val="75000"/>
@@ -2811,7 +2811,7 @@
           <a:bodyPr anchor="ctr" bIns="45720" lIns="91440" rIns="91440" rtlCol="0" tIns="45720" vert="horz"/>
           <a:lstStyle>
             <a:lvl1pPr algn="r">
-              <a:defRPr sz="700">
+              <a:defRPr sz="550">
                 <a:solidFill>
                   <a:schemeClr val="tx1">
                     <a:tint val="75000"/>
@@ -2857,7 +2857,7 @@
           <a:spcPct val="0"/>
         </a:spcBef>
         <a:buNone/>
-        <a:defRPr kern="1200" sz="2550">
+        <a:defRPr kern="1200" sz="2050">
           <a:solidFill>
             <a:schemeClr val="tx1"/>
           </a:solidFill>
@@ -2874,7 +2874,7 @@
         </a:spcBef>
         <a:buFont typeface="Arial"/>
         <a:buChar char="•"/>
-        <a:defRPr kern="1200" sz="1850">
+        <a:defRPr kern="1200" sz="1500">
           <a:solidFill>
             <a:schemeClr val="tx1"/>
           </a:solidFill>
@@ -2889,7 +2889,7 @@
         </a:spcBef>
         <a:buFont typeface="Arial"/>
         <a:buChar char="–"/>
-        <a:defRPr kern="1200" sz="1650">
+        <a:defRPr kern="1200" sz="1300">
           <a:solidFill>
             <a:schemeClr val="tx1"/>
           </a:solidFill>
@@ -2904,7 +2904,7 @@
         </a:spcBef>
         <a:buFont typeface="Arial"/>
         <a:buChar char="•"/>
-        <a:defRPr kern="1200" sz="1400">
+        <a:defRPr kern="1200" sz="1100">
           <a:solidFill>
             <a:schemeClr val="tx1"/>
           </a:solidFill>
@@ -2919,7 +2919,7 @@
         </a:spcBef>
         <a:buFont typeface="Arial"/>
         <a:buChar char="–"/>
-        <a:defRPr kern="1200" sz="1150">
+        <a:defRPr kern="1200" sz="950">
           <a:solidFill>
             <a:schemeClr val="tx1"/>
           </a:solidFill>
@@ -2934,7 +2934,7 @@
         </a:spcBef>
         <a:buFont typeface="Arial"/>
         <a:buChar char="»"/>
-        <a:defRPr kern="1200" sz="1150">
+        <a:defRPr kern="1200" sz="950">
           <a:solidFill>
             <a:schemeClr val="tx1"/>
           </a:solidFill>
@@ -2949,7 +2949,7 @@
         </a:spcBef>
         <a:buFont typeface="Arial"/>
         <a:buChar char="•"/>
-        <a:defRPr kern="1200" sz="1150">
+        <a:defRPr kern="1200" sz="950">
           <a:solidFill>
             <a:schemeClr val="tx1"/>
           </a:solidFill>
@@ -2964,7 +2964,7 @@
         </a:spcBef>
         <a:buFont typeface="Arial"/>
         <a:buChar char="•"/>
-        <a:defRPr kern="1200" sz="1150">
+        <a:defRPr kern="1200" sz="950">
           <a:solidFill>
             <a:schemeClr val="tx1"/>
           </a:solidFill>
@@ -2979,7 +2979,7 @@
         </a:spcBef>
         <a:buFont typeface="Arial"/>
         <a:buChar char="•"/>
-        <a:defRPr kern="1200" sz="1150">
+        <a:defRPr kern="1200" sz="950">
           <a:solidFill>
             <a:schemeClr val="tx1"/>
           </a:solidFill>
@@ -2994,7 +2994,7 @@
         </a:spcBef>
         <a:buFont typeface="Arial"/>
         <a:buChar char="•"/>
-        <a:defRPr kern="1200" sz="1150">
+        <a:defRPr kern="1200" sz="950">
           <a:solidFill>
             <a:schemeClr val="tx1"/>
           </a:solidFill>
@@ -3009,7 +3009,7 @@
         <a:defRPr lang="en-US"/>
       </a:defPPr>
       <a:lvl1pPr algn="l" defTabSz="342900" eaLnBrk="1" hangingPunct="1" latinLnBrk="0" marL="0" rtl="0">
-        <a:defRPr kern="1200" sz="1050">
+        <a:defRPr kern="1200" sz="850">
           <a:solidFill>
             <a:schemeClr val="tx1"/>
           </a:solidFill>
@@ -3019,7 +3019,7 @@
         </a:defRPr>
       </a:lvl1pPr>
       <a:lvl2pPr algn="l" defTabSz="342900" eaLnBrk="1" hangingPunct="1" latinLnBrk="0" marL="342900" rtl="0">
-        <a:defRPr kern="1200" sz="1050">
+        <a:defRPr kern="1200" sz="850">
           <a:solidFill>
             <a:schemeClr val="tx1"/>
           </a:solidFill>
@@ -3029,7 +3029,7 @@
         </a:defRPr>
       </a:lvl2pPr>
       <a:lvl3pPr algn="l" defTabSz="342900" eaLnBrk="1" hangingPunct="1" latinLnBrk="0" marL="685800" rtl="0">
-        <a:defRPr kern="1200" sz="1050">
+        <a:defRPr kern="1200" sz="850">
           <a:solidFill>
             <a:schemeClr val="tx1"/>
           </a:solidFill>
@@ -3039,7 +3039,7 @@
         </a:defRPr>
       </a:lvl3pPr>
       <a:lvl4pPr algn="l" defTabSz="342900" eaLnBrk="1" hangingPunct="1" latinLnBrk="0" marL="1028700" rtl="0">
-        <a:defRPr kern="1200" sz="1050">
+        <a:defRPr kern="1200" sz="850">
           <a:solidFill>
             <a:schemeClr val="tx1"/>
           </a:solidFill>
@@ -3049,7 +3049,7 @@
         </a:defRPr>
       </a:lvl4pPr>
       <a:lvl5pPr algn="l" defTabSz="342900" eaLnBrk="1" hangingPunct="1" latinLnBrk="0" marL="1371600" rtl="0">
-        <a:defRPr kern="1200" sz="1050">
+        <a:defRPr kern="1200" sz="850">
           <a:solidFill>
             <a:schemeClr val="tx1"/>
           </a:solidFill>
@@ -3059,7 +3059,7 @@
         </a:defRPr>
       </a:lvl5pPr>
       <a:lvl6pPr algn="l" defTabSz="342900" eaLnBrk="1" hangingPunct="1" latinLnBrk="0" marL="1714500" rtl="0">
-        <a:defRPr kern="1200" sz="1050">
+        <a:defRPr kern="1200" sz="850">
           <a:solidFill>
             <a:schemeClr val="tx1"/>
           </a:solidFill>
@@ -3069,7 +3069,7 @@
         </a:defRPr>
       </a:lvl6pPr>
       <a:lvl7pPr algn="l" defTabSz="342900" eaLnBrk="1" hangingPunct="1" latinLnBrk="0" marL="2057400" rtl="0">
-        <a:defRPr kern="1200" sz="1050">
+        <a:defRPr kern="1200" sz="850">
           <a:solidFill>
             <a:schemeClr val="tx1"/>
           </a:solidFill>
@@ -3079,7 +3079,7 @@
         </a:defRPr>
       </a:lvl7pPr>
       <a:lvl8pPr algn="l" defTabSz="342900" eaLnBrk="1" hangingPunct="1" latinLnBrk="0" marL="2400300" rtl="0">
-        <a:defRPr kern="1200" sz="1050">
+        <a:defRPr kern="1200" sz="850">
           <a:solidFill>
             <a:schemeClr val="tx1"/>
           </a:solidFill>
@@ -3089,7 +3089,7 @@
         </a:defRPr>
       </a:lvl8pPr>
       <a:lvl9pPr algn="l" defTabSz="342900" eaLnBrk="1" hangingPunct="1" latinLnBrk="0" marL="2743200" rtl="0">
-        <a:defRPr kern="1200" sz="1050">
+        <a:defRPr kern="1200" sz="850">
           <a:solidFill>
             <a:schemeClr val="tx1"/>
           </a:solidFill>

--- a/09-clustering-and-text-as-data/slides.pptx
+++ b/09-clustering-and-text-as-data/slides.pptx
@@ -2826,6 +2826,72 @@
               <a:t>‹#›</a:t>
             </a:fld>
             <a:endParaRPr lang="en-US"/>
+          </a:p>
+        </p:txBody>
+      </p:sp>
+      <p:sp>
+        <p:nvSpPr>
+          <p:cNvPr id="7" name="Author Footer"/>
+          <p:cNvSpPr txBox="1"/>
+          <p:nvPr/>
+        </p:nvSpPr>
+        <p:spPr>
+          <a:xfrm>
+            <a:off x="457200" y="4735000"/>
+            <a:ext cx="5000000" cy="260000"/>
+          </a:xfrm>
+          <a:prstGeom prst="rect">
+            <a:avLst/>
+          </a:prstGeom>
+          <a:noFill/>
+        </p:spPr>
+        <p:txBody>
+          <a:bodyPr anchor="ctr" bIns="0" lIns="0" rIns="0" tIns="0" wrap="square"/>
+          <a:lstStyle/>
+          <a:p>
+            <a:pPr algn="l"/>
+            <a:r>
+              <a:rPr dirty="0" lang="en-US" sz="900">
+                <a:solidFill>
+                  <a:srgbClr val="6E7275"/>
+                </a:solidFill>
+                <a:latin typeface="+mn-lt"/>
+              </a:rPr>
+              <a:t>Thierry Warin, PhD</a:t>
+            </a:r>
+          </a:p>
+        </p:txBody>
+      </p:sp>
+      <p:sp>
+        <p:nvSpPr>
+          <p:cNvPr id="8" name="Slide Number Footer"/>
+          <p:cNvSpPr txBox="1"/>
+          <p:nvPr/>
+        </p:nvSpPr>
+        <p:spPr>
+          <a:xfrm>
+            <a:off x="7200000" y="4735000"/>
+            <a:ext cx="1486800" cy="260000"/>
+          </a:xfrm>
+          <a:prstGeom prst="rect">
+            <a:avLst/>
+          </a:prstGeom>
+          <a:noFill/>
+        </p:spPr>
+        <p:txBody>
+          <a:bodyPr anchor="ctr" bIns="0" lIns="0" rIns="0" tIns="0" wrap="square"/>
+          <a:lstStyle/>
+          <a:p>
+            <a:pPr algn="r"/>
+            <a:fld id="{9B1A2C3D-4E5F-6A7B-8C9D-0E1F2A3B4C5D}" type="slidenum">
+              <a:rPr dirty="0" lang="en-US" sz="900">
+                <a:solidFill>
+                  <a:srgbClr val="6E7275"/>
+                </a:solidFill>
+                <a:latin typeface="+mn-lt"/>
+              </a:rPr>
+              <a:t>2</a:t>
+            </a:fld>
           </a:p>
         </p:txBody>
       </p:sp>
@@ -3206,7 +3272,7 @@
             </a:pPr>
             <a:r>
               <a:rPr/>
-              <a:t>18 August 2026</a:t>
+              <a:t>19 August 2026</a:t>
             </a:r>
           </a:p>
         </p:txBody>

--- a/09-clustering-and-text-as-data/slides.pptx
+++ b/09-clustering-and-text-as-data/slides.pptx
@@ -35,7 +35,6 @@
     <p:sldId id="283" r:id="rId29"/>
     <p:sldId id="284" r:id="rId30"/>
     <p:sldId id="285" r:id="rId31"/>
-    <p:sldId id="286" r:id="rId32"/>
   </p:sldIdLst>
   <p:sldSz cx="9144000" cy="5143500" type="screen16x9"/>
   <p:notesSz cx="6858000" cy="9144000"/>
@@ -3211,7 +3210,7 @@
             </a:pPr>
             <a:r>
               <a:rPr/>
-              <a:t>Clustering, Embeddings, and Text as Data</a:t>
+              <a:t>Unsupervised II: Clustering, Embeddings, Text as Data</a:t>
             </a:r>
           </a:p>
         </p:txBody>
@@ -3241,7 +3240,7 @@
             </a:pPr>
             <a:r>
               <a:rPr/>
-              <a:t>Session 09 · Measuring what institutions talk about, and what that measurement is worth</a:t>
+              <a:t>Session 09 · Lecture, first half</a:t>
             </a:r>
             <a:br/>
             <a:br/>
@@ -3272,7 +3271,7 @@
             </a:pPr>
             <a:r>
               <a:rPr/>
-              <a:t>19 August 2026</a:t>
+              <a:t>20 August 2026</a:t>
             </a:r>
           </a:p>
         </p:txBody>
@@ -3301,15 +3300,20 @@
       </p:grpSpPr>
       <p:sp>
         <p:nvSpPr>
-          <p:cNvPr id="3" name="Content Placeholder 2"/>
-          <p:cNvSpPr>
-            <a:spLocks noGrp="1"/>
-          </p:cNvSpPr>
-          <p:nvPr>
-            <p:ph idx="1"/>
-          </p:nvPr>
-        </p:nvSpPr>
-        <p:spPr/>
+          <p:cNvPr id="2" name="Title 1"/>
+          <p:cNvSpPr>
+            <a:spLocks noGrp="1"/>
+          </p:cNvSpPr>
+          <p:nvPr>
+            <p:ph type="title"/>
+          </p:nvPr>
+        </p:nvSpPr>
+        <p:spPr>
+          <a:xfrm>
+            <a:off x="722313" y="3305176"/>
+            <a:ext cx="7772400" cy="1021556"/>
+          </a:xfrm>
+        </p:spPr>
         <p:txBody>
           <a:bodyPr/>
           <a:lstStyle/>
@@ -3319,7 +3323,7 @@
             </a:pPr>
             <a:r>
               <a:rPr/>
-              <a:t>Stability is the one that matters for a claim. If a country changes cluster across bootstrap resamples, your typology is not a finding.</a:t>
+              <a:t>9.2 Hierarchical clustering</a:t>
             </a:r>
           </a:p>
         </p:txBody>
@@ -3329,7 +3333,143 @@
 </p:sld>
 </file>
 
-<file path=ppt/slides/slide11.xml><?xml version="1.0" encoding="utf-8"?>
+<file path=ppt/slides/slide11.xml><?xml version="1.0" encoding="UTF-8"?><p:sld xmlns:a="http://schemas.openxmlformats.org/drawingml/2006/main" xmlns:r="http://schemas.openxmlformats.org/officeDocument/2006/relationships" xmlns:p="http://schemas.openxmlformats.org/presentationml/2006/main"><p:cSld><p:spTree><p:nvGrpSpPr><p:cNvPr id="1" name="" /><p:cNvGrpSpPr /><p:nvPr /></p:nvGrpSpPr><p:grpSpPr><a:xfrm><a:off x="0" y="0" /><a:ext cx="0" cy="0" /><a:chOff x="0" y="0" /><a:chExt cx="0" cy="0" /></a:xfrm></p:grpSpPr><p:sp><p:nvSpPr><p:cNvPr id="2" name="Title 1" /><p:cNvSpPr><a:spLocks noGrp="1" /></p:cNvSpPr><p:nvPr><p:ph type="title" /></p:nvPr></p:nvSpPr><p:spPr><a:xfrm><a:off x="457201" y="204787" /><a:ext cx="3008313" cy="871538" /></a:xfrm></p:spPr><p:txBody><a:bodyPr /><a:lstStyle /><a:p><a:pPr lvl="0" indent="0" marL="0"><a:buNone /></a:pPr><a:r><a:rPr /><a:t>Linkage defines “closest”</a:t></a:r></a:p></p:txBody></p:sp><p:sp><p:nvSpPr><p:cNvPr id="4" name="Text Placeholder 3" /><p:cNvSpPr><a:spLocks noGrp="1" /></p:cNvSpPr><p:nvPr><p:ph idx="2" sz="half" type="body" /></p:nvPr></p:nvSpPr><p:spPr /><p:txBody><a:bodyPr /><a:lstStyle /><a:p><a:pPr lvl="0" indent="0" marL="0"><a:buNone /></a:pPr><a:r><a:rPr /><a:t>Build a dendrogram bottom-up, merging the two closest clusters at each step.</a:t></a:r></a:p></p:txBody></p:sp><p:graphicFrame><p:nvGraphicFramePr><p:cNvPr id="6" name="Content Placeholder 5" /><p:cNvGraphicFramePr><a:graphicFrameLocks noGrp="1" /></p:cNvGraphicFramePr><p:nvPr><p:ph idx="1" /></p:nvPr></p:nvGraphicFramePr><p:xfrm><a:off x="3568700" y="203200" /><a:ext cx="5105400" cy="4381500" /></p:xfrm><a:graphic><a:graphicData uri="http://schemas.openxmlformats.org/drawingml/2006/table"><a:tbl><a:tblPr firstRow="1" bandRow="1"><a:tableStyleId>{5C22544A-7EE6-4342-B048-85BDC9FD1C3A}</a:tableStyleId></a:tblPr><a:tblGrid><a:gridCol w="1701800" /><a:gridCol w="1701800" /><a:gridCol w="1701800" /></a:tblGrid><a:tr h="0"><a:tc><a:txBody><a:bodyPr /><a:lstStyle /><a:p><a:pPr lvl="0" indent="0" marL="0"><a:buNone /></a:pPr><a:r><a:rPr /><a:t>Linkage</a:t></a:r></a:p></a:txBody><a:tcPr /></a:tc><a:tc><a:txBody><a:bodyPr /><a:lstStyle /><a:p><a:pPr lvl="0" indent="0" marL="0"><a:buNone /></a:pPr><a14:m><m:oMath xmlns:m="http://schemas.openxmlformats.org/officeDocument/2006/math"><m:r><m:t>d</m:t></m:r><m:d><m:dPr><m:begChr m:val="(" /><m:sepChr m:val="" /><m:endChr m:val=")" /><m:grow /></m:dPr><m:e><m:r><m:t>A</m:t></m:r><m:r><m:rPr><m:sty m:val="p" /></m:rPr><m:t>,</m:t></m:r><m:r><m:t>B</m:t></m:r></m:e></m:d></m:oMath></a14:m></a:p></a:txBody><a:tcPr /></a:tc><a:tc><a:txBody><a:bodyPr /><a:lstStyle /><a:p><a:pPr lvl="0" indent="0" marL="0"><a:buNone /></a:pPr><a:r><a:rPr /><a:t>Behaviour</a:t></a:r></a:p></a:txBody><a:tcPr /></a:tc></a:tr><a:tr h="0"><a:tc><a:txBody><a:bodyPr /><a:lstStyle /><a:p><a:pPr lvl="0" indent="0" marL="0"><a:buNone /></a:pPr><a:r><a:rPr /><a:t>Single</a:t></a:r></a:p></a:txBody></a:tc><a:tc><a:txBody><a:bodyPr /><a:lstStyle /><a:p><a:pPr lvl="0" indent="0" marL="0"><a:buNone /></a:pPr><a14:m><m:oMath xmlns:m="http://schemas.openxmlformats.org/officeDocument/2006/math"><m:sSub><m:e><m:r><m:rPr><m:sty m:val="p" /></m:rPr><m:t>min</m:t></m:r></m:e><m:sub><m:r><m:t>a</m:t></m:r><m:r><m:rPr><m:sty m:val="p" /></m:rPr><m:t>,</m:t></m:r><m:r><m:t>b</m:t></m:r></m:sub></m:sSub><m:r><m:rPr><m:sty m:val="p" /></m:rPr><m:t>∥</m:t></m:r><m:r><m:t>a</m:t></m:r><m:r><m:rPr><m:sty m:val="p" /></m:rPr><m:t>−</m:t></m:r><m:r><m:t>b</m:t></m:r><m:r><m:rPr><m:sty m:val="p" /></m:rPr><m:t>∥</m:t></m:r></m:oMath></a14:m></a:p></a:txBody></a:tc><a:tc><a:txBody><a:bodyPr /><a:lstStyle /><a:p><a:pPr lvl="0" indent="0" marL="0"><a:buNone /></a:pPr><a:r><a:rPr /><a:t>Chaining; elongated shapes; unstable</a:t></a:r></a:p></a:txBody></a:tc></a:tr><a:tr h="0"><a:tc><a:txBody><a:bodyPr /><a:lstStyle /><a:p><a:pPr lvl="0" indent="0" marL="0"><a:buNone /></a:pPr><a:r><a:rPr /><a:t>Complete</a:t></a:r></a:p></a:txBody></a:tc><a:tc><a:txBody><a:bodyPr /><a:lstStyle /><a:p><a:pPr lvl="0" indent="0" marL="0"><a:buNone /></a:pPr><a14:m><m:oMath xmlns:m="http://schemas.openxmlformats.org/officeDocument/2006/math"><m:sSub><m:e><m:r><m:rPr><m:sty m:val="p" /></m:rPr><m:t>max</m:t></m:r></m:e><m:sub><m:r><m:t>a</m:t></m:r><m:r><m:rPr><m:sty m:val="p" /></m:rPr><m:t>,</m:t></m:r><m:r><m:t>b</m:t></m:r></m:sub></m:sSub><m:r><m:rPr><m:sty m:val="p" /></m:rPr><m:t>∥</m:t></m:r><m:r><m:t>a</m:t></m:r><m:r><m:rPr><m:sty m:val="p" /></m:rPr><m:t>−</m:t></m:r><m:r><m:t>b</m:t></m:r><m:r><m:rPr><m:sty m:val="p" /></m:rPr><m:t>∥</m:t></m:r></m:oMath></a14:m></a:p></a:txBody></a:tc><a:tc><a:txBody><a:bodyPr /><a:lstStyle /><a:p><a:pPr lvl="0" indent="0" marL="0"><a:buNone /></a:pPr><a:r><a:rPr /><a:t>Compact, similar-diameter clusters</a:t></a:r></a:p></a:txBody></a:tc></a:tr><a:tr h="0"><a:tc><a:txBody><a:bodyPr /><a:lstStyle /><a:p><a:pPr lvl="0" indent="0" marL="0"><a:buNone /></a:pPr><a:r><a:rPr /><a:t>Average</a:t></a:r></a:p></a:txBody></a:tc><a:tc><a:txBody><a:bodyPr /><a:lstStyle /><a:p><a:pPr lvl="0" indent="0" marL="0"><a:buNone /></a:pPr><a:r><a:rPr /><a:t>mean pairwise distance</a:t></a:r></a:p></a:txBody></a:tc><a:tc><a:txBody><a:bodyPr /><a:lstStyle /><a:p><a:pPr lvl="0" indent="0" marL="0"><a:buNone /></a:pPr><a:r><a:rPr /><a:t>Compromise; not invariant to monotone transforms</a:t></a:r></a:p></a:txBody></a:tc></a:tr><a:tr h="0"><a:tc><a:txBody><a:bodyPr /><a:lstStyle /><a:p><a:pPr lvl="0" indent="0" marL="0"><a:buNone /></a:pPr><a:r><a:rPr b="1" /><a:t>Ward</a:t></a:r></a:p></a:txBody></a:tc><a:tc><a:txBody><a:bodyPr /><a:lstStyle /><a:p><a:pPr lvl="0" indent="0" marL="0"><a:buNone /></a:pPr><a:r><a:rPr /><a:t>increase in within-cluster SS</a:t></a:r></a:p></a:txBody></a:tc><a:tc><a:txBody><a:bodyPr /><a:lstStyle /><a:p><a:pPr lvl="0" indent="0" marL="0"><a:buNone /></a:pPr><a:r><a:rPr /><a:t>Same criterion as </a:t></a:r><a14:m><m:oMath xmlns:m="http://schemas.openxmlformats.org/officeDocument/2006/math"><m:r><m:t>k</m:t></m:r></m:oMath></a14:m><a:r><a:rPr /><a:t>-means; the default to try</a:t></a:r></a:p></a:txBody></a:tc></a:tr></a:tbl></a:graphicData></a:graphic></p:graphicFrame></p:spTree></p:cSld></p:sld>
+</file>
+
+<file path=ppt/slides/slide12.xml><?xml version="1.0" encoding="utf-8"?>
+<p:sld xmlns:a="http://schemas.openxmlformats.org/drawingml/2006/main" xmlns:r="http://schemas.openxmlformats.org/officeDocument/2006/relationships" xmlns:p="http://schemas.openxmlformats.org/presentationml/2006/main">
+  <p:cSld>
+    <p:spTree>
+      <p:nvGrpSpPr>
+        <p:cNvPr id="1" name=""/>
+        <p:cNvGrpSpPr/>
+        <p:nvPr/>
+      </p:nvGrpSpPr>
+      <p:grpSpPr>
+        <a:xfrm>
+          <a:off x="0" y="0"/>
+          <a:ext cx="0" cy="0"/>
+          <a:chOff x="0" y="0"/>
+          <a:chExt cx="0" cy="0"/>
+        </a:xfrm>
+      </p:grpSpPr>
+      <p:sp>
+        <p:nvSpPr>
+          <p:cNvPr id="2" name="Title 1"/>
+          <p:cNvSpPr>
+            <a:spLocks noGrp="1"/>
+          </p:cNvSpPr>
+          <p:nvPr>
+            <p:ph type="title"/>
+          </p:nvPr>
+        </p:nvSpPr>
+        <p:spPr/>
+        <p:txBody>
+          <a:bodyPr/>
+          <a:lstStyle/>
+          <a:p>
+            <a:pPr lvl="0" indent="0" marL="0">
+              <a:buNone/>
+            </a:pPr>
+            <a:r>
+              <a:rPr/>
+              <a:t>The trade</a:t>
+            </a:r>
+          </a:p>
+        </p:txBody>
+      </p:sp>
+      <mc:AlternateContent xmlns:mc="http://schemas.openxmlformats.org/markup-compatibility/2006">
+        <mc:Choice xmlns:a14="http://schemas.microsoft.com/office/drawing/2010/main" Requires="a14">
+          <p:sp>
+            <p:nvSpPr>
+              <p:cNvPr id="3" name="Content Placeholder 2"/>
+              <p:cNvSpPr>
+                <a:spLocks noGrp="1"/>
+              </p:cNvSpPr>
+              <p:nvPr>
+                <p:ph idx="1"/>
+              </p:nvPr>
+            </p:nvSpPr>
+            <p:spPr/>
+            <p:txBody>
+              <a:bodyPr/>
+              <a:lstStyle/>
+              <a:p>
+                <a:pPr lvl="0"/>
+                <a:r>
+                  <a:rPr b="1"/>
+                  <a:t>Advantage:</a:t>
+                </a:r>
+                <a:r>
+                  <a:rPr/>
+                  <a:t> you need not fix </a:t>
+                </a:r>
+                <a14:m>
+                  <m:oMath xmlns:m="http://schemas.openxmlformats.org/officeDocument/2006/math">
+                    <m:r>
+                      <m:t>k</m:t>
+                    </m:r>
+                  </m:oMath>
+                </a14:m>
+                <a:r>
+                  <a:rPr/>
+                  <a:t> in advance — the dendrogram shows structure at every resolution</a:t>
+                </a:r>
+              </a:p>
+              <a:p>
+                <a:pPr lvl="0"/>
+                <a:r>
+                  <a:rPr b="1"/>
+                  <a:t>Cost:</a:t>
+                </a:r>
+                <a:r>
+                  <a:rPr/>
+                  <a:t> </a:t>
+                </a:r>
+                <a14:m>
+                  <m:oMath xmlns:m="http://schemas.openxmlformats.org/officeDocument/2006/math">
+                    <m:r>
+                      <m:t>O</m:t>
+                    </m:r>
+                    <m:d>
+                      <m:dPr>
+                        <m:begChr m:val="("/>
+                        <m:sepChr m:val=""/>
+                        <m:endChr m:val=")"/>
+                        <m:grow/>
+                      </m:dPr>
+                      <m:e>
+                        <m:sSup>
+                          <m:e>
+                            <m:r>
+                              <m:t>n</m:t>
+                            </m:r>
+                          </m:e>
+                          <m:sup>
+                            <m:r>
+                              <m:t>2</m:t>
+                            </m:r>
+                          </m:sup>
+                        </m:sSup>
+                      </m:e>
+                    </m:d>
+                  </m:oMath>
+                </a14:m>
+                <a:r>
+                  <a:rPr/>
+                  <a:t> memory</a:t>
+                </a:r>
+              </a:p>
+            </p:txBody>
+          </p:sp>
+        </mc:Choice>
+      </mc:AlternateContent>
+    </p:spTree>
+  </p:cSld>
+</p:sld>
+</file>
+
+<file path=ppt/slides/slide13.xml><?xml version="1.0" encoding="utf-8"?>
 <p:sld xmlns:a="http://schemas.openxmlformats.org/drawingml/2006/main" xmlns:r="http://schemas.openxmlformats.org/officeDocument/2006/relationships" xmlns:p="http://schemas.openxmlformats.org/presentationml/2006/main">
   <p:cSld>
     <p:spTree>
@@ -3358,7 +3498,12 @@
                 <p:ph type="title"/>
               </p:nvPr>
             </p:nvSpPr>
-            <p:spPr/>
+            <p:spPr>
+              <a:xfrm>
+                <a:off x="722313" y="3305176"/>
+                <a:ext cx="7772400" cy="1021556"/>
+              </a:xfrm>
+            </p:spPr>
             <p:txBody>
               <a:bodyPr/>
               <a:lstStyle/>
@@ -3366,16 +3511,9 @@
                 <a:pPr lvl="0" indent="0" marL="0">
                   <a:buNone/>
                 </a:pPr>
-                <a14:m>
-                  <m:oMath xmlns:m="http://schemas.openxmlformats.org/officeDocument/2006/math">
-                    <m:r>
-                      <m:t>k</m:t>
-                    </m:r>
-                  </m:oMath>
-                </a14:m>
                 <a:r>
                   <a:rPr/>
-                  <a:t>-means will always return </a:t>
+                  <a:t>9.3 Choosing </a:t>
                 </a:r>
                 <a14:m>
                   <m:oMath xmlns:m="http://schemas.openxmlformats.org/officeDocument/2006/math">
@@ -3384,15 +3522,58 @@
                     </m:r>
                   </m:oMath>
                 </a14:m>
-                <a:r>
-                  <a:rPr/>
-                  <a:t> clusters</a:t>
-                </a:r>
               </a:p>
             </p:txBody>
           </p:sp>
         </mc:Choice>
       </mc:AlternateContent>
+    </p:spTree>
+  </p:cSld>
+</p:sld>
+</file>
+
+<file path=ppt/slides/slide14.xml><?xml version="1.0" encoding="utf-8"?>
+<p:sld xmlns:a="http://schemas.openxmlformats.org/drawingml/2006/main" xmlns:r="http://schemas.openxmlformats.org/officeDocument/2006/relationships" xmlns:p="http://schemas.openxmlformats.org/presentationml/2006/main">
+  <p:cSld>
+    <p:spTree>
+      <p:nvGrpSpPr>
+        <p:cNvPr id="1" name=""/>
+        <p:cNvGrpSpPr/>
+        <p:nvPr/>
+      </p:nvGrpSpPr>
+      <p:grpSpPr>
+        <a:xfrm>
+          <a:off x="0" y="0"/>
+          <a:ext cx="0" cy="0"/>
+          <a:chOff x="0" y="0"/>
+          <a:chExt cx="0" cy="0"/>
+        </a:xfrm>
+      </p:grpSpPr>
+      <p:sp>
+        <p:nvSpPr>
+          <p:cNvPr id="2" name="Title 1"/>
+          <p:cNvSpPr>
+            <a:spLocks noGrp="1"/>
+          </p:cNvSpPr>
+          <p:nvPr>
+            <p:ph type="title"/>
+          </p:nvPr>
+        </p:nvSpPr>
+        <p:spPr/>
+        <p:txBody>
+          <a:bodyPr/>
+          <a:lstStyle/>
+          <a:p>
+            <a:pPr lvl="0" indent="0" marL="0">
+              <a:buNone/>
+            </a:pPr>
+            <a:r>
+              <a:rPr/>
+              <a:t>Elbow</a:t>
+            </a:r>
+          </a:p>
+        </p:txBody>
+      </p:sp>
       <mc:AlternateContent xmlns:mc="http://schemas.openxmlformats.org/markup-compatibility/2006">
         <mc:Choice xmlns:a14="http://schemas.microsoft.com/office/drawing/2010/main" Requires="a14">
           <p:sp>
@@ -3415,7 +3596,26 @@
                 </a:pPr>
                 <a:r>
                   <a:rPr/>
-                  <a:t>Even in data with no structure at all. The algorithm cannot tell you that the answer is “there are no types” — it will happily partition noise.</a:t>
+                  <a:t>Plot within-cluster SS against </a:t>
+                </a:r>
+                <a14:m>
+                  <m:oMath xmlns:m="http://schemas.openxmlformats.org/officeDocument/2006/math">
+                    <m:r>
+                      <m:t>k</m:t>
+                    </m:r>
+                  </m:oMath>
+                </a14:m>
+                <a:r>
+                  <a:rPr/>
+                  <a:t>. It </a:t>
+                </a:r>
+                <a:r>
+                  <a:rPr b="1"/>
+                  <a:t>always</a:t>
+                </a:r>
+                <a:r>
+                  <a:rPr/>
+                  <a:t> decreases, so look for a kink.</a:t>
                 </a:r>
               </a:p>
               <a:p>
@@ -3424,440 +3624,13 @@
                 </a:pPr>
                 <a:r>
                   <a:rPr/>
-                  <a:t>The spine contains </a:t>
-                </a:r>
-                <a:r>
-                  <a:rPr b="1"/>
-                  <a:t>four</a:t>
-                </a:r>
-                <a:r>
-                  <a:rPr/>
-                  <a:t> country types by construction — and the silhouette score on the country profiles is </a:t>
-                </a:r>
-                <a:r>
-                  <a:rPr b="1"/>
-                  <a:t>highest at </a:t>
-                </a:r>
-                <a14:m>
-                  <m:oMath xmlns:m="http://schemas.openxmlformats.org/officeDocument/2006/math">
-                    <m:r>
-                      <m:t>k</m:t>
-                    </m:r>
-                    <m:r>
-                      <m:rPr>
-                        <m:sty m:val="p"/>
-                      </m:rPr>
-                      <m:t>=</m:t>
-                    </m:r>
-                    <m:r>
-                      <m:t>6</m:t>
-                    </m:r>
-                  </m:oMath>
-                </a14:m>
-                <a:r>
-                  <a:rPr/>
-                  <a:t>, not at 4.</a:t>
-                </a:r>
-              </a:p>
-              <a:p>
-                <a:pPr lvl="0" indent="0" marL="0">
-                  <a:buNone/>
-                </a:pPr>
-                <a:r>
-                  <a:rPr/>
-                  <a:t>Read that again. On data where we </a:t>
-                </a:r>
-                <a:r>
-                  <a:rPr i="1"/>
-                  <a:t>know</a:t>
-                </a:r>
-                <a:r>
-                  <a:rPr/>
-                  <a:t> the answer is four, the standard diagnostic points to six, and does so with a perfectly respectable-looking score. This is not a trick example. It is the normal situation, and you would never have known.</a:t>
+                  <a:t>Often no kink exists. A single elbow plot is not evidence.</a:t>
                 </a:r>
               </a:p>
             </p:txBody>
           </p:sp>
         </mc:Choice>
       </mc:AlternateContent>
-    </p:spTree>
-  </p:cSld>
-</p:sld>
-</file>
-
-<file path=ppt/slides/slide12.xml><?xml version="1.0" encoding="utf-8"?>
-<p:sld xmlns:a="http://schemas.openxmlformats.org/drawingml/2006/main" xmlns:r="http://schemas.openxmlformats.org/officeDocument/2006/relationships" xmlns:p="http://schemas.openxmlformats.org/presentationml/2006/main">
-  <p:cSld>
-    <p:spTree>
-      <p:nvGrpSpPr>
-        <p:cNvPr id="1" name=""/>
-        <p:cNvGrpSpPr/>
-        <p:nvPr/>
-      </p:nvGrpSpPr>
-      <p:grpSpPr>
-        <a:xfrm>
-          <a:off x="0" y="0"/>
-          <a:ext cx="0" cy="0"/>
-          <a:chOff x="0" y="0"/>
-          <a:chExt cx="0" cy="0"/>
-        </a:xfrm>
-      </p:grpSpPr>
-      <p:sp>
-        <p:nvSpPr>
-          <p:cNvPr id="2" name="Title 1"/>
-          <p:cNvSpPr>
-            <a:spLocks noGrp="1"/>
-          </p:cNvSpPr>
-          <p:nvPr>
-            <p:ph type="title"/>
-          </p:nvPr>
-        </p:nvSpPr>
-        <p:spPr>
-          <a:xfrm>
-            <a:off x="722313" y="3305176"/>
-            <a:ext cx="7772400" cy="1021556"/>
-          </a:xfrm>
-        </p:spPr>
-        <p:txBody>
-          <a:bodyPr/>
-          <a:lstStyle/>
-          <a:p>
-            <a:pPr lvl="0" indent="0" marL="0">
-              <a:buNone/>
-            </a:pPr>
-            <a:r>
-              <a:rPr/>
-              <a:t>Text</a:t>
-            </a:r>
-          </a:p>
-        </p:txBody>
-      </p:sp>
-    </p:spTree>
-  </p:cSld>
-</p:sld>
-</file>
-
-<file path=ppt/slides/slide13.xml><?xml version="1.0" encoding="utf-8"?>
-<p:sld xmlns:a="http://schemas.openxmlformats.org/drawingml/2006/main" xmlns:r="http://schemas.openxmlformats.org/officeDocument/2006/relationships" xmlns:p="http://schemas.openxmlformats.org/presentationml/2006/main">
-  <p:cSld>
-    <p:spTree>
-      <p:nvGrpSpPr>
-        <p:cNvPr id="1" name=""/>
-        <p:cNvGrpSpPr/>
-        <p:nvPr/>
-      </p:nvGrpSpPr>
-      <p:grpSpPr>
-        <a:xfrm>
-          <a:off x="0" y="0"/>
-          <a:ext cx="0" cy="0"/>
-          <a:chOff x="0" y="0"/>
-          <a:chExt cx="0" cy="0"/>
-        </a:xfrm>
-      </p:grpSpPr>
-      <p:sp>
-        <p:nvSpPr>
-          <p:cNvPr id="2" name="Title 1"/>
-          <p:cNvSpPr>
-            <a:spLocks noGrp="1"/>
-          </p:cNvSpPr>
-          <p:nvPr>
-            <p:ph type="title"/>
-          </p:nvPr>
-        </p:nvSpPr>
-        <p:spPr/>
-        <p:txBody>
-          <a:bodyPr/>
-          <a:lstStyle/>
-          <a:p>
-            <a:pPr lvl="0" indent="0" marL="0">
-              <a:buNone/>
-            </a:pPr>
-            <a:r>
-              <a:rPr/>
-              <a:t>The corpora</a:t>
-            </a:r>
-          </a:p>
-        </p:txBody>
-      </p:sp>
-      <p:sp>
-        <p:nvSpPr>
-          <p:cNvPr id="3" name="Content Placeholder 2"/>
-          <p:cNvSpPr>
-            <a:spLocks noGrp="1"/>
-          </p:cNvSpPr>
-          <p:nvPr>
-            <p:ph idx="1"/>
-          </p:nvPr>
-        </p:nvSpPr>
-        <p:spPr/>
-        <p:txBody>
-          <a:bodyPr/>
-          <a:lstStyle/>
-          <a:p>
-            <a:pPr lvl="0" indent="0">
-              <a:buNone/>
-            </a:pPr>
-            <a:r>
-              <a:rPr b="1">
-                <a:solidFill>
-                  <a:srgbClr val="008000"/>
-                </a:solidFill>
-                <a:latin typeface="Courier"/>
-              </a:rPr>
-              <a:t>import</a:t>
-            </a:r>
-            <a:r>
-              <a:rPr>
-                <a:latin typeface="Courier"/>
-              </a:rPr>
-              <a:t> pandas </a:t>
-            </a:r>
-            <a:r>
-              <a:rPr b="1">
-                <a:solidFill>
-                  <a:srgbClr val="008000"/>
-                </a:solidFill>
-                <a:latin typeface="Courier"/>
-              </a:rPr>
-              <a:t>as</a:t>
-            </a:r>
-            <a:r>
-              <a:rPr>
-                <a:latin typeface="Courier"/>
-              </a:rPr>
-              <a:t> pd</a:t>
-            </a:r>
-            <a:br/>
-            <a:br/>
-            <a:r>
-              <a:rPr>
-                <a:latin typeface="Courier"/>
-              </a:rPr>
-              <a:t>cb  </a:t>
-            </a:r>
-            <a:r>
-              <a:rPr>
-                <a:solidFill>
-                  <a:srgbClr val="666666"/>
-                </a:solidFill>
-                <a:latin typeface="Courier"/>
-              </a:rPr>
-              <a:t>=</a:t>
-            </a:r>
-            <a:r>
-              <a:rPr>
-                <a:latin typeface="Courier"/>
-              </a:rPr>
-              <a:t> pd.read_parquet(</a:t>
-            </a:r>
-            <a:r>
-              <a:rPr>
-                <a:solidFill>
-                  <a:srgbClr val="4070A0"/>
-                </a:solidFill>
-                <a:latin typeface="Courier"/>
-              </a:rPr>
-              <a:t>"data/spine/angle_e_centralbank.parquet"</a:t>
-            </a:r>
-            <a:r>
-              <a:rPr>
-                <a:latin typeface="Courier"/>
-              </a:rPr>
-              <a:t>)</a:t>
-            </a:r>
-            <a:br/>
-            <a:r>
-              <a:rPr>
-                <a:latin typeface="Courier"/>
-              </a:rPr>
-              <a:t>nat </a:t>
-            </a:r>
-            <a:r>
-              <a:rPr>
-                <a:solidFill>
-                  <a:srgbClr val="666666"/>
-                </a:solidFill>
-                <a:latin typeface="Courier"/>
-              </a:rPr>
-              <a:t>=</a:t>
-            </a:r>
-            <a:r>
-              <a:rPr>
-                <a:latin typeface="Courier"/>
-              </a:rPr>
-              <a:t> pd.read_parquet(</a:t>
-            </a:r>
-            <a:r>
-              <a:rPr>
-                <a:solidFill>
-                  <a:srgbClr val="4070A0"/>
-                </a:solidFill>
-                <a:latin typeface="Courier"/>
-              </a:rPr>
-              <a:t>"data/spine/angle_e_national.parquet"</a:t>
-            </a:r>
-            <a:r>
-              <a:rPr>
-                <a:latin typeface="Courier"/>
-              </a:rPr>
-              <a:t>)</a:t>
-            </a:r>
-            <a:br/>
-            <a:br/>
-            <a:r>
-              <a:rPr>
-                <a:solidFill>
-                  <a:srgbClr val="008000"/>
-                </a:solidFill>
-                <a:latin typeface="Courier"/>
-              </a:rPr>
-              <a:t>print</a:t>
-            </a:r>
-            <a:r>
-              <a:rPr>
-                <a:latin typeface="Courier"/>
-              </a:rPr>
-              <a:t>(cb.shape, nat.shape)      </a:t>
-            </a:r>
-            <a:r>
-              <a:rPr i="1">
-                <a:solidFill>
-                  <a:srgbClr val="60A0B0"/>
-                </a:solidFill>
-                <a:latin typeface="Courier"/>
-              </a:rPr>
-              <a:t># (1980, 7) and (1280, 7)</a:t>
-            </a:r>
-            <a:br/>
-            <a:r>
-              <a:rPr>
-                <a:solidFill>
-                  <a:srgbClr val="008000"/>
-                </a:solidFill>
-                <a:latin typeface="Courier"/>
-              </a:rPr>
-              <a:t>print</a:t>
-            </a:r>
-            <a:r>
-              <a:rPr>
-                <a:latin typeface="Courier"/>
-              </a:rPr>
-              <a:t>(cb.columns.tolist())</a:t>
-            </a:r>
-            <a:br/>
-            <a:r>
-              <a:rPr i="1">
-                <a:solidFill>
-                  <a:srgbClr val="60A0B0"/>
-                </a:solidFill>
-                <a:latin typeface="Courier"/>
-              </a:rPr>
-              <a:t># doc_id, date, institution, country, doc_type, n_words, text</a:t>
-            </a:r>
-          </a:p>
-        </p:txBody>
-      </p:sp>
-    </p:spTree>
-  </p:cSld>
-</p:sld>
-</file>
-
-<file path=ppt/slides/slide14.xml><?xml version="1.0" encoding="utf-8"?>
-<p:sld xmlns:a="http://schemas.openxmlformats.org/drawingml/2006/main" xmlns:r="http://schemas.openxmlformats.org/officeDocument/2006/relationships" xmlns:p="http://schemas.openxmlformats.org/presentationml/2006/main">
-  <p:cSld>
-    <p:spTree>
-      <p:nvGrpSpPr>
-        <p:cNvPr id="1" name=""/>
-        <p:cNvGrpSpPr/>
-        <p:nvPr/>
-      </p:nvGrpSpPr>
-      <p:grpSpPr>
-        <a:xfrm>
-          <a:off x="0" y="0"/>
-          <a:ext cx="0" cy="0"/>
-          <a:chOff x="0" y="0"/>
-          <a:chExt cx="0" cy="0"/>
-        </a:xfrm>
-      </p:grpSpPr>
-      <p:sp>
-        <p:nvSpPr>
-          <p:cNvPr id="2" name="Title 1"/>
-          <p:cNvSpPr>
-            <a:spLocks noGrp="1"/>
-          </p:cNvSpPr>
-          <p:nvPr>
-            <p:ph type="title"/>
-          </p:nvPr>
-        </p:nvSpPr>
-        <p:spPr/>
-        <p:txBody>
-          <a:bodyPr/>
-          <a:lstStyle/>
-          <a:p>
-            <a:pPr lvl="0" indent="0" marL="0">
-              <a:buNone/>
-            </a:pPr>
-            <a:r>
-              <a:rPr/>
-              <a:t>The trap, and it is a big one</a:t>
-            </a:r>
-          </a:p>
-        </p:txBody>
-      </p:sp>
-      <p:sp>
-        <p:nvSpPr>
-          <p:cNvPr id="3" name="Content Placeholder 2"/>
-          <p:cNvSpPr>
-            <a:spLocks noGrp="1"/>
-          </p:cNvSpPr>
-          <p:nvPr>
-            <p:ph idx="1"/>
-          </p:nvPr>
-        </p:nvSpPr>
-        <p:spPr/>
-        <p:txBody>
-          <a:bodyPr/>
-          <a:lstStyle/>
-          <a:p>
-            <a:pPr lvl="0" indent="0" marL="0">
-              <a:buNone/>
-            </a:pPr>
-            <a:r>
-              <a:rPr b="1"/>
-              <a:t>Corpus composition drives raw counts.</a:t>
-            </a:r>
-            <a:r>
-              <a:rPr/>
-              <a:t> If a central bank publishes more documents in 2022 than in 2015, the raw frequency of </a:t>
-            </a:r>
-            <a:r>
-              <a:rPr i="1"/>
-              <a:t>any</a:t>
-            </a:r>
-            <a:r>
-              <a:rPr/>
-              <a:t> term rises — with no change whatsoever in how much attention it pays.</a:t>
-            </a:r>
-          </a:p>
-          <a:p>
-            <a:pPr lvl="0" indent="0" marL="0">
-              <a:buNone/>
-            </a:pPr>
-            <a:r>
-              <a:rPr/>
-              <a:t>Normalise. Per document, or per thousand words, or as a share of that period’s corpus. Then </a:t>
-            </a:r>
-            <a:r>
-              <a:rPr b="1"/>
-              <a:t>say in the caption which one you chose</a:t>
-            </a:r>
-            <a:r>
-              <a:rPr/>
-              <a:t>, because the three give different pictures.</a:t>
-            </a:r>
-          </a:p>
-        </p:txBody>
-      </p:sp>
     </p:spTree>
   </p:cSld>
 </p:sld>
@@ -3900,7 +3673,7 @@
             </a:pPr>
             <a:r>
               <a:rPr/>
-              <a:t>Bag of words, then TF-IDF</a:t>
+              <a:t>Silhouette</a:t>
             </a:r>
           </a:p>
         </p:txBody>
@@ -3927,7 +3700,18 @@
                 </a:pPr>
                 <a:r>
                   <a:rPr/>
-                  <a:t>Term frequency times inverse document frequency:</a:t>
+                  <a:t>For observation </a:t>
+                </a:r>
+                <a14:m>
+                  <m:oMath xmlns:m="http://schemas.openxmlformats.org/officeDocument/2006/math">
+                    <m:r>
+                      <m:t>i</m:t>
+                    </m:r>
+                  </m:oMath>
+                </a14:m>
+                <a:r>
+                  <a:rPr/>
+                  <a:t>:</a:t>
                 </a:r>
               </a:p>
               <a:p>
@@ -3940,12 +3724,657 @@
                       <m:jc m:val="center"/>
                     </m:oMathParaPr>
                     <m:oMath>
+                      <m:sSub>
+                        <m:e>
+                          <m:r>
+                            <m:t>s</m:t>
+                          </m:r>
+                        </m:e>
+                        <m:sub>
+                          <m:r>
+                            <m:t>i</m:t>
+                          </m:r>
+                        </m:sub>
+                      </m:sSub>
+                      <m:r>
+                        <m:rPr>
+                          <m:sty m:val="p"/>
+                        </m:rPr>
+                        <m:t>=</m:t>
+                      </m:r>
+                      <m:f>
+                        <m:fPr>
+                          <m:type m:val="bar"/>
+                        </m:fPr>
+                        <m:num>
+                          <m:sSub>
+                            <m:e>
+                              <m:r>
+                                <m:t>b</m:t>
+                              </m:r>
+                            </m:e>
+                            <m:sub>
+                              <m:r>
+                                <m:t>i</m:t>
+                              </m:r>
+                            </m:sub>
+                          </m:sSub>
+                          <m:r>
+                            <m:rPr>
+                              <m:sty m:val="p"/>
+                            </m:rPr>
+                            <m:t>−</m:t>
+                          </m:r>
+                          <m:sSub>
+                            <m:e>
+                              <m:r>
+                                <m:t>a</m:t>
+                              </m:r>
+                            </m:e>
+                            <m:sub>
+                              <m:r>
+                                <m:t>i</m:t>
+                              </m:r>
+                            </m:sub>
+                          </m:sSub>
+                        </m:num>
+                        <m:den>
+                          <m:r>
+                            <m:rPr>
+                              <m:sty m:val="p"/>
+                            </m:rPr>
+                            <m:t>max</m:t>
+                          </m:r>
+                          <m:d>
+                            <m:dPr>
+                              <m:begChr m:val="("/>
+                              <m:sepChr m:val=""/>
+                              <m:endChr m:val=")"/>
+                              <m:grow/>
+                            </m:dPr>
+                            <m:e>
+                              <m:sSub>
+                                <m:e>
+                                  <m:r>
+                                    <m:t>a</m:t>
+                                  </m:r>
+                                </m:e>
+                                <m:sub>
+                                  <m:r>
+                                    <m:t>i</m:t>
+                                  </m:r>
+                                </m:sub>
+                              </m:sSub>
+                              <m:r>
+                                <m:rPr>
+                                  <m:sty m:val="p"/>
+                                </m:rPr>
+                                <m:t>,</m:t>
+                              </m:r>
+                              <m:sSub>
+                                <m:e>
+                                  <m:r>
+                                    <m:t>b</m:t>
+                                  </m:r>
+                                </m:e>
+                                <m:sub>
+                                  <m:r>
+                                    <m:t>i</m:t>
+                                  </m:r>
+                                </m:sub>
+                              </m:sSub>
+                            </m:e>
+                          </m:d>
+                        </m:den>
+                      </m:f>
+                    </m:oMath>
+                  </m:oMathPara>
+                </a14:m>
+              </a:p>
+              <a:p>
+                <a:pPr lvl="0" indent="0" marL="0">
+                  <a:buNone/>
+                </a:pPr>
+                <a:r>
+                  <a:rPr/>
+                  <a:t>with </a:t>
+                </a:r>
+                <a14:m>
+                  <m:oMath xmlns:m="http://schemas.openxmlformats.org/officeDocument/2006/math">
+                    <m:sSub>
+                      <m:e>
+                        <m:r>
+                          <m:t>a</m:t>
+                        </m:r>
+                      </m:e>
+                      <m:sub>
+                        <m:r>
+                          <m:t>i</m:t>
+                        </m:r>
+                      </m:sub>
+                    </m:sSub>
+                  </m:oMath>
+                </a14:m>
+                <a:r>
+                  <a:rPr/>
+                  <a:t> the mean distance to its own cluster and </a:t>
+                </a:r>
+                <a14:m>
+                  <m:oMath xmlns:m="http://schemas.openxmlformats.org/officeDocument/2006/math">
+                    <m:sSub>
+                      <m:e>
+                        <m:r>
+                          <m:t>b</m:t>
+                        </m:r>
+                      </m:e>
+                      <m:sub>
+                        <m:r>
+                          <m:t>i</m:t>
+                        </m:r>
+                      </m:sub>
+                    </m:sSub>
+                  </m:oMath>
+                </a14:m>
+                <a:r>
+                  <a:rPr/>
+                  <a:t> to the nearest other cluster.</a:t>
+                </a:r>
+              </a:p>
+              <a:p>
+                <a:pPr lvl="0"/>
+                <a:r>
+                  <a:rPr/>
+                  <a:t>near </a:t>
+                </a:r>
+                <a:r>
+                  <a:rPr b="1"/>
+                  <a:t>1</a:t>
+                </a:r>
+                <a:r>
+                  <a:rPr/>
+                  <a:t> — well clustered</a:t>
+                </a:r>
+              </a:p>
+              <a:p>
+                <a:pPr lvl="0"/>
+                <a:r>
+                  <a:rPr/>
+                  <a:t>near </a:t>
+                </a:r>
+                <a:r>
+                  <a:rPr b="1"/>
+                  <a:t>0</a:t>
+                </a:r>
+                <a:r>
+                  <a:rPr/>
+                  <a:t> — on a boundary</a:t>
+                </a:r>
+              </a:p>
+              <a:p>
+                <a:pPr lvl="0"/>
+                <a:r>
+                  <a:rPr b="1"/>
+                  <a:t>negative</a:t>
+                </a:r>
+                <a:r>
+                  <a:rPr/>
+                  <a:t> — probably misassigned</a:t>
+                </a:r>
+              </a:p>
+              <a:p>
+                <a:pPr lvl="0" indent="0" marL="0">
+                  <a:buNone/>
+                </a:pPr>
+                <a:r>
+                  <a:rPr/>
+                  <a:t>Average over </a:t>
+                </a:r>
+                <a14:m>
+                  <m:oMath xmlns:m="http://schemas.openxmlformats.org/officeDocument/2006/math">
+                    <m:r>
+                      <m:t>i</m:t>
+                    </m:r>
+                  </m:oMath>
+                </a14:m>
+                <a:r>
+                  <a:rPr/>
+                  <a:t>, maximise over </a:t>
+                </a:r>
+                <a14:m>
+                  <m:oMath xmlns:m="http://schemas.openxmlformats.org/officeDocument/2006/math">
+                    <m:r>
+                      <m:t>k</m:t>
+                    </m:r>
+                  </m:oMath>
+                </a14:m>
+                <a:r>
+                  <a:rPr/>
+                  <a:t>.</a:t>
+                </a:r>
+              </a:p>
+            </p:txBody>
+          </p:sp>
+        </mc:Choice>
+      </mc:AlternateContent>
+    </p:spTree>
+  </p:cSld>
+</p:sld>
+</file>
+
+<file path=ppt/slides/slide16.xml><?xml version="1.0" encoding="utf-8"?>
+<p:sld xmlns:a="http://schemas.openxmlformats.org/drawingml/2006/main" xmlns:r="http://schemas.openxmlformats.org/officeDocument/2006/relationships" xmlns:p="http://schemas.openxmlformats.org/presentationml/2006/main">
+  <p:cSld>
+    <p:spTree>
+      <p:nvGrpSpPr>
+        <p:cNvPr id="1" name=""/>
+        <p:cNvGrpSpPr/>
+        <p:nvPr/>
+      </p:nvGrpSpPr>
+      <p:grpSpPr>
+        <a:xfrm>
+          <a:off x="0" y="0"/>
+          <a:ext cx="0" cy="0"/>
+          <a:chOff x="0" y="0"/>
+          <a:chExt cx="0" cy="0"/>
+        </a:xfrm>
+      </p:grpSpPr>
+      <p:sp>
+        <p:nvSpPr>
+          <p:cNvPr id="2" name="Title 1"/>
+          <p:cNvSpPr>
+            <a:spLocks noGrp="1"/>
+          </p:cNvSpPr>
+          <p:nvPr>
+            <p:ph type="title"/>
+          </p:nvPr>
+        </p:nvSpPr>
+        <p:spPr/>
+        <p:txBody>
+          <a:bodyPr/>
+          <a:lstStyle/>
+          <a:p>
+            <a:pPr lvl="0" indent="0" marL="0">
+              <a:buNone/>
+            </a:pPr>
+            <a:r>
+              <a:rPr/>
+              <a:t>Gap statistic</a:t>
+            </a:r>
+          </a:p>
+        </p:txBody>
+      </p:sp>
+      <mc:AlternateContent xmlns:mc="http://schemas.openxmlformats.org/markup-compatibility/2006">
+        <mc:Choice xmlns:a14="http://schemas.microsoft.com/office/drawing/2010/main" Requires="a14">
+          <p:sp>
+            <p:nvSpPr>
+              <p:cNvPr id="3" name="Content Placeholder 2"/>
+              <p:cNvSpPr>
+                <a:spLocks noGrp="1"/>
+              </p:cNvSpPr>
+              <p:nvPr>
+                <p:ph idx="1"/>
+              </p:nvPr>
+            </p:nvSpPr>
+            <p:spPr/>
+            <p:txBody>
+              <a:bodyPr/>
+              <a:lstStyle/>
+              <a:p>
+                <a:pPr lvl="0" indent="0" marL="0">
+                  <a:buNone/>
+                </a:pPr>
+                <a:r>
+                  <a:rPr/>
+                  <a:t>Compare </a:t>
+                </a:r>
+                <a14:m>
+                  <m:oMath xmlns:m="http://schemas.openxmlformats.org/officeDocument/2006/math">
+                    <m:r>
+                      <m:rPr>
+                        <m:sty m:val="p"/>
+                      </m:rPr>
+                      <m:t>log</m:t>
+                    </m:r>
+                    <m:sSub>
+                      <m:e>
+                        <m:r>
+                          <m:t>W</m:t>
+                        </m:r>
+                      </m:e>
+                      <m:sub>
+                        <m:r>
+                          <m:t>k</m:t>
+                        </m:r>
+                      </m:sub>
+                    </m:sSub>
+                  </m:oMath>
+                </a14:m>
+                <a:r>
+                  <a:rPr/>
+                  <a:t> to its expectation under a null reference distribution — uniform over the data’s bounding box, or a PCA-aligned box. Choose the smallest </a:t>
+                </a:r>
+                <a14:m>
+                  <m:oMath xmlns:m="http://schemas.openxmlformats.org/officeDocument/2006/math">
+                    <m:r>
+                      <m:t>k</m:t>
+                    </m:r>
+                  </m:oMath>
+                </a14:m>
+                <a:r>
+                  <a:rPr/>
+                  <a:t> where the gap exceeds the next </a:t>
+                </a:r>
+                <a14:m>
+                  <m:oMath xmlns:m="http://schemas.openxmlformats.org/officeDocument/2006/math">
+                    <m:r>
+                      <m:t>k</m:t>
+                    </m:r>
+                  </m:oMath>
+                </a14:m>
+                <a:r>
+                  <a:rPr/>
+                  <a:t>’s gap minus one standard error.</a:t>
+                </a:r>
+              </a:p>
+              <a:p>
+                <a:pPr lvl="0" indent="0" marL="0">
+                  <a:buNone/>
+                </a:pPr>
+                <a:r>
+                  <a:rPr/>
+                  <a:t>This one </a:t>
+                </a:r>
+                <a:r>
+                  <a:rPr b="1"/>
+                  <a:t>can return </a:t>
+                </a:r>
+                <a14:m>
+                  <m:oMath xmlns:m="http://schemas.openxmlformats.org/officeDocument/2006/math">
+                    <m:r>
+                      <m:t>k</m:t>
+                    </m:r>
+                    <m:r>
+                      <m:rPr>
+                        <m:sty m:val="p"/>
+                      </m:rPr>
+                      <m:t>=</m:t>
+                    </m:r>
+                    <m:r>
+                      <m:t>1</m:t>
+                    </m:r>
+                  </m:oMath>
+                </a14:m>
+                <a:r>
+                  <a:rPr/>
+                  <a:t> — “no cluster structure”. Which is why it is worth the extra effort: it is the only one of the three that can tell you to stop.</a:t>
+                </a:r>
+              </a:p>
+            </p:txBody>
+          </p:sp>
+        </mc:Choice>
+      </mc:AlternateContent>
+    </p:spTree>
+  </p:cSld>
+</p:sld>
+</file>
+
+<file path=ppt/slides/slide17.xml><?xml version="1.0" encoding="utf-8"?>
+<p:sld xmlns:a="http://schemas.openxmlformats.org/drawingml/2006/main" xmlns:r="http://schemas.openxmlformats.org/officeDocument/2006/relationships" xmlns:p="http://schemas.openxmlformats.org/presentationml/2006/main">
+  <p:cSld>
+    <p:spTree>
+      <p:nvGrpSpPr>
+        <p:cNvPr id="1" name=""/>
+        <p:cNvGrpSpPr/>
+        <p:nvPr/>
+      </p:nvGrpSpPr>
+      <p:grpSpPr>
+        <a:xfrm>
+          <a:off x="0" y="0"/>
+          <a:ext cx="0" cy="0"/>
+          <a:chOff x="0" y="0"/>
+          <a:chExt cx="0" cy="0"/>
+        </a:xfrm>
+      </p:grpSpPr>
+      <p:sp>
+        <p:nvSpPr>
+          <p:cNvPr id="2" name="Title 1"/>
+          <p:cNvSpPr>
+            <a:spLocks noGrp="1"/>
+          </p:cNvSpPr>
+          <p:nvPr>
+            <p:ph type="title"/>
+          </p:nvPr>
+        </p:nvSpPr>
+        <p:spPr/>
+        <p:txBody>
+          <a:bodyPr/>
+          <a:lstStyle/>
+          <a:p>
+            <a:pPr lvl="0" indent="0" marL="0">
+              <a:buNone/>
+            </a:pPr>
+            <a:r>
+              <a:rPr/>
+              <a:t>Report at least two</a:t>
+            </a:r>
+          </a:p>
+        </p:txBody>
+      </p:sp>
+      <p:sp>
+        <p:nvSpPr>
+          <p:cNvPr id="3" name="Content Placeholder 2"/>
+          <p:cNvSpPr>
+            <a:spLocks noGrp="1"/>
+          </p:cNvSpPr>
+          <p:nvPr>
+            <p:ph idx="1"/>
+          </p:nvPr>
+        </p:nvSpPr>
+        <p:spPr/>
+        <p:txBody>
+          <a:bodyPr/>
+          <a:lstStyle/>
+          <a:p>
+            <a:pPr lvl="0" indent="0" marL="0">
+              <a:buNone/>
+            </a:pPr>
+            <a:r>
+              <a:rPr b="1"/>
+              <a:t>And report disagreement.</a:t>
+            </a:r>
+            <a:r>
+              <a:rPr/>
+              <a:t> On the course spine — built from </a:t>
+            </a:r>
+            <a:r>
+              <a:rPr b="1"/>
+              <a:t>four</a:t>
+            </a:r>
+            <a:r>
+              <a:rPr/>
+              <a:t> country types — the silhouette score on the country profiles peaks at </a:t>
+            </a:r>
+            <a:r>
+              <a:rPr b="1"/>
+              <a:t>six</a:t>
+            </a:r>
+            <a:r>
+              <a:rPr/>
+              <a:t>. The diagnostic is confidently wrong, on data where we happen to know the answer.</a:t>
+            </a:r>
+          </a:p>
+          <a:p>
+            <a:pPr lvl="0" indent="0" marL="0">
+              <a:buNone/>
+            </a:pPr>
+            <a:r>
+              <a:rPr/>
+              <a:t>You will not have that luxury with real data. Which is the point of noticing it here.</a:t>
+            </a:r>
+          </a:p>
+        </p:txBody>
+      </p:sp>
+    </p:spTree>
+  </p:cSld>
+</p:sld>
+</file>
+
+<file path=ppt/slides/slide18.xml><?xml version="1.0" encoding="utf-8"?>
+<p:sld xmlns:a="http://schemas.openxmlformats.org/drawingml/2006/main" xmlns:r="http://schemas.openxmlformats.org/officeDocument/2006/relationships" xmlns:p="http://schemas.openxmlformats.org/presentationml/2006/main">
+  <p:cSld>
+    <p:spTree>
+      <p:nvGrpSpPr>
+        <p:cNvPr id="1" name=""/>
+        <p:cNvGrpSpPr/>
+        <p:nvPr/>
+      </p:nvGrpSpPr>
+      <p:grpSpPr>
+        <a:xfrm>
+          <a:off x="0" y="0"/>
+          <a:ext cx="0" cy="0"/>
+          <a:chOff x="0" y="0"/>
+          <a:chExt cx="0" cy="0"/>
+        </a:xfrm>
+      </p:grpSpPr>
+      <p:sp>
+        <p:nvSpPr>
+          <p:cNvPr id="2" name="Title 1"/>
+          <p:cNvSpPr>
+            <a:spLocks noGrp="1"/>
+          </p:cNvSpPr>
+          <p:nvPr>
+            <p:ph type="title"/>
+          </p:nvPr>
+        </p:nvSpPr>
+        <p:spPr>
+          <a:xfrm>
+            <a:off x="722313" y="3305176"/>
+            <a:ext cx="7772400" cy="1021556"/>
+          </a:xfrm>
+        </p:spPr>
+        <p:txBody>
+          <a:bodyPr/>
+          <a:lstStyle/>
+          <a:p>
+            <a:pPr lvl="0" indent="0" marL="0">
+              <a:buNone/>
+            </a:pPr>
+            <a:r>
+              <a:rPr/>
+              <a:t>9.4 Representing text</a:t>
+            </a:r>
+          </a:p>
+        </p:txBody>
+      </p:sp>
+    </p:spTree>
+  </p:cSld>
+</p:sld>
+</file>
+
+<file path=ppt/slides/slide19.xml><?xml version="1.0" encoding="utf-8"?>
+<p:sld xmlns:a="http://schemas.openxmlformats.org/drawingml/2006/main" xmlns:r="http://schemas.openxmlformats.org/officeDocument/2006/relationships" xmlns:p="http://schemas.openxmlformats.org/presentationml/2006/main">
+  <p:cSld>
+    <p:spTree>
+      <p:nvGrpSpPr>
+        <p:cNvPr id="1" name=""/>
+        <p:cNvGrpSpPr/>
+        <p:nvPr/>
+      </p:nvGrpSpPr>
+      <p:grpSpPr>
+        <a:xfrm>
+          <a:off x="0" y="0"/>
+          <a:ext cx="0" cy="0"/>
+          <a:chOff x="0" y="0"/>
+          <a:chExt cx="0" cy="0"/>
+        </a:xfrm>
+      </p:grpSpPr>
+      <p:sp>
+        <p:nvSpPr>
+          <p:cNvPr id="2" name="Title 1"/>
+          <p:cNvSpPr>
+            <a:spLocks noGrp="1"/>
+          </p:cNvSpPr>
+          <p:nvPr>
+            <p:ph type="title"/>
+          </p:nvPr>
+        </p:nvSpPr>
+        <p:spPr/>
+        <p:txBody>
+          <a:bodyPr/>
+          <a:lstStyle/>
+          <a:p>
+            <a:pPr lvl="0" indent="0" marL="0">
+              <a:buNone/>
+            </a:pPr>
+            <a:r>
+              <a:rPr/>
+              <a:t>Bag of words / TF-IDF</a:t>
+            </a:r>
+          </a:p>
+        </p:txBody>
+      </p:sp>
+      <mc:AlternateContent xmlns:mc="http://schemas.openxmlformats.org/markup-compatibility/2006">
+        <mc:Choice xmlns:a14="http://schemas.microsoft.com/office/drawing/2010/main" Requires="a14">
+          <p:sp>
+            <p:nvSpPr>
+              <p:cNvPr id="3" name="Content Placeholder 2"/>
+              <p:cNvSpPr>
+                <a:spLocks noGrp="1"/>
+              </p:cNvSpPr>
+              <p:nvPr>
+                <p:ph idx="1"/>
+              </p:nvPr>
+            </p:nvSpPr>
+            <p:spPr/>
+            <p:txBody>
+              <a:bodyPr/>
+              <a:lstStyle/>
+              <a:p>
+                <a:pPr lvl="0" indent="0" marL="0">
+                  <a:buNone/>
+                </a:pPr>
+                <a14:m>
+                  <m:oMathPara xmlns:m="http://schemas.openxmlformats.org/officeDocument/2006/math">
+                    <m:oMathParaPr>
+                      <m:jc m:val="center"/>
+                    </m:oMathParaPr>
+                    <m:oMath>
+                      <m:r>
+                        <m:rPr>
+                          <m:sty m:val="p"/>
+                        </m:rPr>
+                        <m:t>t</m:t>
+                      </m:r>
+                      <m:r>
+                        <m:rPr>
+                          <m:sty m:val="p"/>
+                        </m:rPr>
+                        <m:t>f</m:t>
+                      </m:r>
                       <m:r>
                         <m:rPr>
                           <m:nor/>
                           <m:sty m:val="p"/>
                         </m:rPr>
-                        <m:t>tfidf</m:t>
+                        <m:t>-</m:t>
+                      </m:r>
+                      <m:r>
+                        <m:rPr>
+                          <m:sty m:val="p"/>
+                        </m:rPr>
+                        <m:t>i</m:t>
+                      </m:r>
+                      <m:r>
+                        <m:rPr>
+                          <m:sty m:val="p"/>
+                        </m:rPr>
+                        <m:t>d</m:t>
+                      </m:r>
+                      <m:r>
+                        <m:rPr>
+                          <m:sty m:val="p"/>
+                        </m:rPr>
+                        <m:t>f</m:t>
                       </m:r>
                       <m:d>
                         <m:dPr>
@@ -3975,102 +4404,133 @@
                         </m:rPr>
                         <m:t>=</m:t>
                       </m:r>
-                      <m:r>
-                        <m:rPr>
-                          <m:nor/>
-                          <m:sty m:val="p"/>
-                        </m:rPr>
-                        <m:t>tf</m:t>
-                      </m:r>
-                      <m:d>
-                        <m:dPr>
-                          <m:begChr m:val="("/>
-                          <m:sepChr m:val=""/>
-                          <m:endChr m:val=")"/>
-                          <m:grow/>
-                        </m:dPr>
+                      <m:limLow>
                         <m:e>
-                          <m:r>
-                            <m:t>t</m:t>
-                          </m:r>
-                          <m:r>
-                            <m:rPr>
-                              <m:sty m:val="p"/>
-                            </m:rPr>
-                            <m:t>,</m:t>
-                          </m:r>
-                          <m:r>
-                            <m:t>d</m:t>
-                          </m:r>
+                          <m:limLow>
+                            <m:e>
+                              <m:sSub>
+                                <m:e>
+                                  <m:r>
+                                    <m:t>f</m:t>
+                                  </m:r>
+                                </m:e>
+                                <m:sub>
+                                  <m:r>
+                                    <m:t>t</m:t>
+                                  </m:r>
+                                  <m:r>
+                                    <m:rPr>
+                                      <m:sty m:val="p"/>
+                                    </m:rPr>
+                                    <m:t>,</m:t>
+                                  </m:r>
+                                  <m:r>
+                                    <m:t>d</m:t>
+                                  </m:r>
+                                </m:sub>
+                              </m:sSub>
+                            </m:e>
+                            <m:lim>
+                              <m:r>
+                                <m:rPr>
+                                  <m:sty m:val="p"/>
+                                </m:rPr>
+                                <m:t>⏟</m:t>
+                              </m:r>
+                            </m:lim>
+                          </m:limLow>
                         </m:e>
-                      </m:d>
-                      <m:r>
-                        <m:rPr>
-                          <m:sty m:val="p"/>
-                        </m:rPr>
-                        <m:t>⋅</m:t>
-                      </m:r>
-                      <m:r>
-                        <m:rPr>
-                          <m:sty m:val="p"/>
-                        </m:rPr>
-                        <m:t>log</m:t>
-                      </m:r>
-                      <m:f>
-                        <m:fPr>
-                          <m:type m:val="bar"/>
-                        </m:fPr>
-                        <m:num>
-                          <m:r>
-                            <m:t>N</m:t>
-                          </m:r>
-                        </m:num>
-                        <m:den>
+                        <m:lim>
                           <m:r>
                             <m:rPr>
                               <m:nor/>
                               <m:sty m:val="p"/>
                             </m:rPr>
-                            <m:t>df</m:t>
+                            <m:t>term frequency</m:t>
                           </m:r>
-                          <m:d>
-                            <m:dPr>
-                              <m:begChr m:val="("/>
-                              <m:sepChr m:val=""/>
-                              <m:endChr m:val=")"/>
-                              <m:grow/>
-                            </m:dPr>
+                        </m:lim>
+                      </m:limLow>
+                      <m:r>
+                        <m:rPr>
+                          <m:sty m:val="p"/>
+                        </m:rPr>
+                        <m:t>×</m:t>
+                      </m:r>
+                      <m:limLow>
+                        <m:e>
+                          <m:limLow>
                             <m:e>
                               <m:r>
-                                <m:t>t</m:t>
+                                <m:rPr>
+                                  <m:sty m:val="p"/>
+                                </m:rPr>
+                                <m:t>log</m:t>
                               </m:r>
+                              <m:f>
+                                <m:fPr>
+                                  <m:type m:val="bar"/>
+                                </m:fPr>
+                                <m:num>
+                                  <m:r>
+                                    <m:t>N</m:t>
+                                  </m:r>
+                                </m:num>
+                                <m:den>
+                                  <m:r>
+                                    <m:t>1</m:t>
+                                  </m:r>
+                                  <m:r>
+                                    <m:rPr>
+                                      <m:sty m:val="p"/>
+                                    </m:rPr>
+                                    <m:t>+</m:t>
+                                  </m:r>
+                                  <m:sSub>
+                                    <m:e>
+                                      <m:r>
+                                        <m:t>n</m:t>
+                                      </m:r>
+                                    </m:e>
+                                    <m:sub>
+                                      <m:r>
+                                        <m:t>t</m:t>
+                                      </m:r>
+                                    </m:sub>
+                                  </m:sSub>
+                                </m:den>
+                              </m:f>
                             </m:e>
-                          </m:d>
-                        </m:den>
-                      </m:f>
+                            <m:lim>
+                              <m:r>
+                                <m:rPr>
+                                  <m:sty m:val="p"/>
+                                </m:rPr>
+                                <m:t>⏟</m:t>
+                              </m:r>
+                            </m:lim>
+                          </m:limLow>
+                        </m:e>
+                        <m:lim>
+                          <m:r>
+                            <m:rPr>
+                              <m:nor/>
+                              <m:sty m:val="p"/>
+                            </m:rPr>
+                            <m:t>inverse document frequency</m:t>
+                          </m:r>
+                        </m:lim>
+                      </m:limLow>
                     </m:oMath>
                   </m:oMathPara>
                 </a14:m>
               </a:p>
               <a:p>
-                <a:pPr lvl="0"/>
+                <a:pPr lvl="0" indent="0" marL="0">
+                  <a:buNone/>
+                </a:pPr>
                 <a:r>
                   <a:rPr/>
-                  <a:t>Common-everywhere terms are down-weighted</a:t>
-                </a:r>
-              </a:p>
-              <a:p>
-                <a:pPr lvl="0"/>
-                <a:r>
-                  <a:rPr/>
-                  <a:t>Distinctive terms are up-weighted</a:t>
-                </a:r>
-              </a:p>
-              <a:p>
-                <a:pPr lvl="0"/>
-                <a:r>
-                  <a:rPr/>
-                  <a:t>Word order is discarded entirely</a:t>
+                  <a:t>The idf factor downweights ubiquitous terms.</a:t>
                 </a:r>
               </a:p>
               <a:p>
@@ -4079,875 +4539,37 @@
                 </a:pPr>
                 <a:r>
                   <a:rPr/>
-                  <a:t>“The bank will not raise rates” and “the bank will raise rates” are nearly identical documents to TF-IDF. Know what you have thrown away.</a:t>
+                  <a:t>The result is a very sparse, very high-dimensional matrix — exactly the </a:t>
+                </a:r>
+                <a14:m>
+                  <m:oMath xmlns:m="http://schemas.openxmlformats.org/officeDocument/2006/math">
+                    <m:r>
+                      <m:t>p</m:t>
+                    </m:r>
+                    <m:r>
+                      <m:rPr>
+                        <m:sty m:val="p"/>
+                      </m:rPr>
+                      <m:t>≫</m:t>
+                    </m:r>
+                    <m:r>
+                      <m:t>n</m:t>
+                    </m:r>
+                  </m:oMath>
+                </a14:m>
+                <a:r>
+                  <a:rPr/>
+                  <a:t> setting of Sessions 05 and 06, so </a:t>
+                </a:r>
+                <a:r>
+                  <a:rPr b="1"/>
+                  <a:t>penalised regression is the natural supervised tool on top of it.</a:t>
                 </a:r>
               </a:p>
             </p:txBody>
           </p:sp>
         </mc:Choice>
       </mc:AlternateContent>
-    </p:spTree>
-  </p:cSld>
-</p:sld>
-</file>
-
-<file path=ppt/slides/slide16.xml><?xml version="1.0" encoding="utf-8"?>
-<p:sld xmlns:a="http://schemas.openxmlformats.org/drawingml/2006/main" xmlns:r="http://schemas.openxmlformats.org/officeDocument/2006/relationships" xmlns:p="http://schemas.openxmlformats.org/presentationml/2006/main">
-  <p:cSld>
-    <p:spTree>
-      <p:nvGrpSpPr>
-        <p:cNvPr id="1" name=""/>
-        <p:cNvGrpSpPr/>
-        <p:nvPr/>
-      </p:nvGrpSpPr>
-      <p:grpSpPr>
-        <a:xfrm>
-          <a:off x="0" y="0"/>
-          <a:ext cx="0" cy="0"/>
-          <a:chOff x="0" y="0"/>
-          <a:chExt cx="0" cy="0"/>
-        </a:xfrm>
-      </p:grpSpPr>
-      <p:sp>
-        <p:nvSpPr>
-          <p:cNvPr id="2" name="Title 1"/>
-          <p:cNvSpPr>
-            <a:spLocks noGrp="1"/>
-          </p:cNvSpPr>
-          <p:nvPr>
-            <p:ph type="title"/>
-          </p:nvPr>
-        </p:nvSpPr>
-        <p:spPr/>
-        <p:txBody>
-          <a:bodyPr/>
-          <a:lstStyle/>
-          <a:p>
-            <a:pPr lvl="0" indent="0" marL="0">
-              <a:buNone/>
-            </a:pPr>
-            <a:r>
-              <a:rPr/>
-              <a:t>In code</a:t>
-            </a:r>
-          </a:p>
-        </p:txBody>
-      </p:sp>
-      <p:sp>
-        <p:nvSpPr>
-          <p:cNvPr id="3" name="Content Placeholder 2"/>
-          <p:cNvSpPr>
-            <a:spLocks noGrp="1"/>
-          </p:cNvSpPr>
-          <p:nvPr>
-            <p:ph idx="1"/>
-          </p:nvPr>
-        </p:nvSpPr>
-        <p:spPr/>
-        <p:txBody>
-          <a:bodyPr/>
-          <a:lstStyle/>
-          <a:p>
-            <a:pPr lvl="0" indent="0">
-              <a:buNone/>
-            </a:pPr>
-            <a:r>
-              <a:rPr b="1">
-                <a:solidFill>
-                  <a:srgbClr val="008000"/>
-                </a:solidFill>
-                <a:latin typeface="Courier"/>
-              </a:rPr>
-              <a:t>from</a:t>
-            </a:r>
-            <a:r>
-              <a:rPr>
-                <a:latin typeface="Courier"/>
-              </a:rPr>
-              <a:t> sklearn.feature_extraction.text </a:t>
-            </a:r>
-            <a:r>
-              <a:rPr b="1">
-                <a:solidFill>
-                  <a:srgbClr val="008000"/>
-                </a:solidFill>
-                <a:latin typeface="Courier"/>
-              </a:rPr>
-              <a:t>import</a:t>
-            </a:r>
-            <a:r>
-              <a:rPr>
-                <a:latin typeface="Courier"/>
-              </a:rPr>
-              <a:t> TfidfVectorizer</a:t>
-            </a:r>
-            <a:br/>
-            <a:br/>
-            <a:r>
-              <a:rPr>
-                <a:latin typeface="Courier"/>
-              </a:rPr>
-              <a:t>tf </a:t>
-            </a:r>
-            <a:r>
-              <a:rPr>
-                <a:solidFill>
-                  <a:srgbClr val="666666"/>
-                </a:solidFill>
-                <a:latin typeface="Courier"/>
-              </a:rPr>
-              <a:t>=</a:t>
-            </a:r>
-            <a:r>
-              <a:rPr>
-                <a:latin typeface="Courier"/>
-              </a:rPr>
-              <a:t> TfidfVectorizer(max_features</a:t>
-            </a:r>
-            <a:r>
-              <a:rPr>
-                <a:solidFill>
-                  <a:srgbClr val="666666"/>
-                </a:solidFill>
-                <a:latin typeface="Courier"/>
-              </a:rPr>
-              <a:t>=</a:t>
-            </a:r>
-            <a:r>
-              <a:rPr>
-                <a:solidFill>
-                  <a:srgbClr val="40A070"/>
-                </a:solidFill>
-                <a:latin typeface="Courier"/>
-              </a:rPr>
-              <a:t>5000</a:t>
-            </a:r>
-            <a:r>
-              <a:rPr>
-                <a:latin typeface="Courier"/>
-              </a:rPr>
-              <a:t>, stop_words</a:t>
-            </a:r>
-            <a:r>
-              <a:rPr>
-                <a:solidFill>
-                  <a:srgbClr val="666666"/>
-                </a:solidFill>
-                <a:latin typeface="Courier"/>
-              </a:rPr>
-              <a:t>=</a:t>
-            </a:r>
-            <a:r>
-              <a:rPr>
-                <a:solidFill>
-                  <a:srgbClr val="4070A0"/>
-                </a:solidFill>
-                <a:latin typeface="Courier"/>
-              </a:rPr>
-              <a:t>"english"</a:t>
-            </a:r>
-            <a:r>
-              <a:rPr>
-                <a:latin typeface="Courier"/>
-              </a:rPr>
-              <a:t>,</a:t>
-            </a:r>
-            <a:br/>
-            <a:r>
-              <a:rPr>
-                <a:latin typeface="Courier"/>
-              </a:rPr>
-              <a:t>                     ngram_range</a:t>
-            </a:r>
-            <a:r>
-              <a:rPr>
-                <a:solidFill>
-                  <a:srgbClr val="666666"/>
-                </a:solidFill>
-                <a:latin typeface="Courier"/>
-              </a:rPr>
-              <a:t>=</a:t>
-            </a:r>
-            <a:r>
-              <a:rPr>
-                <a:latin typeface="Courier"/>
-              </a:rPr>
-              <a:t>(</a:t>
-            </a:r>
-            <a:r>
-              <a:rPr>
-                <a:solidFill>
-                  <a:srgbClr val="40A070"/>
-                </a:solidFill>
-                <a:latin typeface="Courier"/>
-              </a:rPr>
-              <a:t>1</a:t>
-            </a:r>
-            <a:r>
-              <a:rPr>
-                <a:latin typeface="Courier"/>
-              </a:rPr>
-              <a:t>, </a:t>
-            </a:r>
-            <a:r>
-              <a:rPr>
-                <a:solidFill>
-                  <a:srgbClr val="40A070"/>
-                </a:solidFill>
-                <a:latin typeface="Courier"/>
-              </a:rPr>
-              <a:t>2</a:t>
-            </a:r>
-            <a:r>
-              <a:rPr>
-                <a:latin typeface="Courier"/>
-              </a:rPr>
-              <a:t>), min_df</a:t>
-            </a:r>
-            <a:r>
-              <a:rPr>
-                <a:solidFill>
-                  <a:srgbClr val="666666"/>
-                </a:solidFill>
-                <a:latin typeface="Courier"/>
-              </a:rPr>
-              <a:t>=</a:t>
-            </a:r>
-            <a:r>
-              <a:rPr>
-                <a:solidFill>
-                  <a:srgbClr val="40A070"/>
-                </a:solidFill>
-                <a:latin typeface="Courier"/>
-              </a:rPr>
-              <a:t>5</a:t>
-            </a:r>
-            <a:r>
-              <a:rPr>
-                <a:latin typeface="Courier"/>
-              </a:rPr>
-              <a:t>)</a:t>
-            </a:r>
-            <a:br/>
-            <a:r>
-              <a:rPr>
-                <a:latin typeface="Courier"/>
-              </a:rPr>
-              <a:t>Xt </a:t>
-            </a:r>
-            <a:r>
-              <a:rPr>
-                <a:solidFill>
-                  <a:srgbClr val="666666"/>
-                </a:solidFill>
-                <a:latin typeface="Courier"/>
-              </a:rPr>
-              <a:t>=</a:t>
-            </a:r>
-            <a:r>
-              <a:rPr>
-                <a:latin typeface="Courier"/>
-              </a:rPr>
-              <a:t> tf.fit_transform(cb[</a:t>
-            </a:r>
-            <a:r>
-              <a:rPr>
-                <a:solidFill>
-                  <a:srgbClr val="4070A0"/>
-                </a:solidFill>
-                <a:latin typeface="Courier"/>
-              </a:rPr>
-              <a:t>"text"</a:t>
-            </a:r>
-            <a:r>
-              <a:rPr>
-                <a:latin typeface="Courier"/>
-              </a:rPr>
-              <a:t>])</a:t>
-            </a:r>
-            <a:br/>
-            <a:r>
-              <a:rPr>
-                <a:solidFill>
-                  <a:srgbClr val="008000"/>
-                </a:solidFill>
-                <a:latin typeface="Courier"/>
-              </a:rPr>
-              <a:t>print</a:t>
-            </a:r>
-            <a:r>
-              <a:rPr>
-                <a:latin typeface="Courier"/>
-              </a:rPr>
-              <a:t>(Xt.shape)</a:t>
-            </a:r>
-          </a:p>
-          <a:p>
-            <a:pPr lvl="0" indent="0" marL="0">
-              <a:buNone/>
-            </a:pPr>
-            <a:r>
-              <a:rPr>
-                <a:latin typeface="Courier"/>
-              </a:rPr>
-              <a:t>ngram_range=(1,2)</a:t>
-            </a:r>
-            <a:r>
-              <a:rPr/>
-              <a:t> keeps two-word phrases, which recovers a little of the negation TF-IDF otherwise loses.</a:t>
-            </a:r>
-          </a:p>
-        </p:txBody>
-      </p:sp>
-    </p:spTree>
-  </p:cSld>
-</p:sld>
-</file>
-
-<file path=ppt/slides/slide17.xml><?xml version="1.0" encoding="utf-8"?>
-<p:sld xmlns:a="http://schemas.openxmlformats.org/drawingml/2006/main" xmlns:r="http://schemas.openxmlformats.org/officeDocument/2006/relationships" xmlns:p="http://schemas.openxmlformats.org/presentationml/2006/main">
-  <p:cSld>
-    <p:spTree>
-      <p:nvGrpSpPr>
-        <p:cNvPr id="1" name=""/>
-        <p:cNvGrpSpPr/>
-        <p:nvPr/>
-      </p:nvGrpSpPr>
-      <p:grpSpPr>
-        <a:xfrm>
-          <a:off x="0" y="0"/>
-          <a:ext cx="0" cy="0"/>
-          <a:chOff x="0" y="0"/>
-          <a:chExt cx="0" cy="0"/>
-        </a:xfrm>
-      </p:grpSpPr>
-      <p:sp>
-        <p:nvSpPr>
-          <p:cNvPr id="2" name="Title 1"/>
-          <p:cNvSpPr>
-            <a:spLocks noGrp="1"/>
-          </p:cNvSpPr>
-          <p:nvPr>
-            <p:ph type="title"/>
-          </p:nvPr>
-        </p:nvSpPr>
-        <p:spPr>
-          <a:xfrm>
-            <a:off x="722313" y="3305176"/>
-            <a:ext cx="7772400" cy="1021556"/>
-          </a:xfrm>
-        </p:spPr>
-        <p:txBody>
-          <a:bodyPr/>
-          <a:lstStyle/>
-          <a:p>
-            <a:pPr lvl="0" indent="0" marL="0">
-              <a:buNone/>
-            </a:pPr>
-            <a:r>
-              <a:rPr/>
-              <a:t>Embeddings</a:t>
-            </a:r>
-          </a:p>
-        </p:txBody>
-      </p:sp>
-    </p:spTree>
-  </p:cSld>
-</p:sld>
-</file>
-
-<file path=ppt/slides/slide18.xml><?xml version="1.0" encoding="utf-8"?>
-<p:sld xmlns:a="http://schemas.openxmlformats.org/drawingml/2006/main" xmlns:r="http://schemas.openxmlformats.org/officeDocument/2006/relationships" xmlns:p="http://schemas.openxmlformats.org/presentationml/2006/main">
-  <p:cSld>
-    <p:spTree>
-      <p:nvGrpSpPr>
-        <p:cNvPr id="1" name=""/>
-        <p:cNvGrpSpPr/>
-        <p:nvPr/>
-      </p:nvGrpSpPr>
-      <p:grpSpPr>
-        <a:xfrm>
-          <a:off x="0" y="0"/>
-          <a:ext cx="0" cy="0"/>
-          <a:chOff x="0" y="0"/>
-          <a:chExt cx="0" cy="0"/>
-        </a:xfrm>
-      </p:grpSpPr>
-      <p:sp>
-        <p:nvSpPr>
-          <p:cNvPr id="2" name="Title 1"/>
-          <p:cNvSpPr>
-            <a:spLocks noGrp="1"/>
-          </p:cNvSpPr>
-          <p:nvPr>
-            <p:ph type="title"/>
-          </p:nvPr>
-        </p:nvSpPr>
-        <p:spPr/>
-        <p:txBody>
-          <a:bodyPr/>
-          <a:lstStyle/>
-          <a:p>
-            <a:pPr lvl="0" indent="0" marL="0">
-              <a:buNone/>
-            </a:pPr>
-            <a:r>
-              <a:rPr/>
-              <a:t>Why embeddings differ</a:t>
-            </a:r>
-          </a:p>
-        </p:txBody>
-      </p:sp>
-      <p:sp>
-        <p:nvSpPr>
-          <p:cNvPr id="3" name="Content Placeholder 2"/>
-          <p:cNvSpPr>
-            <a:spLocks noGrp="1"/>
-          </p:cNvSpPr>
-          <p:nvPr>
-            <p:ph idx="1"/>
-          </p:nvPr>
-        </p:nvSpPr>
-        <p:spPr/>
-        <p:txBody>
-          <a:bodyPr/>
-          <a:lstStyle/>
-          <a:p>
-            <a:pPr lvl="0" indent="0" marL="0">
-              <a:buNone/>
-            </a:pPr>
-            <a:r>
-              <a:rPr/>
-              <a:t>TF-IDF has one dimension per term; two documents sharing no vocabulary are orthogonal even if they say the same thing.</a:t>
-            </a:r>
-          </a:p>
-          <a:p>
-            <a:pPr lvl="0" indent="0" marL="0">
-              <a:buNone/>
-            </a:pPr>
-            <a:r>
-              <a:rPr/>
-              <a:t>An embedding maps a document to a dense vector where </a:t>
-            </a:r>
-            <a:r>
-              <a:rPr b="1"/>
-              <a:t>proximity tracks meaning</a:t>
-            </a:r>
-            <a:r>
-              <a:rPr/>
-              <a:t>.</a:t>
-            </a:r>
-          </a:p>
-          <a:p>
-            <a:pPr lvl="0" indent="0" marL="0">
-              <a:buNone/>
-            </a:pPr>
-            <a:r>
-              <a:rPr/>
-              <a:t>“Inflationary pressures persist” and “price growth remains elevated” share almost no words and sit close together in embedding space.</a:t>
-            </a:r>
-          </a:p>
-        </p:txBody>
-      </p:sp>
-    </p:spTree>
-  </p:cSld>
-</p:sld>
-</file>
-
-<file path=ppt/slides/slide19.xml><?xml version="1.0" encoding="utf-8"?>
-<p:sld xmlns:a="http://schemas.openxmlformats.org/drawingml/2006/main" xmlns:r="http://schemas.openxmlformats.org/officeDocument/2006/relationships" xmlns:p="http://schemas.openxmlformats.org/presentationml/2006/main">
-  <p:cSld>
-    <p:spTree>
-      <p:nvGrpSpPr>
-        <p:cNvPr id="1" name=""/>
-        <p:cNvGrpSpPr/>
-        <p:nvPr/>
-      </p:nvGrpSpPr>
-      <p:grpSpPr>
-        <a:xfrm>
-          <a:off x="0" y="0"/>
-          <a:ext cx="0" cy="0"/>
-          <a:chOff x="0" y="0"/>
-          <a:chExt cx="0" cy="0"/>
-        </a:xfrm>
-      </p:grpSpPr>
-      <p:sp>
-        <p:nvSpPr>
-          <p:cNvPr id="2" name="Title 1"/>
-          <p:cNvSpPr>
-            <a:spLocks noGrp="1"/>
-          </p:cNvSpPr>
-          <p:nvPr>
-            <p:ph type="title"/>
-          </p:nvPr>
-        </p:nvSpPr>
-        <p:spPr/>
-        <p:txBody>
-          <a:bodyPr/>
-          <a:lstStyle/>
-          <a:p>
-            <a:pPr lvl="0" indent="0" marL="0">
-              <a:buNone/>
-            </a:pPr>
-            <a:r>
-              <a:rPr/>
-              <a:t>Computed on your machine</a:t>
-            </a:r>
-          </a:p>
-        </p:txBody>
-      </p:sp>
-      <p:sp>
-        <p:nvSpPr>
-          <p:cNvPr id="3" name="Content Placeholder 2"/>
-          <p:cNvSpPr>
-            <a:spLocks noGrp="1"/>
-          </p:cNvSpPr>
-          <p:nvPr>
-            <p:ph idx="1"/>
-          </p:nvPr>
-        </p:nvSpPr>
-        <p:spPr/>
-        <p:txBody>
-          <a:bodyPr/>
-          <a:lstStyle/>
-          <a:p>
-            <a:pPr lvl="0" indent="0" marL="0">
-              <a:buNone/>
-            </a:pPr>
-            <a:r>
-              <a:rPr/>
-              <a:t>VS Codium terminal</a:t>
-            </a:r>
-          </a:p>
-          <a:p>
-            <a:pPr lvl="0" indent="0">
-              <a:buNone/>
-            </a:pPr>
-            <a:r>
-              <a:rPr>
-                <a:latin typeface="Courier"/>
-              </a:rPr>
-              <a:t>ollama pull nomic-embed-text</a:t>
-            </a:r>
-          </a:p>
-          <a:p>
-            <a:pPr lvl="0" indent="0">
-              <a:buNone/>
-            </a:pPr>
-            <a:r>
-              <a:rPr b="1">
-                <a:solidFill>
-                  <a:srgbClr val="008000"/>
-                </a:solidFill>
-                <a:latin typeface="Courier"/>
-              </a:rPr>
-              <a:t>import</a:t>
-            </a:r>
-            <a:r>
-              <a:rPr>
-                <a:latin typeface="Courier"/>
-              </a:rPr>
-              <a:t> requests, numpy </a:t>
-            </a:r>
-            <a:r>
-              <a:rPr b="1">
-                <a:solidFill>
-                  <a:srgbClr val="008000"/>
-                </a:solidFill>
-                <a:latin typeface="Courier"/>
-              </a:rPr>
-              <a:t>as</a:t>
-            </a:r>
-            <a:r>
-              <a:rPr>
-                <a:latin typeface="Courier"/>
-              </a:rPr>
-              <a:t> np</a:t>
-            </a:r>
-            <a:br/>
-            <a:br/>
-            <a:r>
-              <a:rPr b="1">
-                <a:solidFill>
-                  <a:srgbClr val="007020"/>
-                </a:solidFill>
-                <a:latin typeface="Courier"/>
-              </a:rPr>
-              <a:t>def</a:t>
-            </a:r>
-            <a:r>
-              <a:rPr>
-                <a:latin typeface="Courier"/>
-              </a:rPr>
-              <a:t> embed(text):</a:t>
-            </a:r>
-            <a:br/>
-            <a:r>
-              <a:rPr>
-                <a:latin typeface="Courier"/>
-              </a:rPr>
-              <a:t>    r </a:t>
-            </a:r>
-            <a:r>
-              <a:rPr>
-                <a:solidFill>
-                  <a:srgbClr val="666666"/>
-                </a:solidFill>
-                <a:latin typeface="Courier"/>
-              </a:rPr>
-              <a:t>=</a:t>
-            </a:r>
-            <a:r>
-              <a:rPr>
-                <a:latin typeface="Courier"/>
-              </a:rPr>
-              <a:t> requests.post(</a:t>
-            </a:r>
-            <a:r>
-              <a:rPr>
-                <a:solidFill>
-                  <a:srgbClr val="4070A0"/>
-                </a:solidFill>
-                <a:latin typeface="Courier"/>
-              </a:rPr>
-              <a:t>"http://localhost:11434/api/embeddings"</a:t>
-            </a:r>
-            <a:r>
-              <a:rPr>
-                <a:latin typeface="Courier"/>
-              </a:rPr>
-              <a:t>,</a:t>
-            </a:r>
-            <a:br/>
-            <a:r>
-              <a:rPr>
-                <a:latin typeface="Courier"/>
-              </a:rPr>
-              <a:t>                      json</a:t>
-            </a:r>
-            <a:r>
-              <a:rPr>
-                <a:solidFill>
-                  <a:srgbClr val="666666"/>
-                </a:solidFill>
-                <a:latin typeface="Courier"/>
-              </a:rPr>
-              <a:t>=</a:t>
-            </a:r>
-            <a:r>
-              <a:rPr>
-                <a:latin typeface="Courier"/>
-              </a:rPr>
-              <a:t>{</a:t>
-            </a:r>
-            <a:r>
-              <a:rPr>
-                <a:solidFill>
-                  <a:srgbClr val="4070A0"/>
-                </a:solidFill>
-                <a:latin typeface="Courier"/>
-              </a:rPr>
-              <a:t>"model"</a:t>
-            </a:r>
-            <a:r>
-              <a:rPr>
-                <a:latin typeface="Courier"/>
-              </a:rPr>
-              <a:t>: </a:t>
-            </a:r>
-            <a:r>
-              <a:rPr>
-                <a:solidFill>
-                  <a:srgbClr val="4070A0"/>
-                </a:solidFill>
-                <a:latin typeface="Courier"/>
-              </a:rPr>
-              <a:t>"nomic-embed-text"</a:t>
-            </a:r>
-            <a:r>
-              <a:rPr>
-                <a:latin typeface="Courier"/>
-              </a:rPr>
-              <a:t>, </a:t>
-            </a:r>
-            <a:r>
-              <a:rPr>
-                <a:solidFill>
-                  <a:srgbClr val="4070A0"/>
-                </a:solidFill>
-                <a:latin typeface="Courier"/>
-              </a:rPr>
-              <a:t>"prompt"</a:t>
-            </a:r>
-            <a:r>
-              <a:rPr>
-                <a:latin typeface="Courier"/>
-              </a:rPr>
-              <a:t>: text[:</a:t>
-            </a:r>
-            <a:r>
-              <a:rPr>
-                <a:solidFill>
-                  <a:srgbClr val="40A070"/>
-                </a:solidFill>
-                <a:latin typeface="Courier"/>
-              </a:rPr>
-              <a:t>8000</a:t>
-            </a:r>
-            <a:r>
-              <a:rPr>
-                <a:latin typeface="Courier"/>
-              </a:rPr>
-              <a:t>]})</a:t>
-            </a:r>
-            <a:br/>
-            <a:r>
-              <a:rPr>
-                <a:latin typeface="Courier"/>
-              </a:rPr>
-              <a:t>    </a:t>
-            </a:r>
-            <a:r>
-              <a:rPr b="1">
-                <a:solidFill>
-                  <a:srgbClr val="007020"/>
-                </a:solidFill>
-                <a:latin typeface="Courier"/>
-              </a:rPr>
-              <a:t>return</a:t>
-            </a:r>
-            <a:r>
-              <a:rPr>
-                <a:latin typeface="Courier"/>
-              </a:rPr>
-              <a:t> np.array(r.json()[</a:t>
-            </a:r>
-            <a:r>
-              <a:rPr>
-                <a:solidFill>
-                  <a:srgbClr val="4070A0"/>
-                </a:solidFill>
-                <a:latin typeface="Courier"/>
-              </a:rPr>
-              <a:t>"embedding"</a:t>
-            </a:r>
-            <a:r>
-              <a:rPr>
-                <a:latin typeface="Courier"/>
-              </a:rPr>
-              <a:t>])</a:t>
-            </a:r>
-            <a:br/>
-            <a:br/>
-            <a:r>
-              <a:rPr>
-                <a:latin typeface="Courier"/>
-              </a:rPr>
-              <a:t>E </a:t>
-            </a:r>
-            <a:r>
-              <a:rPr>
-                <a:solidFill>
-                  <a:srgbClr val="666666"/>
-                </a:solidFill>
-                <a:latin typeface="Courier"/>
-              </a:rPr>
-              <a:t>=</a:t>
-            </a:r>
-            <a:r>
-              <a:rPr>
-                <a:latin typeface="Courier"/>
-              </a:rPr>
-              <a:t> np.vstack([embed(t) </a:t>
-            </a:r>
-            <a:r>
-              <a:rPr b="1">
-                <a:solidFill>
-                  <a:srgbClr val="007020"/>
-                </a:solidFill>
-                <a:latin typeface="Courier"/>
-              </a:rPr>
-              <a:t>for</a:t>
-            </a:r>
-            <a:r>
-              <a:rPr>
-                <a:latin typeface="Courier"/>
-              </a:rPr>
-              <a:t> t </a:t>
-            </a:r>
-            <a:r>
-              <a:rPr b="1">
-                <a:solidFill>
-                  <a:srgbClr val="007020"/>
-                </a:solidFill>
-                <a:latin typeface="Courier"/>
-              </a:rPr>
-              <a:t>in</a:t>
-            </a:r>
-            <a:r>
-              <a:rPr>
-                <a:latin typeface="Courier"/>
-              </a:rPr>
-              <a:t> cb[</a:t>
-            </a:r>
-            <a:r>
-              <a:rPr>
-                <a:solidFill>
-                  <a:srgbClr val="4070A0"/>
-                </a:solidFill>
-                <a:latin typeface="Courier"/>
-              </a:rPr>
-              <a:t>"text"</a:t>
-            </a:r>
-            <a:r>
-              <a:rPr>
-                <a:latin typeface="Courier"/>
-              </a:rPr>
-              <a:t>].head(</a:t>
-            </a:r>
-            <a:r>
-              <a:rPr>
-                <a:solidFill>
-                  <a:srgbClr val="40A070"/>
-                </a:solidFill>
-                <a:latin typeface="Courier"/>
-              </a:rPr>
-              <a:t>200</a:t>
-            </a:r>
-            <a:r>
-              <a:rPr>
-                <a:latin typeface="Courier"/>
-              </a:rPr>
-              <a:t>)])</a:t>
-            </a:r>
-            <a:br/>
-            <a:r>
-              <a:rPr>
-                <a:solidFill>
-                  <a:srgbClr val="008000"/>
-                </a:solidFill>
-                <a:latin typeface="Courier"/>
-              </a:rPr>
-              <a:t>print</a:t>
-            </a:r>
-            <a:r>
-              <a:rPr>
-                <a:latin typeface="Courier"/>
-              </a:rPr>
-              <a:t>(E.shape)</a:t>
-            </a:r>
-          </a:p>
-          <a:p>
-            <a:pPr lvl="0" indent="0" marL="0">
-              <a:buNone/>
-            </a:pPr>
-            <a:r>
-              <a:rPr/>
-              <a:t>No API key, no cost, and the documents never leave your laptop — which for licensed text is not a convenience but a requirement.</a:t>
-            </a:r>
-          </a:p>
-        </p:txBody>
-      </p:sp>
     </p:spTree>
   </p:cSld>
 </p:sld>
@@ -4972,30 +4594,28 @@
       </p:grpSpPr>
       <p:sp>
         <p:nvSpPr>
-          <p:cNvPr id="2" name="Title 1"/>
-          <p:cNvSpPr>
-            <a:spLocks noGrp="1"/>
-          </p:cNvSpPr>
-          <p:nvPr>
-            <p:ph type="title"/>
-          </p:nvPr>
-        </p:nvSpPr>
-        <p:spPr>
-          <a:xfrm>
-            <a:off x="722313" y="3305176"/>
-            <a:ext cx="7772400" cy="1021556"/>
-          </a:xfrm>
-        </p:spPr>
+          <p:cNvPr id="3" name="Content Placeholder 2"/>
+          <p:cNvSpPr>
+            <a:spLocks noGrp="1"/>
+          </p:cNvSpPr>
+          <p:nvPr>
+            <p:ph idx="1"/>
+          </p:nvPr>
+        </p:nvSpPr>
+        <p:spPr/>
         <p:txBody>
           <a:bodyPr/>
           <a:lstStyle/>
           <a:p>
             <a:pPr lvl="0" indent="0" marL="0">
+              <a:spcBef>
+                <a:spcPts val="3000"/>
+              </a:spcBef>
               <a:buNone/>
             </a:pPr>
             <a:r>
-              <a:rPr/>
-              <a:t>Where we are</a:t>
+              <a:rPr b="1"/>
+              <a:t>How do you measure something that only exists as words?</a:t>
             </a:r>
           </a:p>
         </p:txBody>
@@ -5042,7 +4662,7 @@
             </a:pPr>
             <a:r>
               <a:rPr/>
-              <a:t>What embeddings cost you</a:t>
+              <a:t>What bag-of-words throws away</a:t>
             </a:r>
           </a:p>
         </p:txBody>
@@ -5062,55 +4682,50 @@
           <a:bodyPr/>
           <a:lstStyle/>
           <a:p>
-            <a:pPr lvl="0"/>
-            <a:r>
-              <a:rPr b="1"/>
-              <a:t>Opacity.</a:t>
-            </a:r>
+            <a:pPr lvl="0" indent="0" marL="0">
+              <a:buNone/>
+            </a:pPr>
             <a:r>
               <a:rPr/>
-              <a:t> You cannot say which words drove a result.</a:t>
-            </a:r>
-          </a:p>
-          <a:p>
-            <a:pPr lvl="0"/>
-            <a:r>
-              <a:rPr b="1"/>
-              <a:t>Model dependence.</a:t>
-            </a:r>
+              <a:t>Word order, entirely.</a:t>
+            </a:r>
+          </a:p>
+          <a:p>
+            <a:pPr lvl="0" indent="0" marL="1270000">
+              <a:buNone/>
+            </a:pPr>
+            <a:r>
+              <a:rPr sz="2000" i="1"/>
+              <a:t>“Inflation is not a concern”</a:t>
+            </a:r>
+            <a:r>
+              <a:rPr sz="2000"/>
+              <a:t> and </a:t>
+            </a:r>
+            <a:r>
+              <a:rPr sz="2000" i="1"/>
+              <a:t>“a concern is not inflation”</a:t>
+            </a:r>
+            <a:r>
+              <a:rPr sz="2000"/>
+              <a:t> are </a:t>
+            </a:r>
+            <a:r>
+              <a:rPr sz="2000" b="1"/>
+              <a:t>identical vectors</a:t>
+            </a:r>
+            <a:r>
+              <a:rPr sz="2000"/>
+              <a:t>.</a:t>
+            </a:r>
+          </a:p>
+          <a:p>
+            <a:pPr lvl="0" indent="0" marL="0">
+              <a:buNone/>
+            </a:pPr>
             <a:r>
               <a:rPr/>
-              <a:t> A different embedding model gives different distances.</a:t>
-            </a:r>
-          </a:p>
-          <a:p>
-            <a:pPr lvl="0"/>
-            <a:r>
-              <a:rPr b="1"/>
-              <a:t>Training baggage.</a:t>
-            </a:r>
-            <a:r>
-              <a:rPr/>
-              <a:t> Whatever was in the training corpus is in your geometry.</a:t>
-            </a:r>
-          </a:p>
-          <a:p>
-            <a:pPr lvl="0" indent="0" marL="0">
-              <a:buNone/>
-            </a:pPr>
-            <a:r>
-              <a:rPr/>
-              <a:t>Report the model and version. “We embedded the documents” is not reproducible; </a:t>
-            </a:r>
-            <a:r>
-              <a:rPr>
-                <a:latin typeface="Courier"/>
-              </a:rPr>
-              <a:t>nomic-embed-text</a:t>
-            </a:r>
-            <a:r>
-              <a:rPr/>
-              <a:t> via Ollama is.</a:t>
+              <a:t>Two-word n-grams recover a little of the negation. Not all of it.</a:t>
             </a:r>
           </a:p>
         </p:txBody>
@@ -5147,12 +4762,7 @@
             <p:ph type="title"/>
           </p:nvPr>
         </p:nvSpPr>
-        <p:spPr>
-          <a:xfrm>
-            <a:off x="722313" y="3305176"/>
-            <a:ext cx="7772400" cy="1021556"/>
-          </a:xfrm>
-        </p:spPr>
+        <p:spPr/>
         <p:txBody>
           <a:bodyPr/>
           <a:lstStyle/>
@@ -5162,11 +4772,291 @@
             </a:pPr>
             <a:r>
               <a:rPr/>
-              <a:t>Validity</a:t>
-            </a:r>
-          </a:p>
-        </p:txBody>
-      </p:sp>
+              <a:t>Dense embeddings</a:t>
+            </a:r>
+          </a:p>
+        </p:txBody>
+      </p:sp>
+      <mc:AlternateContent xmlns:mc="http://schemas.openxmlformats.org/markup-compatibility/2006">
+        <mc:Choice xmlns:a14="http://schemas.microsoft.com/office/drawing/2010/main" Requires="a14">
+          <p:sp>
+            <p:nvSpPr>
+              <p:cNvPr id="3" name="Content Placeholder 2"/>
+              <p:cNvSpPr>
+                <a:spLocks noGrp="1"/>
+              </p:cNvSpPr>
+              <p:nvPr>
+                <p:ph idx="1"/>
+              </p:nvPr>
+            </p:nvSpPr>
+            <p:spPr/>
+            <p:txBody>
+              <a:bodyPr/>
+              <a:lstStyle/>
+              <a:p>
+                <a:pPr lvl="0" indent="0" marL="0">
+                  <a:buNone/>
+                </a:pPr>
+                <a:r>
+                  <a:rPr/>
+                  <a:t>A model maps each document to </a:t>
+                </a:r>
+                <a14:m>
+                  <m:oMath xmlns:m="http://schemas.openxmlformats.org/officeDocument/2006/math">
+                    <m:sSub>
+                      <m:e>
+                        <m:r>
+                          <m:t>v</m:t>
+                        </m:r>
+                      </m:e>
+                      <m:sub>
+                        <m:r>
+                          <m:t>d</m:t>
+                        </m:r>
+                      </m:sub>
+                    </m:sSub>
+                    <m:r>
+                      <m:rPr>
+                        <m:sty m:val="p"/>
+                      </m:rPr>
+                      <m:t>∈</m:t>
+                    </m:r>
+                    <m:sSup>
+                      <m:e>
+                        <m:r>
+                          <m:rPr>
+                            <m:sty m:val="p"/>
+                            <m:scr m:val="double-struck"/>
+                          </m:rPr>
+                          <m:t>R</m:t>
+                        </m:r>
+                      </m:e>
+                      <m:sup>
+                        <m:r>
+                          <m:t>m</m:t>
+                        </m:r>
+                      </m:sup>
+                    </m:sSup>
+                  </m:oMath>
+                </a14:m>
+                <a:r>
+                  <a:rPr/>
+                  <a:t> (typically </a:t>
+                </a:r>
+                <a14:m>
+                  <m:oMath xmlns:m="http://schemas.openxmlformats.org/officeDocument/2006/math">
+                    <m:r>
+                      <m:t>m</m:t>
+                    </m:r>
+                  </m:oMath>
+                </a14:m>
+                <a:r>
+                  <a:rPr/>
+                  <a:t> = 384 to 1024), trained so that semantically similar texts have similar vectors. Similarity by cosine:</a:t>
+                </a:r>
+              </a:p>
+              <a:p>
+                <a:pPr lvl="0" indent="0" marL="0">
+                  <a:buNone/>
+                </a:pPr>
+                <a14:m>
+                  <m:oMathPara xmlns:m="http://schemas.openxmlformats.org/officeDocument/2006/math">
+                    <m:oMathParaPr>
+                      <m:jc m:val="center"/>
+                    </m:oMathParaPr>
+                    <m:oMath>
+                      <m:r>
+                        <m:rPr>
+                          <m:sty m:val="p"/>
+                        </m:rPr>
+                        <m:t>cos</m:t>
+                      </m:r>
+                      <m:d>
+                        <m:dPr>
+                          <m:begChr m:val="("/>
+                          <m:sepChr m:val=""/>
+                          <m:endChr m:val=")"/>
+                          <m:grow/>
+                        </m:dPr>
+                        <m:e>
+                          <m:sSub>
+                            <m:e>
+                              <m:r>
+                                <m:t>v</m:t>
+                              </m:r>
+                            </m:e>
+                            <m:sub>
+                              <m:r>
+                                <m:t>a</m:t>
+                              </m:r>
+                            </m:sub>
+                          </m:sSub>
+                          <m:r>
+                            <m:rPr>
+                              <m:sty m:val="p"/>
+                            </m:rPr>
+                            <m:t>,</m:t>
+                          </m:r>
+                          <m:sSub>
+                            <m:e>
+                              <m:r>
+                                <m:t>v</m:t>
+                              </m:r>
+                            </m:e>
+                            <m:sub>
+                              <m:r>
+                                <m:t>b</m:t>
+                              </m:r>
+                            </m:sub>
+                          </m:sSub>
+                        </m:e>
+                      </m:d>
+                      <m:r>
+                        <m:rPr>
+                          <m:sty m:val="p"/>
+                        </m:rPr>
+                        <m:t>=</m:t>
+                      </m:r>
+                      <m:f>
+                        <m:fPr>
+                          <m:type m:val="bar"/>
+                        </m:fPr>
+                        <m:num>
+                          <m:sSubSup>
+                            <m:e>
+                              <m:r>
+                                <m:t>v</m:t>
+                              </m:r>
+                            </m:e>
+                            <m:sub>
+                              <m:r>
+                                <m:t>a</m:t>
+                              </m:r>
+                            </m:sub>
+                            <m:sup>
+                              <m:r>
+                                <m:rPr>
+                                  <m:sty m:val="p"/>
+                                </m:rPr>
+                                <m:t>⊤</m:t>
+                              </m:r>
+                            </m:sup>
+                          </m:sSubSup>
+                          <m:sSub>
+                            <m:e>
+                              <m:r>
+                                <m:t>v</m:t>
+                              </m:r>
+                            </m:e>
+                            <m:sub>
+                              <m:r>
+                                <m:t>b</m:t>
+                              </m:r>
+                            </m:sub>
+                          </m:sSub>
+                        </m:num>
+                        <m:den>
+                          <m:r>
+                            <m:rPr>
+                              <m:sty m:val="p"/>
+                            </m:rPr>
+                            <m:t>∥</m:t>
+                          </m:r>
+                          <m:sSub>
+                            <m:e>
+                              <m:r>
+                                <m:t>v</m:t>
+                              </m:r>
+                            </m:e>
+                            <m:sub>
+                              <m:r>
+                                <m:t>a</m:t>
+                              </m:r>
+                            </m:sub>
+                          </m:sSub>
+                          <m:r>
+                            <m:rPr>
+                              <m:sty m:val="p"/>
+                            </m:rPr>
+                            <m:t>∥</m:t>
+                          </m:r>
+                          <m:r>
+                            <m:rPr>
+                              <m:sty m:val="p"/>
+                            </m:rPr>
+                            <m:t>∥</m:t>
+                          </m:r>
+                          <m:sSub>
+                            <m:e>
+                              <m:r>
+                                <m:t>v</m:t>
+                              </m:r>
+                            </m:e>
+                            <m:sub>
+                              <m:r>
+                                <m:t>b</m:t>
+                              </m:r>
+                            </m:sub>
+                          </m:sSub>
+                          <m:r>
+                            <m:rPr>
+                              <m:sty m:val="p"/>
+                            </m:rPr>
+                            <m:t>∥</m:t>
+                          </m:r>
+                        </m:den>
+                      </m:f>
+                      <m:r>
+                        <m:rPr>
+                          <m:sty m:val="p"/>
+                        </m:rPr>
+                        <m:t>∈</m:t>
+                      </m:r>
+                      <m:d>
+                        <m:dPr>
+                          <m:begChr m:val="["/>
+                          <m:sepChr m:val=""/>
+                          <m:endChr m:val="]"/>
+                          <m:grow/>
+                        </m:dPr>
+                        <m:e>
+                          <m:r>
+                            <m:rPr>
+                              <m:sty m:val="p"/>
+                            </m:rPr>
+                            <m:t>−</m:t>
+                          </m:r>
+                          <m:r>
+                            <m:t>1</m:t>
+                          </m:r>
+                          <m:r>
+                            <m:rPr>
+                              <m:sty m:val="p"/>
+                            </m:rPr>
+                            <m:t>,</m:t>
+                          </m:r>
+                          <m:r>
+                            <m:t>1</m:t>
+                          </m:r>
+                        </m:e>
+                      </m:d>
+                    </m:oMath>
+                  </m:oMathPara>
+                </a14:m>
+              </a:p>
+              <a:p>
+                <a:pPr lvl="0" indent="0" marL="0">
+                  <a:buNone/>
+                </a:pPr>
+                <a:r>
+                  <a:rPr/>
+                  <a:t>Cosine ignores magnitude — which is what you want when documents differ in length.</a:t>
+                </a:r>
+              </a:p>
+            </p:txBody>
+          </p:sp>
+        </mc:Choice>
+      </mc:AlternateContent>
     </p:spTree>
   </p:cSld>
 </p:sld>
@@ -5209,7 +5099,7 @@
             </a:pPr>
             <a:r>
               <a:rPr/>
-              <a:t>The question that outranks the method</a:t>
+              <a:t>Generated locally</a:t>
             </a:r>
           </a:p>
         </p:txBody>
@@ -5234,72 +5124,24 @@
             </a:pPr>
             <a:r>
               <a:rPr/>
-              <a:t>You have built a number. </a:t>
+              <a:t>You will generate embeddings </a:t>
             </a:r>
             <a:r>
               <a:rPr b="1"/>
-              <a:t>What does it measure?</a:t>
-            </a:r>
-          </a:p>
-          <a:p>
-            <a:pPr lvl="0"/>
-            <a:r>
-              <a:rPr b="1"/>
-              <a:t>Face validity</a:t>
+              <a:t>on your own machine</a:t>
             </a:r>
             <a:r>
               <a:rPr/>
-              <a:t> — does it look right on documents you have read?</a:t>
-            </a:r>
-          </a:p>
-          <a:p>
-            <a:pPr lvl="0"/>
-            <a:r>
-              <a:rPr b="1"/>
-              <a:t>Convergent</a:t>
-            </a:r>
+              <a:t> in the lab.</a:t>
+            </a:r>
+          </a:p>
+          <a:p>
+            <a:pPr lvl="0" indent="0" marL="0">
+              <a:buNone/>
+            </a:pPr>
             <a:r>
               <a:rPr/>
-              <a:t> — does it agree with an independent measure?</a:t>
-            </a:r>
-          </a:p>
-          <a:p>
-            <a:pPr lvl="0"/>
-            <a:r>
-              <a:rPr b="1"/>
-              <a:t>Predictive</a:t>
-            </a:r>
-            <a:r>
-              <a:rPr/>
-              <a:t> — does it forecast something it should?</a:t>
-            </a:r>
-          </a:p>
-          <a:p>
-            <a:pPr lvl="0"/>
-            <a:r>
-              <a:rPr b="1"/>
-              <a:t>Discriminant</a:t>
-            </a:r>
-            <a:r>
-              <a:rPr/>
-              <a:t> — does it </a:t>
-            </a:r>
-            <a:r>
-              <a:rPr i="1"/>
-              <a:t>fail</a:t>
-            </a:r>
-            <a:r>
-              <a:rPr/>
-              <a:t> to correlate with things it should not?</a:t>
-            </a:r>
-          </a:p>
-          <a:p>
-            <a:pPr lvl="0" indent="0" marL="0">
-              <a:buNone/>
-            </a:pPr>
-            <a:r>
-              <a:rPr/>
-              <a:t>The last one is the one people skip, and it is the strongest evidence. A tone index that correlates with everything is measuring document length.</a:t>
+              <a:t>The corpus never leaves it. That is both a methodological and a governance point, and it is worth saying out loud in a paper.</a:t>
             </a:r>
           </a:p>
         </p:txBody>
@@ -5346,7 +5188,7 @@
             </a:pPr>
             <a:r>
               <a:rPr/>
-              <a:t>Check that immediately</a:t>
+              <a:t>Do not assume sophistication is progress</a:t>
             </a:r>
           </a:p>
         </p:txBody>
@@ -5366,159 +5208,24 @@
           <a:bodyPr/>
           <a:lstStyle/>
           <a:p>
-            <a:pPr lvl="0" indent="0">
+            <a:pPr lvl="0" indent="0" marL="0">
               <a:buNone/>
             </a:pPr>
             <a:r>
-              <a:rPr>
-                <a:latin typeface="Courier"/>
-              </a:rPr>
-              <a:t>cb[</a:t>
-            </a:r>
-            <a:r>
-              <a:rPr>
-                <a:solidFill>
-                  <a:srgbClr val="4070A0"/>
-                </a:solidFill>
-                <a:latin typeface="Courier"/>
-              </a:rPr>
-              <a:t>"tone_proxy"</a:t>
-            </a:r>
-            <a:r>
-              <a:rPr>
-                <a:latin typeface="Courier"/>
-              </a:rPr>
-              <a:t>] </a:t>
-            </a:r>
-            <a:r>
-              <a:rPr>
-                <a:solidFill>
-                  <a:srgbClr val="666666"/>
-                </a:solidFill>
-                <a:latin typeface="Courier"/>
-              </a:rPr>
-              <a:t>=</a:t>
-            </a:r>
-            <a:r>
-              <a:rPr>
-                <a:latin typeface="Courier"/>
-              </a:rPr>
-              <a:t> ...          </a:t>
-            </a:r>
-            <a:r>
-              <a:rPr i="1">
-                <a:solidFill>
-                  <a:srgbClr val="60A0B0"/>
-                </a:solidFill>
-                <a:latin typeface="Courier"/>
-              </a:rPr>
-              <a:t># whatever you construct</a:t>
-            </a:r>
-            <a:br/>
-            <a:r>
-              <a:rPr>
-                <a:solidFill>
-                  <a:srgbClr val="008000"/>
-                </a:solidFill>
-                <a:latin typeface="Courier"/>
-              </a:rPr>
-              <a:t>print</a:t>
-            </a:r>
-            <a:r>
-              <a:rPr>
-                <a:latin typeface="Courier"/>
-              </a:rPr>
-              <a:t>(cb[[</a:t>
-            </a:r>
-            <a:r>
-              <a:rPr>
-                <a:solidFill>
-                  <a:srgbClr val="4070A0"/>
-                </a:solidFill>
-                <a:latin typeface="Courier"/>
-              </a:rPr>
-              <a:t>"tone_proxy"</a:t>
-            </a:r>
-            <a:r>
-              <a:rPr>
-                <a:latin typeface="Courier"/>
-              </a:rPr>
-              <a:t>, </a:t>
-            </a:r>
-            <a:r>
-              <a:rPr>
-                <a:solidFill>
-                  <a:srgbClr val="4070A0"/>
-                </a:solidFill>
-                <a:latin typeface="Courier"/>
-              </a:rPr>
-              <a:t>"n_words"</a:t>
-            </a:r>
-            <a:r>
-              <a:rPr>
-                <a:latin typeface="Courier"/>
-              </a:rPr>
-              <a:t>]].corr().iloc[</a:t>
-            </a:r>
-            <a:r>
-              <a:rPr>
-                <a:solidFill>
-                  <a:srgbClr val="40A070"/>
-                </a:solidFill>
-                <a:latin typeface="Courier"/>
-              </a:rPr>
-              <a:t>0</a:t>
-            </a:r>
-            <a:r>
-              <a:rPr>
-                <a:latin typeface="Courier"/>
-              </a:rPr>
-              <a:t>, </a:t>
-            </a:r>
-            <a:r>
-              <a:rPr>
-                <a:solidFill>
-                  <a:srgbClr val="40A070"/>
-                </a:solidFill>
-                <a:latin typeface="Courier"/>
-              </a:rPr>
-              <a:t>1</a:t>
-            </a:r>
-            <a:r>
-              <a:rPr>
-                <a:latin typeface="Courier"/>
-              </a:rPr>
-              <a:t>].</a:t>
-            </a:r>
-            <a:r>
-              <a:rPr>
-                <a:solidFill>
-                  <a:srgbClr val="008000"/>
-                </a:solidFill>
-                <a:latin typeface="Courier"/>
-              </a:rPr>
-              <a:t>round</a:t>
-            </a:r>
-            <a:r>
-              <a:rPr>
-                <a:latin typeface="Courier"/>
-              </a:rPr>
-              <a:t>(</a:t>
-            </a:r>
-            <a:r>
-              <a:rPr>
-                <a:solidFill>
-                  <a:srgbClr val="40A070"/>
-                </a:solidFill>
-                <a:latin typeface="Courier"/>
-              </a:rPr>
-              <a:t>3</a:t>
-            </a:r>
-            <a:r>
-              <a:rPr>
-                <a:latin typeface="Courier"/>
-              </a:rPr>
-              <a:t>))</a:t>
+              <a:rPr b="1"/>
+              <a:t>Dictionary methods</a:t>
+            </a:r>
+            <a:r>
+              <a:rPr/>
+              <a:t> — counting terms from a pre-specified list — remain widely used in economics precisely because they are </a:t>
+            </a:r>
+            <a:r>
+              <a:rPr b="1"/>
+              <a:t>transparent and auditable</a:t>
+            </a:r>
+            <a:r>
+              <a:rPr/>
+              <a:t>.</a:t>
             </a:r>
           </a:p>
           <a:p>
@@ -5527,17 +5234,15 @@
             </a:pPr>
             <a:r>
               <a:rPr/>
-              <a:t>If your index correlates strongly with </a:t>
-            </a:r>
-            <a:r>
-              <a:rPr>
-                <a:latin typeface="Courier"/>
-              </a:rPr>
-              <a:t>n_words</a:t>
+              <a:t>An embedding-based index that nobody can interrogate may be </a:t>
+            </a:r>
+            <a:r>
+              <a:rPr i="1"/>
+              <a:t>less</a:t>
             </a:r>
             <a:r>
               <a:rPr/>
-              <a:t>, you have built a length detector with extra steps. This is the single most common failure in text-as-data work, and it is one line to test for.</a:t>
+              <a:t> useful for policy than a word count anyone can check.</a:t>
             </a:r>
           </a:p>
         </p:txBody>
@@ -5574,7 +5279,12 @@
             <p:ph type="title"/>
           </p:nvPr>
         </p:nvSpPr>
-        <p:spPr/>
+        <p:spPr>
+          <a:xfrm>
+            <a:off x="722313" y="3305176"/>
+            <a:ext cx="7772400" cy="1021556"/>
+          </a:xfrm>
+        </p:spPr>
         <p:txBody>
           <a:bodyPr/>
           <a:lstStyle/>
@@ -5584,58 +5294,7 @@
             </a:pPr>
             <a:r>
               <a:rPr/>
-              <a:t>A construct is not a measurement</a:t>
-            </a:r>
-          </a:p>
-        </p:txBody>
-      </p:sp>
-      <p:sp>
-        <p:nvSpPr>
-          <p:cNvPr id="3" name="Content Placeholder 2"/>
-          <p:cNvSpPr>
-            <a:spLocks noGrp="1"/>
-          </p:cNvSpPr>
-          <p:nvPr>
-            <p:ph idx="1"/>
-          </p:nvPr>
-        </p:nvSpPr>
-        <p:spPr/>
-        <p:txBody>
-          <a:bodyPr/>
-          <a:lstStyle/>
-          <a:p>
-            <a:pPr lvl="0" indent="0" marL="0">
-              <a:buNone/>
-            </a:pPr>
-            <a:r>
-              <a:rPr/>
-              <a:t>The Session 01 distinction, returning with teeth.</a:t>
-            </a:r>
-          </a:p>
-          <a:p>
-            <a:pPr lvl="0" indent="0" marL="0">
-              <a:buNone/>
-            </a:pPr>
-            <a:r>
-              <a:rPr/>
-              <a:t>An “attention index” built from term frequencies is a </a:t>
-            </a:r>
-            <a:r>
-              <a:rPr b="1"/>
-              <a:t>thing you constructed</a:t>
-            </a:r>
-            <a:r>
-              <a:rPr/>
-              <a:t>. It may be useful. It is not an observation of institutional attention, and the gap between those two is where careless papers live.</a:t>
-            </a:r>
-          </a:p>
-          <a:p>
-            <a:pPr lvl="0" indent="0" marL="0">
-              <a:buNone/>
-            </a:pPr>
-            <a:r>
-              <a:rPr/>
-              <a:t>Say “our index of X”, never “X”. The extra three words are the whole discipline.</a:t>
+              <a:t>9.5 Validity</a:t>
             </a:r>
           </a:p>
         </p:txBody>
@@ -5672,12 +5331,7 @@
             <p:ph type="title"/>
           </p:nvPr>
         </p:nvSpPr>
-        <p:spPr>
-          <a:xfrm>
-            <a:off x="722313" y="3305176"/>
-            <a:ext cx="7772400" cy="1021556"/>
-          </a:xfrm>
-        </p:spPr>
+        <p:spPr/>
         <p:txBody>
           <a:bodyPr/>
           <a:lstStyle/>
@@ -5687,7 +5341,75 @@
             </a:pPr>
             <a:r>
               <a:rPr/>
-              <a:t>Doing it</a:t>
+              <a:t>Four questions about any text-derived measure</a:t>
+            </a:r>
+          </a:p>
+        </p:txBody>
+      </p:sp>
+      <p:sp>
+        <p:nvSpPr>
+          <p:cNvPr id="3" name="Content Placeholder 2"/>
+          <p:cNvSpPr>
+            <a:spLocks noGrp="1"/>
+          </p:cNvSpPr>
+          <p:nvPr>
+            <p:ph idx="1"/>
+          </p:nvPr>
+        </p:nvSpPr>
+        <p:spPr/>
+        <p:txBody>
+          <a:bodyPr/>
+          <a:lstStyle/>
+          <a:p>
+            <a:pPr lvl="0" indent="-342900" marL="342900">
+              <a:buAutoNum type="arabicPeriod"/>
+            </a:pPr>
+            <a:r>
+              <a:rPr b="1"/>
+              <a:t>Face validity</a:t>
+            </a:r>
+            <a:r>
+              <a:rPr/>
+              <a:t> — read a random sample of high- and low-scoring documents. Do they look like what you claim to measure?</a:t>
+            </a:r>
+          </a:p>
+          <a:p>
+            <a:pPr lvl="0" indent="-342900" marL="342900">
+              <a:buAutoNum type="arabicPeriod"/>
+            </a:pPr>
+            <a:r>
+              <a:rPr b="1"/>
+              <a:t>Convergent validity</a:t>
+            </a:r>
+            <a:r>
+              <a:rPr/>
+              <a:t> — does the index correlate with independent measures of the same construct?</a:t>
+            </a:r>
+          </a:p>
+          <a:p>
+            <a:pPr lvl="0" indent="-342900" marL="342900">
+              <a:buAutoNum type="arabicPeriod"/>
+            </a:pPr>
+            <a:r>
+              <a:rPr b="1"/>
+              <a:t>Predictive validity</a:t>
+            </a:r>
+            <a:r>
+              <a:rPr/>
+              <a:t> — does it forecast something it should?</a:t>
+            </a:r>
+          </a:p>
+          <a:p>
+            <a:pPr lvl="0" indent="-342900" marL="342900">
+              <a:buAutoNum type="arabicPeriod"/>
+            </a:pPr>
+            <a:r>
+              <a:rPr b="1"/>
+              <a:t>Robustness</a:t>
+            </a:r>
+            <a:r>
+              <a:rPr/>
+              <a:t> — does it survive changes in preprocessing, vocabulary and model?</a:t>
             </a:r>
           </a:p>
         </p:txBody>
@@ -5734,7 +5456,7 @@
             </a:pPr>
             <a:r>
               <a:rPr/>
-              <a:t>Cluster the countries</a:t>
+              <a:t>On the first one</a:t>
             </a:r>
           </a:p>
         </p:txBody>
@@ -5754,463 +5476,16 @@
           <a:bodyPr/>
           <a:lstStyle/>
           <a:p>
-            <a:pPr lvl="0" indent="0">
+            <a:pPr lvl="0" indent="0" marL="0">
               <a:buNone/>
             </a:pPr>
             <a:r>
-              <a:rPr b="1">
-                <a:solidFill>
-                  <a:srgbClr val="008000"/>
-                </a:solidFill>
-                <a:latin typeface="Courier"/>
-              </a:rPr>
-              <a:t>from</a:t>
-            </a:r>
-            <a:r>
-              <a:rPr>
-                <a:latin typeface="Courier"/>
-              </a:rPr>
-              <a:t> sklearn.cluster </a:t>
-            </a:r>
-            <a:r>
-              <a:rPr b="1">
-                <a:solidFill>
-                  <a:srgbClr val="008000"/>
-                </a:solidFill>
-                <a:latin typeface="Courier"/>
-              </a:rPr>
-              <a:t>import</a:t>
-            </a:r>
-            <a:r>
-              <a:rPr>
-                <a:latin typeface="Courier"/>
-              </a:rPr>
-              <a:t> KMeans</a:t>
-            </a:r>
-            <a:br/>
-            <a:r>
-              <a:rPr b="1">
-                <a:solidFill>
-                  <a:srgbClr val="008000"/>
-                </a:solidFill>
-                <a:latin typeface="Courier"/>
-              </a:rPr>
-              <a:t>from</a:t>
-            </a:r>
-            <a:r>
-              <a:rPr>
-                <a:latin typeface="Courier"/>
-              </a:rPr>
-              <a:t> sklearn.preprocessing </a:t>
-            </a:r>
-            <a:r>
-              <a:rPr b="1">
-                <a:solidFill>
-                  <a:srgbClr val="008000"/>
-                </a:solidFill>
-                <a:latin typeface="Courier"/>
-              </a:rPr>
-              <a:t>import</a:t>
-            </a:r>
-            <a:r>
-              <a:rPr>
-                <a:latin typeface="Courier"/>
-              </a:rPr>
-              <a:t> StandardScaler</a:t>
-            </a:r>
-            <a:br/>
-            <a:r>
-              <a:rPr b="1">
-                <a:solidFill>
-                  <a:srgbClr val="008000"/>
-                </a:solidFill>
-                <a:latin typeface="Courier"/>
-              </a:rPr>
-              <a:t>from</a:t>
-            </a:r>
-            <a:r>
-              <a:rPr>
-                <a:latin typeface="Courier"/>
-              </a:rPr>
-              <a:t> sklearn.metrics </a:t>
-            </a:r>
-            <a:r>
-              <a:rPr b="1">
-                <a:solidFill>
-                  <a:srgbClr val="008000"/>
-                </a:solidFill>
-                <a:latin typeface="Courier"/>
-              </a:rPr>
-              <a:t>import</a:t>
-            </a:r>
-            <a:r>
-              <a:rPr>
-                <a:latin typeface="Courier"/>
-              </a:rPr>
-              <a:t> silhouette_score</a:t>
-            </a:r>
-            <a:br/>
-            <a:br/>
-            <a:r>
-              <a:rPr>
-                <a:latin typeface="Courier"/>
-              </a:rPr>
-              <a:t>core </a:t>
-            </a:r>
-            <a:r>
-              <a:rPr>
-                <a:solidFill>
-                  <a:srgbClr val="666666"/>
-                </a:solidFill>
-                <a:latin typeface="Courier"/>
-              </a:rPr>
-              <a:t>=</a:t>
-            </a:r>
-            <a:r>
-              <a:rPr>
-                <a:latin typeface="Courier"/>
-              </a:rPr>
-              <a:t> pd.read_parquet(</a:t>
-            </a:r>
-            <a:r>
-              <a:rPr>
-                <a:solidFill>
-                  <a:srgbClr val="4070A0"/>
-                </a:solidFill>
-                <a:latin typeface="Courier"/>
-              </a:rPr>
-              <a:t>"data/spine/core.parquet"</a:t>
-            </a:r>
-            <a:r>
-              <a:rPr>
-                <a:latin typeface="Courier"/>
-              </a:rPr>
-              <a:t>)</a:t>
-            </a:r>
-            <a:br/>
-            <a:r>
-              <a:rPr>
-                <a:latin typeface="Courier"/>
-              </a:rPr>
-              <a:t>prof </a:t>
-            </a:r>
-            <a:r>
-              <a:rPr>
-                <a:solidFill>
-                  <a:srgbClr val="666666"/>
-                </a:solidFill>
-                <a:latin typeface="Courier"/>
-              </a:rPr>
-              <a:t>=</a:t>
-            </a:r>
-            <a:r>
-              <a:rPr>
-                <a:latin typeface="Courier"/>
-              </a:rPr>
-              <a:t> core.groupby(</a:t>
-            </a:r>
-            <a:r>
-              <a:rPr>
-                <a:solidFill>
-                  <a:srgbClr val="4070A0"/>
-                </a:solidFill>
-                <a:latin typeface="Courier"/>
-              </a:rPr>
-              <a:t>"geo"</a:t>
-            </a:r>
-            <a:r>
-              <a:rPr>
-                <a:latin typeface="Courier"/>
-              </a:rPr>
-              <a:t>)[[</a:t>
-            </a:r>
-            <a:r>
-              <a:rPr>
-                <a:solidFill>
-                  <a:srgbClr val="4070A0"/>
-                </a:solidFill>
-                <a:latin typeface="Courier"/>
-              </a:rPr>
-              <a:t>"gdp_pc_eur"</a:t>
-            </a:r>
-            <a:r>
-              <a:rPr>
-                <a:latin typeface="Courier"/>
-              </a:rPr>
-              <a:t>, </a:t>
-            </a:r>
-            <a:r>
-              <a:rPr>
-                <a:solidFill>
-                  <a:srgbClr val="4070A0"/>
-                </a:solidFill>
-                <a:latin typeface="Courier"/>
-              </a:rPr>
-              <a:t>"productivity_idx"</a:t>
-            </a:r>
-            <a:r>
-              <a:rPr>
-                <a:latin typeface="Courier"/>
-              </a:rPr>
-              <a:t>,</a:t>
-            </a:r>
-            <a:br/>
-            <a:r>
-              <a:rPr>
-                <a:latin typeface="Courier"/>
-              </a:rPr>
-              <a:t>                            </a:t>
-            </a:r>
-            <a:r>
-              <a:rPr>
-                <a:solidFill>
-                  <a:srgbClr val="4070A0"/>
-                </a:solidFill>
-                <a:latin typeface="Courier"/>
-              </a:rPr>
-              <a:t>"employment_ths"</a:t>
-            </a:r>
-            <a:r>
-              <a:rPr>
-                <a:latin typeface="Courier"/>
-              </a:rPr>
-              <a:t>, </a:t>
-            </a:r>
-            <a:r>
-              <a:rPr>
-                <a:solidFill>
-                  <a:srgbClr val="4070A0"/>
-                </a:solidFill>
-                <a:latin typeface="Courier"/>
-              </a:rPr>
-              <a:t>"gfcf_meur"</a:t>
-            </a:r>
-            <a:r>
-              <a:rPr>
-                <a:latin typeface="Courier"/>
-              </a:rPr>
-              <a:t>]].mean()</a:t>
-            </a:r>
-            <a:br/>
-            <a:r>
-              <a:rPr>
-                <a:latin typeface="Courier"/>
-              </a:rPr>
-              <a:t>Z </a:t>
-            </a:r>
-            <a:r>
-              <a:rPr>
-                <a:solidFill>
-                  <a:srgbClr val="666666"/>
-                </a:solidFill>
-                <a:latin typeface="Courier"/>
-              </a:rPr>
-              <a:t>=</a:t>
-            </a:r>
-            <a:r>
-              <a:rPr>
-                <a:latin typeface="Courier"/>
-              </a:rPr>
-              <a:t> StandardScaler().fit_transform(prof)</a:t>
-            </a:r>
-            <a:br/>
-            <a:br/>
-            <a:r>
-              <a:rPr b="1">
-                <a:solidFill>
-                  <a:srgbClr val="007020"/>
-                </a:solidFill>
-                <a:latin typeface="Courier"/>
-              </a:rPr>
-              <a:t>for</a:t>
-            </a:r>
-            <a:r>
-              <a:rPr>
-                <a:latin typeface="Courier"/>
-              </a:rPr>
-              <a:t> k </a:t>
-            </a:r>
-            <a:r>
-              <a:rPr b="1">
-                <a:solidFill>
-                  <a:srgbClr val="007020"/>
-                </a:solidFill>
-                <a:latin typeface="Courier"/>
-              </a:rPr>
-              <a:t>in</a:t>
-            </a:r>
-            <a:r>
-              <a:rPr>
-                <a:latin typeface="Courier"/>
-              </a:rPr>
-              <a:t> </a:t>
-            </a:r>
-            <a:r>
-              <a:rPr>
-                <a:solidFill>
-                  <a:srgbClr val="008000"/>
-                </a:solidFill>
-                <a:latin typeface="Courier"/>
-              </a:rPr>
-              <a:t>range</a:t>
-            </a:r>
-            <a:r>
-              <a:rPr>
-                <a:latin typeface="Courier"/>
-              </a:rPr>
-              <a:t>(</a:t>
-            </a:r>
-            <a:r>
-              <a:rPr>
-                <a:solidFill>
-                  <a:srgbClr val="40A070"/>
-                </a:solidFill>
-                <a:latin typeface="Courier"/>
-              </a:rPr>
-              <a:t>2</a:t>
-            </a:r>
-            <a:r>
-              <a:rPr>
-                <a:latin typeface="Courier"/>
-              </a:rPr>
-              <a:t>, </a:t>
-            </a:r>
-            <a:r>
-              <a:rPr>
-                <a:solidFill>
-                  <a:srgbClr val="40A070"/>
-                </a:solidFill>
-                <a:latin typeface="Courier"/>
-              </a:rPr>
-              <a:t>8</a:t>
-            </a:r>
-            <a:r>
-              <a:rPr>
-                <a:latin typeface="Courier"/>
-              </a:rPr>
-              <a:t>):</a:t>
-            </a:r>
-            <a:br/>
-            <a:r>
-              <a:rPr>
-                <a:latin typeface="Courier"/>
-              </a:rPr>
-              <a:t>    km </a:t>
-            </a:r>
-            <a:r>
-              <a:rPr>
-                <a:solidFill>
-                  <a:srgbClr val="666666"/>
-                </a:solidFill>
-                <a:latin typeface="Courier"/>
-              </a:rPr>
-              <a:t>=</a:t>
-            </a:r>
-            <a:r>
-              <a:rPr>
-                <a:latin typeface="Courier"/>
-              </a:rPr>
-              <a:t> KMeans(k, n_init</a:t>
-            </a:r>
-            <a:r>
-              <a:rPr>
-                <a:solidFill>
-                  <a:srgbClr val="666666"/>
-                </a:solidFill>
-                <a:latin typeface="Courier"/>
-              </a:rPr>
-              <a:t>=</a:t>
-            </a:r>
-            <a:r>
-              <a:rPr>
-                <a:solidFill>
-                  <a:srgbClr val="40A070"/>
-                </a:solidFill>
-                <a:latin typeface="Courier"/>
-              </a:rPr>
-              <a:t>20</a:t>
-            </a:r>
-            <a:r>
-              <a:rPr>
-                <a:latin typeface="Courier"/>
-              </a:rPr>
-              <a:t>, random_state</a:t>
-            </a:r>
-            <a:r>
-              <a:rPr>
-                <a:solidFill>
-                  <a:srgbClr val="666666"/>
-                </a:solidFill>
-                <a:latin typeface="Courier"/>
-              </a:rPr>
-              <a:t>=</a:t>
-            </a:r>
-            <a:r>
-              <a:rPr>
-                <a:solidFill>
-                  <a:srgbClr val="40A070"/>
-                </a:solidFill>
-                <a:latin typeface="Courier"/>
-              </a:rPr>
-              <a:t>60033</a:t>
-            </a:r>
-            <a:r>
-              <a:rPr>
-                <a:latin typeface="Courier"/>
-              </a:rPr>
-              <a:t>).fit(Z)</a:t>
-            </a:r>
-            <a:br/>
-            <a:r>
-              <a:rPr>
-                <a:latin typeface="Courier"/>
-              </a:rPr>
-              <a:t>    </a:t>
-            </a:r>
-            <a:r>
-              <a:rPr>
-                <a:solidFill>
-                  <a:srgbClr val="008000"/>
-                </a:solidFill>
-                <a:latin typeface="Courier"/>
-              </a:rPr>
-              <a:t>print</a:t>
-            </a:r>
-            <a:r>
-              <a:rPr>
-                <a:latin typeface="Courier"/>
-              </a:rPr>
-              <a:t>(k, </a:t>
-            </a:r>
-            <a:r>
-              <a:rPr>
-                <a:solidFill>
-                  <a:srgbClr val="008000"/>
-                </a:solidFill>
-                <a:latin typeface="Courier"/>
-              </a:rPr>
-              <a:t>round</a:t>
-            </a:r>
-            <a:r>
-              <a:rPr>
-                <a:latin typeface="Courier"/>
-              </a:rPr>
-              <a:t>(silhouette_score(Z, km.labels_), </a:t>
-            </a:r>
-            <a:r>
-              <a:rPr>
-                <a:solidFill>
-                  <a:srgbClr val="40A070"/>
-                </a:solidFill>
-                <a:latin typeface="Courier"/>
-              </a:rPr>
-              <a:t>3</a:t>
-            </a:r>
-            <a:r>
-              <a:rPr>
-                <a:latin typeface="Courier"/>
-              </a:rPr>
-              <a:t>))</a:t>
+              <a:rPr b="1"/>
+              <a:t>Do this. Actually read them.</a:t>
+            </a:r>
+            <a:r>
+              <a:rPr/>
+              <a:t> It takes twenty minutes and it has killed more bad indices than any statistic.</a:t>
             </a:r>
           </a:p>
         </p:txBody>
@@ -6257,7 +5532,7 @@
             </a:pPr>
             <a:r>
               <a:rPr/>
-              <a:t>Test whether it is stable</a:t>
+              <a:t>On the fourth</a:t>
             </a:r>
           </a:p>
         </p:txBody>
@@ -6277,488 +5552,16 @@
           <a:bodyPr/>
           <a:lstStyle/>
           <a:p>
-            <a:pPr lvl="0" indent="0">
+            <a:pPr lvl="0" indent="0" marL="1270000">
               <a:buNone/>
             </a:pPr>
             <a:r>
-              <a:rPr b="1">
-                <a:solidFill>
-                  <a:srgbClr val="008000"/>
-                </a:solidFill>
-                <a:latin typeface="Courier"/>
-              </a:rPr>
-              <a:t>import</a:t>
-            </a:r>
-            <a:r>
-              <a:rPr>
-                <a:latin typeface="Courier"/>
-              </a:rPr>
-              <a:t> numpy </a:t>
-            </a:r>
-            <a:r>
-              <a:rPr b="1">
-                <a:solidFill>
-                  <a:srgbClr val="008000"/>
-                </a:solidFill>
-                <a:latin typeface="Courier"/>
-              </a:rPr>
-              <a:t>as</a:t>
-            </a:r>
-            <a:r>
-              <a:rPr>
-                <a:latin typeface="Courier"/>
-              </a:rPr>
-              <a:t> np</a:t>
-            </a:r>
-            <a:br/>
-            <a:r>
-              <a:rPr>
-                <a:latin typeface="Courier"/>
-              </a:rPr>
-              <a:t>rng </a:t>
-            </a:r>
-            <a:r>
-              <a:rPr>
-                <a:solidFill>
-                  <a:srgbClr val="666666"/>
-                </a:solidFill>
-                <a:latin typeface="Courier"/>
-              </a:rPr>
-              <a:t>=</a:t>
-            </a:r>
-            <a:r>
-              <a:rPr>
-                <a:latin typeface="Courier"/>
-              </a:rPr>
-              <a:t> np.random.default_rng(</a:t>
-            </a:r>
-            <a:r>
-              <a:rPr>
-                <a:solidFill>
-                  <a:srgbClr val="40A070"/>
-                </a:solidFill>
-                <a:latin typeface="Courier"/>
-              </a:rPr>
-              <a:t>60033</a:t>
-            </a:r>
-            <a:r>
-              <a:rPr>
-                <a:latin typeface="Courier"/>
-              </a:rPr>
-              <a:t>)</a:t>
-            </a:r>
-            <a:br/>
-            <a:r>
-              <a:rPr>
-                <a:latin typeface="Courier"/>
-              </a:rPr>
-              <a:t>base </a:t>
-            </a:r>
-            <a:r>
-              <a:rPr>
-                <a:solidFill>
-                  <a:srgbClr val="666666"/>
-                </a:solidFill>
-                <a:latin typeface="Courier"/>
-              </a:rPr>
-              <a:t>=</a:t>
-            </a:r>
-            <a:r>
-              <a:rPr>
-                <a:latin typeface="Courier"/>
-              </a:rPr>
-              <a:t> KMeans(</a:t>
-            </a:r>
-            <a:r>
-              <a:rPr>
-                <a:solidFill>
-                  <a:srgbClr val="40A070"/>
-                </a:solidFill>
-                <a:latin typeface="Courier"/>
-              </a:rPr>
-              <a:t>4</a:t>
-            </a:r>
-            <a:r>
-              <a:rPr>
-                <a:latin typeface="Courier"/>
-              </a:rPr>
-              <a:t>, n_init</a:t>
-            </a:r>
-            <a:r>
-              <a:rPr>
-                <a:solidFill>
-                  <a:srgbClr val="666666"/>
-                </a:solidFill>
-                <a:latin typeface="Courier"/>
-              </a:rPr>
-              <a:t>=</a:t>
-            </a:r>
-            <a:r>
-              <a:rPr>
-                <a:solidFill>
-                  <a:srgbClr val="40A070"/>
-                </a:solidFill>
-                <a:latin typeface="Courier"/>
-              </a:rPr>
-              <a:t>20</a:t>
-            </a:r>
-            <a:r>
-              <a:rPr>
-                <a:latin typeface="Courier"/>
-              </a:rPr>
-              <a:t>, random_state</a:t>
-            </a:r>
-            <a:r>
-              <a:rPr>
-                <a:solidFill>
-                  <a:srgbClr val="666666"/>
-                </a:solidFill>
-                <a:latin typeface="Courier"/>
-              </a:rPr>
-              <a:t>=</a:t>
-            </a:r>
-            <a:r>
-              <a:rPr>
-                <a:solidFill>
-                  <a:srgbClr val="40A070"/>
-                </a:solidFill>
-                <a:latin typeface="Courier"/>
-              </a:rPr>
-              <a:t>60033</a:t>
-            </a:r>
-            <a:r>
-              <a:rPr>
-                <a:latin typeface="Courier"/>
-              </a:rPr>
-              <a:t>).fit_predict(Z)</a:t>
-            </a:r>
-            <a:br/>
-            <a:br/>
-            <a:r>
-              <a:rPr>
-                <a:latin typeface="Courier"/>
-              </a:rPr>
-              <a:t>agree </a:t>
-            </a:r>
-            <a:r>
-              <a:rPr>
-                <a:solidFill>
-                  <a:srgbClr val="666666"/>
-                </a:solidFill>
-                <a:latin typeface="Courier"/>
-              </a:rPr>
-              <a:t>=</a:t>
-            </a:r>
-            <a:r>
-              <a:rPr>
-                <a:latin typeface="Courier"/>
-              </a:rPr>
-              <a:t> []</a:t>
-            </a:r>
-            <a:br/>
-            <a:r>
-              <a:rPr b="1">
-                <a:solidFill>
-                  <a:srgbClr val="007020"/>
-                </a:solidFill>
-                <a:latin typeface="Courier"/>
-              </a:rPr>
-              <a:t>for</a:t>
-            </a:r>
-            <a:r>
-              <a:rPr>
-                <a:latin typeface="Courier"/>
-              </a:rPr>
-              <a:t> _ </a:t>
-            </a:r>
-            <a:r>
-              <a:rPr b="1">
-                <a:solidFill>
-                  <a:srgbClr val="007020"/>
-                </a:solidFill>
-                <a:latin typeface="Courier"/>
-              </a:rPr>
-              <a:t>in</a:t>
-            </a:r>
-            <a:r>
-              <a:rPr>
-                <a:latin typeface="Courier"/>
-              </a:rPr>
-              <a:t> </a:t>
-            </a:r>
-            <a:r>
-              <a:rPr>
-                <a:solidFill>
-                  <a:srgbClr val="008000"/>
-                </a:solidFill>
-                <a:latin typeface="Courier"/>
-              </a:rPr>
-              <a:t>range</a:t>
-            </a:r>
-            <a:r>
-              <a:rPr>
-                <a:latin typeface="Courier"/>
-              </a:rPr>
-              <a:t>(</a:t>
-            </a:r>
-            <a:r>
-              <a:rPr>
-                <a:solidFill>
-                  <a:srgbClr val="40A070"/>
-                </a:solidFill>
-                <a:latin typeface="Courier"/>
-              </a:rPr>
-              <a:t>100</a:t>
-            </a:r>
-            <a:r>
-              <a:rPr>
-                <a:latin typeface="Courier"/>
-              </a:rPr>
-              <a:t>):</a:t>
-            </a:r>
-            <a:br/>
-            <a:r>
-              <a:rPr>
-                <a:latin typeface="Courier"/>
-              </a:rPr>
-              <a:t>    idx </a:t>
-            </a:r>
-            <a:r>
-              <a:rPr>
-                <a:solidFill>
-                  <a:srgbClr val="666666"/>
-                </a:solidFill>
-                <a:latin typeface="Courier"/>
-              </a:rPr>
-              <a:t>=</a:t>
-            </a:r>
-            <a:r>
-              <a:rPr>
-                <a:latin typeface="Courier"/>
-              </a:rPr>
-              <a:t> rng.choice(</a:t>
-            </a:r>
-            <a:r>
-              <a:rPr>
-                <a:solidFill>
-                  <a:srgbClr val="008000"/>
-                </a:solidFill>
-                <a:latin typeface="Courier"/>
-              </a:rPr>
-              <a:t>len</a:t>
-            </a:r>
-            <a:r>
-              <a:rPr>
-                <a:latin typeface="Courier"/>
-              </a:rPr>
-              <a:t>(Z), </a:t>
-            </a:r>
-            <a:r>
-              <a:rPr>
-                <a:solidFill>
-                  <a:srgbClr val="008000"/>
-                </a:solidFill>
-                <a:latin typeface="Courier"/>
-              </a:rPr>
-              <a:t>len</a:t>
-            </a:r>
-            <a:r>
-              <a:rPr>
-                <a:latin typeface="Courier"/>
-              </a:rPr>
-              <a:t>(Z), replace</a:t>
-            </a:r>
-            <a:r>
-              <a:rPr>
-                <a:solidFill>
-                  <a:srgbClr val="666666"/>
-                </a:solidFill>
-                <a:latin typeface="Courier"/>
-              </a:rPr>
-              <a:t>=</a:t>
-            </a:r>
-            <a:r>
-              <a:rPr>
-                <a:solidFill>
-                  <a:srgbClr val="19177C"/>
-                </a:solidFill>
-                <a:latin typeface="Courier"/>
-              </a:rPr>
-              <a:t>True</a:t>
-            </a:r>
-            <a:r>
-              <a:rPr>
-                <a:latin typeface="Courier"/>
-              </a:rPr>
-              <a:t>)</a:t>
-            </a:r>
-            <a:br/>
-            <a:r>
-              <a:rPr>
-                <a:latin typeface="Courier"/>
-              </a:rPr>
-              <a:t>    lab </a:t>
-            </a:r>
-            <a:r>
-              <a:rPr>
-                <a:solidFill>
-                  <a:srgbClr val="666666"/>
-                </a:solidFill>
-                <a:latin typeface="Courier"/>
-              </a:rPr>
-              <a:t>=</a:t>
-            </a:r>
-            <a:r>
-              <a:rPr>
-                <a:latin typeface="Courier"/>
-              </a:rPr>
-              <a:t> KMeans(</a:t>
-            </a:r>
-            <a:r>
-              <a:rPr>
-                <a:solidFill>
-                  <a:srgbClr val="40A070"/>
-                </a:solidFill>
-                <a:latin typeface="Courier"/>
-              </a:rPr>
-              <a:t>4</a:t>
-            </a:r>
-            <a:r>
-              <a:rPr>
-                <a:latin typeface="Courier"/>
-              </a:rPr>
-              <a:t>, n_init</a:t>
-            </a:r>
-            <a:r>
-              <a:rPr>
-                <a:solidFill>
-                  <a:srgbClr val="666666"/>
-                </a:solidFill>
-                <a:latin typeface="Courier"/>
-              </a:rPr>
-              <a:t>=</a:t>
-            </a:r>
-            <a:r>
-              <a:rPr>
-                <a:solidFill>
-                  <a:srgbClr val="40A070"/>
-                </a:solidFill>
-                <a:latin typeface="Courier"/>
-              </a:rPr>
-              <a:t>20</a:t>
-            </a:r>
-            <a:r>
-              <a:rPr>
-                <a:latin typeface="Courier"/>
-              </a:rPr>
-              <a:t>, random_state</a:t>
-            </a:r>
-            <a:r>
-              <a:rPr>
-                <a:solidFill>
-                  <a:srgbClr val="666666"/>
-                </a:solidFill>
-                <a:latin typeface="Courier"/>
-              </a:rPr>
-              <a:t>=</a:t>
-            </a:r>
-            <a:r>
-              <a:rPr>
-                <a:solidFill>
-                  <a:srgbClr val="40A070"/>
-                </a:solidFill>
-                <a:latin typeface="Courier"/>
-              </a:rPr>
-              <a:t>60033</a:t>
-            </a:r>
-            <a:r>
-              <a:rPr>
-                <a:latin typeface="Courier"/>
-              </a:rPr>
-              <a:t>).fit_predict(Z[idx])</a:t>
-            </a:r>
-            <a:br/>
-            <a:r>
-              <a:rPr>
-                <a:latin typeface="Courier"/>
-              </a:rPr>
-              <a:t>    agree.append((lab </a:t>
-            </a:r>
-            <a:r>
-              <a:rPr>
-                <a:solidFill>
-                  <a:srgbClr val="666666"/>
-                </a:solidFill>
-                <a:latin typeface="Courier"/>
-              </a:rPr>
-              <a:t>==</a:t>
-            </a:r>
-            <a:r>
-              <a:rPr>
-                <a:latin typeface="Courier"/>
-              </a:rPr>
-              <a:t> base[idx]).mean())</a:t>
-            </a:r>
-            <a:br/>
-            <a:r>
-              <a:rPr>
-                <a:solidFill>
-                  <a:srgbClr val="008000"/>
-                </a:solidFill>
-                <a:latin typeface="Courier"/>
-              </a:rPr>
-              <a:t>print</a:t>
-            </a:r>
-            <a:r>
-              <a:rPr>
-                <a:latin typeface="Courier"/>
-              </a:rPr>
-              <a:t>(</a:t>
-            </a:r>
-            <a:r>
-              <a:rPr>
-                <a:solidFill>
-                  <a:srgbClr val="4070A0"/>
-                </a:solidFill>
-                <a:latin typeface="Courier"/>
-              </a:rPr>
-              <a:t>"mean agreement:"</a:t>
-            </a:r>
-            <a:r>
-              <a:rPr>
-                <a:latin typeface="Courier"/>
-              </a:rPr>
-              <a:t>, </a:t>
-            </a:r>
-            <a:r>
-              <a:rPr>
-                <a:solidFill>
-                  <a:srgbClr val="008000"/>
-                </a:solidFill>
-                <a:latin typeface="Courier"/>
-              </a:rPr>
-              <a:t>round</a:t>
-            </a:r>
-            <a:r>
-              <a:rPr>
-                <a:latin typeface="Courier"/>
-              </a:rPr>
-              <a:t>(np.mean(agree), </a:t>
-            </a:r>
-            <a:r>
-              <a:rPr>
-                <a:solidFill>
-                  <a:srgbClr val="40A070"/>
-                </a:solidFill>
-                <a:latin typeface="Courier"/>
-              </a:rPr>
-              <a:t>3</a:t>
-            </a:r>
-            <a:r>
-              <a:rPr>
-                <a:latin typeface="Courier"/>
-              </a:rPr>
-              <a:t>))</a:t>
+              <a:rPr sz="2000"/>
+              <a:t>If your finding depends on a stemming choice, </a:t>
+            </a:r>
+            <a:r>
+              <a:rPr sz="2000" b="1"/>
+              <a:t>you do not have a finding.</a:t>
             </a:r>
           </a:p>
           <a:p>
@@ -6767,7 +5570,7 @@
             </a:pPr>
             <a:r>
               <a:rPr/>
-              <a:t>Labels are arbitrary across runs, so this is a crude check — use the adjusted Rand index for a proper one. The point stands: measure stability, do not assume it.</a:t>
+              <a:t>Also check your index against document length. An index that correlates strongly with word count is a length detector with extra steps — and that is one line to test.</a:t>
             </a:r>
           </a:p>
         </p:txBody>
@@ -6804,7 +5607,12 @@
             <p:ph type="title"/>
           </p:nvPr>
         </p:nvSpPr>
-        <p:spPr/>
+        <p:spPr>
+          <a:xfrm>
+            <a:off x="722313" y="3305176"/>
+            <a:ext cx="7772400" cy="1021556"/>
+          </a:xfrm>
+        </p:spPr>
         <p:txBody>
           <a:bodyPr/>
           <a:lstStyle/>
@@ -6814,402 +5622,7 @@
             </a:pPr>
             <a:r>
               <a:rPr/>
-              <a:t>Tie the words to the numbers</a:t>
-            </a:r>
-          </a:p>
-        </p:txBody>
-      </p:sp>
-      <p:sp>
-        <p:nvSpPr>
-          <p:cNvPr id="3" name="Content Placeholder 2"/>
-          <p:cNvSpPr>
-            <a:spLocks noGrp="1"/>
-          </p:cNvSpPr>
-          <p:nvPr>
-            <p:ph idx="1"/>
-          </p:nvPr>
-        </p:nvSpPr>
-        <p:spPr/>
-        <p:txBody>
-          <a:bodyPr/>
-          <a:lstStyle/>
-          <a:p>
-            <a:pPr lvl="0" indent="0">
-              <a:buNone/>
-            </a:pPr>
-            <a:r>
-              <a:rPr>
-                <a:latin typeface="Courier"/>
-              </a:rPr>
-              <a:t>cb[</a:t>
-            </a:r>
-            <a:r>
-              <a:rPr>
-                <a:solidFill>
-                  <a:srgbClr val="4070A0"/>
-                </a:solidFill>
-                <a:latin typeface="Courier"/>
-              </a:rPr>
-              <a:t>"year"</a:t>
-            </a:r>
-            <a:r>
-              <a:rPr>
-                <a:latin typeface="Courier"/>
-              </a:rPr>
-              <a:t>] </a:t>
-            </a:r>
-            <a:r>
-              <a:rPr>
-                <a:solidFill>
-                  <a:srgbClr val="666666"/>
-                </a:solidFill>
-                <a:latin typeface="Courier"/>
-              </a:rPr>
-              <a:t>=</a:t>
-            </a:r>
-            <a:r>
-              <a:rPr>
-                <a:latin typeface="Courier"/>
-              </a:rPr>
-              <a:t> pd.to_datetime(cb[</a:t>
-            </a:r>
-            <a:r>
-              <a:rPr>
-                <a:solidFill>
-                  <a:srgbClr val="4070A0"/>
-                </a:solidFill>
-                <a:latin typeface="Courier"/>
-              </a:rPr>
-              <a:t>"date"</a:t>
-            </a:r>
-            <a:r>
-              <a:rPr>
-                <a:latin typeface="Courier"/>
-              </a:rPr>
-              <a:t>]).dt.year</a:t>
-            </a:r>
-            <a:br/>
-            <a:br/>
-            <a:r>
-              <a:rPr i="1">
-                <a:solidFill>
-                  <a:srgbClr val="60A0B0"/>
-                </a:solidFill>
-                <a:latin typeface="Courier"/>
-              </a:rPr>
-              <a:t># normalise: share of that year's words, not raw counts</a:t>
-            </a:r>
-            <a:br/>
-            <a:r>
-              <a:rPr>
-                <a:latin typeface="Courier"/>
-              </a:rPr>
-              <a:t>per_year </a:t>
-            </a:r>
-            <a:r>
-              <a:rPr>
-                <a:solidFill>
-                  <a:srgbClr val="666666"/>
-                </a:solidFill>
-                <a:latin typeface="Courier"/>
-              </a:rPr>
-              <a:t>=</a:t>
-            </a:r>
-            <a:r>
-              <a:rPr>
-                <a:latin typeface="Courier"/>
-              </a:rPr>
-              <a:t> (cb.assign(hits</a:t>
-            </a:r>
-            <a:r>
-              <a:rPr>
-                <a:solidFill>
-                  <a:srgbClr val="666666"/>
-                </a:solidFill>
-                <a:latin typeface="Courier"/>
-              </a:rPr>
-              <a:t>=</a:t>
-            </a:r>
-            <a:r>
-              <a:rPr>
-                <a:latin typeface="Courier"/>
-              </a:rPr>
-              <a:t>cb.text.</a:t>
-            </a:r>
-            <a:r>
-              <a:rPr>
-                <a:solidFill>
-                  <a:srgbClr val="008000"/>
-                </a:solidFill>
-                <a:latin typeface="Courier"/>
-              </a:rPr>
-              <a:t>str</a:t>
-            </a:r>
-            <a:r>
-              <a:rPr>
-                <a:latin typeface="Courier"/>
-              </a:rPr>
-              <a:t>.count(</a:t>
-            </a:r>
-            <a:r>
-              <a:rPr>
-                <a:solidFill>
-                  <a:srgbClr val="4070A0"/>
-                </a:solidFill>
-                <a:latin typeface="Courier"/>
-              </a:rPr>
-              <a:t>r"</a:t>
-            </a:r>
-            <a:r>
-              <a:rPr>
-                <a:solidFill>
-                  <a:srgbClr val="06287E"/>
-                </a:solidFill>
-                <a:latin typeface="Courier"/>
-              </a:rPr>
-              <a:t>(?i)</a:t>
-            </a:r>
-            <a:r>
-              <a:rPr>
-                <a:solidFill>
-                  <a:srgbClr val="40A070"/>
-                </a:solidFill>
-                <a:latin typeface="Courier"/>
-              </a:rPr>
-              <a:t>\b</a:t>
-            </a:r>
-            <a:r>
-              <a:rPr>
-                <a:solidFill>
-                  <a:srgbClr val="4070A0"/>
-                </a:solidFill>
-                <a:latin typeface="Courier"/>
-              </a:rPr>
-              <a:t>productivit"</a:t>
-            </a:r>
-            <a:r>
-              <a:rPr>
-                <a:latin typeface="Courier"/>
-              </a:rPr>
-              <a:t>))</a:t>
-            </a:r>
-            <a:br/>
-            <a:r>
-              <a:rPr>
-                <a:latin typeface="Courier"/>
-              </a:rPr>
-              <a:t>              .groupby(</a:t>
-            </a:r>
-            <a:r>
-              <a:rPr>
-                <a:solidFill>
-                  <a:srgbClr val="4070A0"/>
-                </a:solidFill>
-                <a:latin typeface="Courier"/>
-              </a:rPr>
-              <a:t>"year"</a:t>
-            </a:r>
-            <a:r>
-              <a:rPr>
-                <a:latin typeface="Courier"/>
-              </a:rPr>
-              <a:t>)[[</a:t>
-            </a:r>
-            <a:r>
-              <a:rPr>
-                <a:solidFill>
-                  <a:srgbClr val="4070A0"/>
-                </a:solidFill>
-                <a:latin typeface="Courier"/>
-              </a:rPr>
-              <a:t>"hits"</a:t>
-            </a:r>
-            <a:r>
-              <a:rPr>
-                <a:latin typeface="Courier"/>
-              </a:rPr>
-              <a:t>, </a:t>
-            </a:r>
-            <a:r>
-              <a:rPr>
-                <a:solidFill>
-                  <a:srgbClr val="4070A0"/>
-                </a:solidFill>
-                <a:latin typeface="Courier"/>
-              </a:rPr>
-              <a:t>"n_words"</a:t>
-            </a:r>
-            <a:r>
-              <a:rPr>
-                <a:latin typeface="Courier"/>
-              </a:rPr>
-              <a:t>]].</a:t>
-            </a:r>
-            <a:r>
-              <a:rPr>
-                <a:solidFill>
-                  <a:srgbClr val="008000"/>
-                </a:solidFill>
-                <a:latin typeface="Courier"/>
-              </a:rPr>
-              <a:t>sum</a:t>
-            </a:r>
-            <a:r>
-              <a:rPr>
-                <a:latin typeface="Courier"/>
-              </a:rPr>
-              <a:t>())</a:t>
-            </a:r>
-            <a:br/>
-            <a:r>
-              <a:rPr>
-                <a:latin typeface="Courier"/>
-              </a:rPr>
-              <a:t>per_year[</a:t>
-            </a:r>
-            <a:r>
-              <a:rPr>
-                <a:solidFill>
-                  <a:srgbClr val="4070A0"/>
-                </a:solidFill>
-                <a:latin typeface="Courier"/>
-              </a:rPr>
-              <a:t>"rate_per_10k"</a:t>
-            </a:r>
-            <a:r>
-              <a:rPr>
-                <a:latin typeface="Courier"/>
-              </a:rPr>
-              <a:t>] </a:t>
-            </a:r>
-            <a:r>
-              <a:rPr>
-                <a:solidFill>
-                  <a:srgbClr val="666666"/>
-                </a:solidFill>
-                <a:latin typeface="Courier"/>
-              </a:rPr>
-              <a:t>=</a:t>
-            </a:r>
-            <a:r>
-              <a:rPr>
-                <a:latin typeface="Courier"/>
-              </a:rPr>
-              <a:t> per_year.hits </a:t>
-            </a:r>
-            <a:r>
-              <a:rPr>
-                <a:solidFill>
-                  <a:srgbClr val="666666"/>
-                </a:solidFill>
-                <a:latin typeface="Courier"/>
-              </a:rPr>
-              <a:t>/</a:t>
-            </a:r>
-            <a:r>
-              <a:rPr>
-                <a:latin typeface="Courier"/>
-              </a:rPr>
-              <a:t> per_year.n_words </a:t>
-            </a:r>
-            <a:r>
-              <a:rPr>
-                <a:solidFill>
-                  <a:srgbClr val="666666"/>
-                </a:solidFill>
-                <a:latin typeface="Courier"/>
-              </a:rPr>
-              <a:t>*</a:t>
-            </a:r>
-            <a:r>
-              <a:rPr>
-                <a:latin typeface="Courier"/>
-              </a:rPr>
-              <a:t> </a:t>
-            </a:r>
-            <a:r>
-              <a:rPr>
-                <a:solidFill>
-                  <a:srgbClr val="40A070"/>
-                </a:solidFill>
-                <a:latin typeface="Courier"/>
-              </a:rPr>
-              <a:t>10_000</a:t>
-            </a:r>
-            <a:br/>
-            <a:r>
-              <a:rPr>
-                <a:solidFill>
-                  <a:srgbClr val="008000"/>
-                </a:solidFill>
-                <a:latin typeface="Courier"/>
-              </a:rPr>
-              <a:t>print</a:t>
-            </a:r>
-            <a:r>
-              <a:rPr>
-                <a:latin typeface="Courier"/>
-              </a:rPr>
-              <a:t>(per_year.</a:t>
-            </a:r>
-            <a:r>
-              <a:rPr>
-                <a:solidFill>
-                  <a:srgbClr val="008000"/>
-                </a:solidFill>
-                <a:latin typeface="Courier"/>
-              </a:rPr>
-              <a:t>round</a:t>
-            </a:r>
-            <a:r>
-              <a:rPr>
-                <a:latin typeface="Courier"/>
-              </a:rPr>
-              <a:t>(</a:t>
-            </a:r>
-            <a:r>
-              <a:rPr>
-                <a:solidFill>
-                  <a:srgbClr val="40A070"/>
-                </a:solidFill>
-                <a:latin typeface="Courier"/>
-              </a:rPr>
-              <a:t>2</a:t>
-            </a:r>
-            <a:r>
-              <a:rPr>
-                <a:latin typeface="Courier"/>
-              </a:rPr>
-              <a:t>))</a:t>
-            </a:r>
-          </a:p>
-          <a:p>
-            <a:pPr lvl="0" indent="0" marL="0">
-              <a:buNone/>
-            </a:pPr>
-            <a:r>
-              <a:rPr/>
-              <a:t>Compare the raw </a:t>
-            </a:r>
-            <a:r>
-              <a:rPr>
-                <a:latin typeface="Courier"/>
-              </a:rPr>
-              <a:t>hits</a:t>
-            </a:r>
-            <a:r>
-              <a:rPr/>
-              <a:t> column against </a:t>
-            </a:r>
-            <a:r>
-              <a:rPr>
-                <a:latin typeface="Courier"/>
-              </a:rPr>
-              <a:t>rate_per_10k</a:t>
-            </a:r>
-            <a:r>
-              <a:rPr/>
-              <a:t>. If they tell different stories, the raw one was measuring publication volume.</a:t>
+              <a:t>The lab</a:t>
             </a:r>
           </a:p>
         </p:txBody>
@@ -7256,136 +5669,7 @@
             </a:pPr>
             <a:r>
               <a:rPr/>
-              <a:t>What to report</a:t>
-            </a:r>
-          </a:p>
-        </p:txBody>
-      </p:sp>
-      <mc:AlternateContent xmlns:mc="http://schemas.openxmlformats.org/markup-compatibility/2006">
-        <mc:Choice xmlns:a14="http://schemas.microsoft.com/office/drawing/2010/main" Requires="a14">
-          <p:sp>
-            <p:nvSpPr>
-              <p:cNvPr id="3" name="Content Placeholder 2"/>
-              <p:cNvSpPr>
-                <a:spLocks noGrp="1"/>
-              </p:cNvSpPr>
-              <p:nvPr>
-                <p:ph idx="1"/>
-              </p:nvPr>
-            </p:nvSpPr>
-            <p:spPr/>
-            <p:txBody>
-              <a:bodyPr/>
-              <a:lstStyle/>
-              <a:p>
-                <a:pPr lvl="0"/>
-                <a:r>
-                  <a:rPr/>
-                  <a:t>Your </a:t>
-                </a:r>
-                <a:r>
-                  <a:rPr b="1"/>
-                  <a:t>normalisation</a:t>
-                </a:r>
-                <a:r>
-                  <a:rPr/>
-                  <a:t>, in the caption of every text figure</a:t>
-                </a:r>
-              </a:p>
-              <a:p>
-                <a:pPr lvl="0"/>
-                <a14:m>
-                  <m:oMath xmlns:m="http://schemas.openxmlformats.org/officeDocument/2006/math">
-                    <m:r>
-                      <m:t>k</m:t>
-                    </m:r>
-                  </m:oMath>
-                </a14:m>
-                <a:r>
-                  <a:rPr/>
-                  <a:t>, how you chose it, and the stability evidence</a:t>
-                </a:r>
-              </a:p>
-              <a:p>
-                <a:pPr lvl="0"/>
-                <a:r>
-                  <a:rPr/>
-                  <a:t>The embedding model and version if you used one</a:t>
-                </a:r>
-              </a:p>
-              <a:p>
-                <a:pPr lvl="0"/>
-                <a:r>
-                  <a:rPr/>
-                  <a:t>The discriminant check against </a:t>
-                </a:r>
-                <a:r>
-                  <a:rPr>
-                    <a:latin typeface="Courier"/>
-                  </a:rPr>
-                  <a:t>n_words</a:t>
-                </a:r>
-              </a:p>
-              <a:p>
-                <a:pPr lvl="0"/>
-                <a:r>
-                  <a:rPr/>
-                  <a:t>“Our index of X” phrasing throughout</a:t>
-                </a:r>
-              </a:p>
-            </p:txBody>
-          </p:sp>
-        </mc:Choice>
-      </mc:AlternateContent>
-    </p:spTree>
-  </p:cSld>
-</p:sld>
-</file>
-
-<file path=ppt/slides/slide3.xml><?xml version="1.0" encoding="UTF-8"?><p:sld xmlns:a="http://schemas.openxmlformats.org/drawingml/2006/main" xmlns:r="http://schemas.openxmlformats.org/officeDocument/2006/relationships" xmlns:p="http://schemas.openxmlformats.org/presentationml/2006/main"><p:cSld><p:spTree><p:nvGrpSpPr><p:cNvPr id="1" name="" /><p:cNvGrpSpPr /><p:nvPr /></p:nvGrpSpPr><p:grpSpPr><a:xfrm><a:off x="0" y="0" /><a:ext cx="0" cy="0" /><a:chOff x="0" y="0" /><a:chExt cx="0" cy="0" /></a:xfrm></p:grpSpPr><p:sp><p:nvSpPr><p:cNvPr id="2" name="Title 1" /><p:cNvSpPr><a:spLocks noGrp="1" /></p:cNvSpPr><p:nvPr><p:ph type="title" /></p:nvPr></p:nvSpPr><p:spPr /><p:txBody><a:bodyPr /><a:lstStyle /><a:p><a:pPr lvl="0" indent="0" marL="0"><a:buNone /></a:pPr><a:r><a:rPr /><a:t>The 90 minutes ahead</a:t></a:r></a:p></p:txBody></p:sp><p:graphicFrame><p:nvGraphicFramePr><p:cNvPr id="6" name="Content Placeholder 5" /><p:cNvGraphicFramePr><a:graphicFrameLocks noGrp="1" /></p:cNvGraphicFramePr><p:nvPr><p:ph idx="1" /></p:nvPr></p:nvGraphicFramePr><p:xfrm><a:off x="457200" y="1193800" /><a:ext cx="8229600" cy="3390900" /></p:xfrm><a:graphic><a:graphicData uri="http://schemas.openxmlformats.org/drawingml/2006/table"><a:tbl><a:tblPr firstRow="0" bandRow="1"><a:tableStyleId>{5C22544A-7EE6-4342-B048-85BDC9FD1C3A}</a:tableStyleId></a:tblPr><a:tblGrid><a:gridCol w="4114800" /><a:gridCol w="4114800" /></a:tblGrid><a:tr h="0"><a:tc><a:txBody><a:bodyPr /><a:lstStyle /><a:p><a:pPr lvl="0" indent="0" marL="0"><a:buNone /></a:pPr><a:r><a:rPr b="1" /><a:t>0–10</a:t></a:r></a:p></a:txBody></a:tc><a:tc><a:txBody><a:bodyPr /><a:lstStyle /><a:p><a:pPr lvl="0" indent="0" marL="0"><a:buNone /></a:pPr><a:r><a:rPr /><a:t>Clustering: structure without a label</a:t></a:r></a:p></a:txBody></a:tc></a:tr><a:tr h="0"><a:tc><a:txBody><a:bodyPr /><a:lstStyle /><a:p><a:pPr lvl="0" indent="0" marL="0"><a:buNone /></a:pPr><a:r><a:rPr b="1" /><a:t>10–30</a:t></a:r></a:p></a:txBody></a:tc><a:tc><a:txBody><a:bodyPr /><a:lstStyle /><a:p><a:pPr lvl="0" indent="0" marL="0"><a:buNone /></a:pPr><a14:m><m:oMath xmlns:m="http://schemas.openxmlformats.org/officeDocument/2006/math"><m:r><m:t>k</m:t></m:r></m:oMath></a14:m><a:r><a:rPr /><a:t>-means, and choosing </a:t></a:r><a14:m><m:oMath xmlns:m="http://schemas.openxmlformats.org/officeDocument/2006/math"><m:r><m:t>k</m:t></m:r></m:oMath></a14:m></a:p></a:txBody></a:tc></a:tr><a:tr h="0"><a:tc><a:txBody><a:bodyPr /><a:lstStyle /><a:p><a:pPr lvl="0" indent="0" marL="0"><a:buNone /></a:pPr><a:r><a:rPr b="1" /><a:t>30–45</a:t></a:r></a:p></a:txBody></a:tc><a:tc><a:txBody><a:bodyPr /><a:lstStyle /><a:p><a:pPr lvl="0" indent="0" marL="0"><a:buNone /></a:pPr><a:r><a:rPr /><a:t>Turning text into numbers</a:t></a:r></a:p></a:txBody></a:tc></a:tr><a:tr h="0"><a:tc><a:txBody><a:bodyPr /><a:lstStyle /><a:p><a:pPr lvl="0" indent="0" marL="0"><a:buNone /></a:pPr><a:r><a:rPr b="1" /><a:t>45–60</a:t></a:r></a:p></a:txBody></a:tc><a:tc><a:txBody><a:bodyPr /><a:lstStyle /><a:p><a:pPr lvl="0" indent="0" marL="0"><a:buNone /></a:pPr><a:r><a:rPr /><a:t>Embeddings, computed locally</a:t></a:r></a:p></a:txBody></a:tc></a:tr><a:tr h="0"><a:tc><a:txBody><a:bodyPr /><a:lstStyle /><a:p><a:pPr lvl="0" indent="0" marL="0"><a:buNone /></a:pPr><a:r><a:rPr b="1" /><a:t>60–85</a:t></a:r></a:p></a:txBody></a:tc><a:tc><a:txBody><a:bodyPr /><a:lstStyle /><a:p><a:pPr lvl="0" indent="0" marL="0"><a:buNone /></a:pPr><a:r><a:rPr /><a:t>Validity: what does the number measure?</a:t></a:r></a:p></a:txBody></a:tc></a:tr><a:tr h="0"><a:tc><a:txBody><a:bodyPr /><a:lstStyle /><a:p><a:pPr lvl="0" indent="0" marL="0"><a:buNone /></a:pPr><a:r><a:rPr b="1" /><a:t>85–90</a:t></a:r></a:p></a:txBody></a:tc><a:tc><a:txBody><a:bodyPr /><a:lstStyle /><a:p><a:pPr lvl="0" indent="0" marL="0"><a:buNone /></a:pPr><a:r><a:rPr /><a:t>Handoff to the lab</a:t></a:r></a:p></a:txBody></a:tc></a:tr></a:tbl></a:graphicData></a:graphic></p:graphicFrame></p:spTree></p:cSld></p:sld>
-</file>
-
-<file path=ppt/slides/slide30.xml><?xml version="1.0" encoding="UTF-8"?><p:sld xmlns:a="http://schemas.openxmlformats.org/drawingml/2006/main" xmlns:r="http://schemas.openxmlformats.org/officeDocument/2006/relationships" xmlns:p="http://schemas.openxmlformats.org/presentationml/2006/main"><p:cSld><p:spTree><p:nvGrpSpPr><p:cNvPr id="1" name="" /><p:cNvGrpSpPr /><p:nvPr /></p:nvGrpSpPr><p:grpSpPr><a:xfrm><a:off x="0" y="0" /><a:ext cx="0" cy="0" /><a:chOff x="0" y="0" /><a:chExt cx="0" cy="0" /></a:xfrm></p:grpSpPr><p:sp><p:nvSpPr><p:cNvPr id="2" name="Title 1" /><p:cNvSpPr><a:spLocks noGrp="1" /></p:cNvSpPr><p:nvPr><p:ph type="title" /></p:nvPr></p:nvSpPr><p:spPr /><p:txBody><a:bodyPr /><a:lstStyle /><a:p><a:pPr lvl="0" indent="0" marL="0"><a:buNone /></a:pPr><a:r><a:rPr /><a:t>Common mistakes</a:t></a:r></a:p></p:txBody></p:sp><p:graphicFrame><p:nvGraphicFramePr><p:cNvPr id="6" name="Content Placeholder 5" /><p:cNvGraphicFramePr><a:graphicFrameLocks noGrp="1" /></p:cNvGraphicFramePr><p:nvPr><p:ph idx="1" /></p:nvPr></p:nvGraphicFramePr><p:xfrm><a:off x="457200" y="1193800" /><a:ext cx="8229600" cy="3390900" /></p:xfrm><a:graphic><a:graphicData uri="http://schemas.openxmlformats.org/drawingml/2006/table"><a:tbl><a:tblPr firstRow="1" bandRow="1"><a:tableStyleId>{5C22544A-7EE6-4342-B048-85BDC9FD1C3A}</a:tableStyleId></a:tblPr><a:tblGrid><a:gridCol w="4114800" /><a:gridCol w="4114800" /></a:tblGrid><a:tr h="0"><a:tc><a:txBody><a:bodyPr /><a:lstStyle /><a:p><a:pPr lvl="0" indent="0" marL="0"><a:buNone /></a:pPr><a:r><a:rPr /><a:t>Mistake</a:t></a:r></a:p></a:txBody><a:tcPr /></a:tc><a:tc><a:txBody><a:bodyPr /><a:lstStyle /><a:p><a:pPr lvl="0" indent="0" marL="0"><a:buNone /></a:pPr><a:r><a:rPr /><a:t>Consequence</a:t></a:r></a:p></a:txBody><a:tcPr /></a:tc></a:tr><a:tr h="0"><a:tc><a:txBody><a:bodyPr /><a:lstStyle /><a:p><a:pPr lvl="0" indent="0" marL="0"><a:buNone /></a:pPr><a:r><a:rPr /><a:t>Raw term counts over time</a:t></a:r></a:p></a:txBody></a:tc><a:tc><a:txBody><a:bodyPr /><a:lstStyle /><a:p><a:pPr lvl="0" indent="0" marL="0"><a:buNone /></a:pPr><a:r><a:rPr /><a:t>Measures publication volume</a:t></a:r></a:p></a:txBody></a:tc></a:tr><a:tr h="0"><a:tc><a:txBody><a:bodyPr /><a:lstStyle /><a:p><a:pPr lvl="0" indent="0" marL="0"><a:buNone /></a:pPr><a14:m><m:oMath xmlns:m="http://schemas.openxmlformats.org/officeDocument/2006/math"><m:r><m:t>k</m:t></m:r></m:oMath></a14:m><a:r><a:rPr /><a:t> from the elbow alone</a:t></a:r></a:p></a:txBody></a:tc><a:tc><a:txBody><a:bodyPr /><a:lstStyle /><a:p><a:pPr lvl="0" indent="0" marL="0"><a:buNone /></a:pPr><a:r><a:rPr /><a:t>Elbow often absent; </a:t></a:r><a14:m><m:oMath xmlns:m="http://schemas.openxmlformats.org/officeDocument/2006/math"><m:r><m:t>k</m:t></m:r></m:oMath></a14:m><a:r><a:rPr /><a:t> unjustified</a:t></a:r></a:p></a:txBody></a:tc></a:tr><a:tr h="0"><a:tc><a:txBody><a:bodyPr /><a:lstStyle /><a:p><a:pPr lvl="0" indent="0" marL="0"><a:buNone /></a:pPr><a:r><a:rPr /><a:t>One </a:t></a:r><a14:m><m:oMath xmlns:m="http://schemas.openxmlformats.org/officeDocument/2006/math"><m:r><m:t>k</m:t></m:r></m:oMath></a14:m><a:r><a:rPr /><a:t>-means run</a:t></a:r></a:p></a:txBody></a:tc><a:tc><a:txBody><a:bodyPr /><a:lstStyle /><a:p><a:pPr lvl="0" indent="0" marL="0"><a:buNone /></a:pPr><a:r><a:rPr /><a:t>Local optimum</a:t></a:r></a:p></a:txBody></a:tc></a:tr><a:tr h="0"><a:tc><a:txBody><a:bodyPr /><a:lstStyle /><a:p><a:pPr lvl="0" indent="0" marL="0"><a:buNone /></a:pPr><a:r><a:rPr /><a:t>Naming clusters as types</a:t></a:r></a:p></a:txBody></a:tc><a:tc><a:txBody><a:bodyPr /><a:lstStyle /><a:p><a:pPr lvl="0" indent="0" marL="0"><a:buNone /></a:pPr><a:r><a:rPr /><a:t>A summary presented as a discovery</a:t></a:r></a:p></a:txBody></a:tc></a:tr><a:tr h="0"><a:tc><a:txBody><a:bodyPr /><a:lstStyle /><a:p><a:pPr lvl="0" indent="0" marL="0"><a:buNone /></a:pPr><a:r><a:rPr /><a:t>No length check</a:t></a:r></a:p></a:txBody></a:tc><a:tc><a:txBody><a:bodyPr /><a:lstStyle /><a:p><a:pPr lvl="0" indent="0" marL="0"><a:buNone /></a:pPr><a:r><a:rPr /><a:t>Index may just be document length</a:t></a:r></a:p></a:txBody></a:tc></a:tr></a:tbl></a:graphicData></a:graphic></p:graphicFrame></p:spTree></p:cSld></p:sld>
-</file>
-
-<file path=ppt/slides/slide31.xml><?xml version="1.0" encoding="utf-8"?>
-<p:sld xmlns:a="http://schemas.openxmlformats.org/drawingml/2006/main" xmlns:r="http://schemas.openxmlformats.org/officeDocument/2006/relationships" xmlns:p="http://schemas.openxmlformats.org/presentationml/2006/main">
-  <p:cSld>
-    <p:spTree>
-      <p:nvGrpSpPr>
-        <p:cNvPr id="1" name=""/>
-        <p:cNvGrpSpPr/>
-        <p:nvPr/>
-      </p:nvGrpSpPr>
-      <p:grpSpPr>
-        <a:xfrm>
-          <a:off x="0" y="0"/>
-          <a:ext cx="0" cy="0"/>
-          <a:chOff x="0" y="0"/>
-          <a:chExt cx="0" cy="0"/>
-        </a:xfrm>
-      </p:grpSpPr>
-      <p:sp>
-        <p:nvSpPr>
-          <p:cNvPr id="2" name="Title 1"/>
-          <p:cNvSpPr>
-            <a:spLocks noGrp="1"/>
-          </p:cNvSpPr>
-          <p:nvPr>
-            <p:ph type="title"/>
-          </p:nvPr>
-        </p:nvSpPr>
-        <p:spPr/>
-        <p:txBody>
-          <a:bodyPr/>
-          <a:lstStyle/>
-          <a:p>
-            <a:pPr lvl="0" indent="0" marL="0">
-              <a:buNone/>
-            </a:pPr>
-            <a:r>
-              <a:rPr/>
-              <a:t>In the lab</a:t>
+              <a:t>What you do</a:t>
             </a:r>
           </a:p>
         </p:txBody>
@@ -7412,16 +5696,15 @@
                 </a:pPr>
                 <a:r>
                   <a:rPr/>
-                  <a:t>Download the Bennani &amp; Romelli package; read how they justify their index</a:t>
+                  <a:t>Cluster your angle’s units; report </a:t>
                 </a:r>
-              </a:p>
-              <a:p>
-                <a:pPr lvl="0" indent="-342900" marL="342900">
-                  <a:buAutoNum type="arabicPeriod"/>
-                </a:pPr>
+                <a:r>
+                  <a:rPr b="1"/>
+                  <a:t>two</a:t>
+                </a:r>
                 <a:r>
                   <a:rPr/>
-                  <a:t>Cluster the countries; choose </a:t>
+                  <a:t> criteria for </a:t>
                 </a:r>
                 <a14:m>
                   <m:oMath xmlns:m="http://schemas.openxmlformats.org/officeDocument/2006/math">
@@ -7432,7 +5715,7 @@
                 </a14:m>
                 <a:r>
                   <a:rPr/>
-                  <a:t> with evidence and test stability</a:t>
+                  <a:t> and any disagreement</a:t>
                 </a:r>
               </a:p>
               <a:p>
@@ -7441,26 +5724,7 @@
                 </a:pPr>
                 <a:r>
                   <a:rPr/>
-                  <a:t>Compare your </a:t>
-                </a:r>
-                <a14:m>
-                  <m:oMath xmlns:m="http://schemas.openxmlformats.org/officeDocument/2006/math">
-                    <m:r>
-                      <m:t>k</m:t>
-                    </m:r>
-                  </m:oMath>
-                </a14:m>
-                <a:r>
-                  <a:rPr/>
-                  <a:t> with the </a:t>
-                </a:r>
-                <a:r>
-                  <a:rPr b="1"/>
-                  <a:t>four</a:t>
-                </a:r>
-                <a:r>
-                  <a:rPr/>
-                  <a:t> types the spine was built from</a:t>
+                  <a:t>Test stability under resampling — do units change cluster?</a:t>
                 </a:r>
               </a:p>
               <a:p>
@@ -7469,17 +5733,7 @@
                 </a:pPr>
                 <a:r>
                   <a:rPr/>
-                  <a:t>Build one text index, normalised, and run the </a:t>
-                </a:r>
-                <a:r>
-                  <a:rPr>
-                    <a:latin typeface="Courier"/>
-                  </a:rPr>
-                  <a:t>n_words</a:t>
-                </a:r>
-                <a:r>
-                  <a:rPr/>
-                  <a:t> check</a:t>
+                  <a:t>Build one text measure, normalised per thousand words, not raw counts</a:t>
                 </a:r>
               </a:p>
               <a:p>
@@ -7488,13 +5742,147 @@
                 </a:pPr>
                 <a:r>
                   <a:rPr/>
-                  <a:t>Three sentences using construct language, not measurement language</a:t>
+                  <a:t>Run all four validity checks, including the length correlation</a:t>
+                </a:r>
+              </a:p>
+              <a:p>
+                <a:pPr lvl="0" indent="0" marL="0">
+                  <a:buNone/>
+                </a:pPr>
+                <a:r>
+                  <a:rPr/>
+                  <a:t>Corpus composition drives raw counts. If more documents are published, term frequency rises with no change in attention. </a:t>
+                </a:r>
+                <a:r>
+                  <a:rPr b="1"/>
+                  <a:t>Normalise, and say how in the caption.</a:t>
                 </a:r>
               </a:p>
             </p:txBody>
           </p:sp>
         </mc:Choice>
       </mc:AlternateContent>
+    </p:spTree>
+  </p:cSld>
+</p:sld>
+</file>
+
+<file path=ppt/slides/slide3.xml><?xml version="1.0" encoding="UTF-8"?><p:sld xmlns:a="http://schemas.openxmlformats.org/drawingml/2006/main" xmlns:r="http://schemas.openxmlformats.org/officeDocument/2006/relationships" xmlns:p="http://schemas.openxmlformats.org/presentationml/2006/main"><p:cSld><p:spTree><p:nvGrpSpPr><p:cNvPr id="1" name="" /><p:cNvGrpSpPr /><p:nvPr /></p:nvGrpSpPr><p:grpSpPr><a:xfrm><a:off x="0" y="0" /><a:ext cx="0" cy="0" /><a:chOff x="0" y="0" /><a:chExt cx="0" cy="0" /></a:xfrm></p:grpSpPr><p:sp><p:nvSpPr><p:cNvPr id="2" name="Title 1" /><p:cNvSpPr><a:spLocks noGrp="1" /></p:cNvSpPr><p:nvPr><p:ph type="title" /></p:nvPr></p:nvSpPr><p:spPr /><p:txBody><a:bodyPr /><a:lstStyle /><a:p><a:pPr lvl="0" indent="0" marL="0"><a:buNone /></a:pPr><a:r><a:rPr /><a:t>These slides follow the notes</a:t></a:r></a:p></p:txBody></p:sp><p:graphicFrame><p:nvGraphicFramePr><p:cNvPr id="6" name="Content Placeholder 5" /><p:cNvGraphicFramePr><a:graphicFrameLocks noGrp="1" /></p:cNvGraphicFramePr><p:nvPr><p:ph idx="1" /></p:nvPr></p:nvGraphicFramePr><p:xfrm><a:off x="457200" y="1193800" /><a:ext cx="8229600" cy="3390900" /></p:xfrm><a:graphic><a:graphicData uri="http://schemas.openxmlformats.org/drawingml/2006/table"><a:tbl><a:tblPr firstRow="0" bandRow="1"><a:tableStyleId>{5C22544A-7EE6-4342-B048-85BDC9FD1C3A}</a:tableStyleId></a:tblPr><a:tblGrid><a:gridCol w="4114800" /><a:gridCol w="4114800" /></a:tblGrid><a:tr h="0"><a:tc><a:txBody><a:bodyPr /><a:lstStyle /><a:p><a:pPr lvl="0" indent="0" marL="0"><a:buNone /></a:pPr><a:r><a:rPr b="1" /><a:t>9.1</a:t></a:r></a:p></a:txBody></a:tc><a:tc><a:txBody><a:bodyPr /><a:lstStyle /><a:p><a:pPr lvl="0" indent="0" marL="0"><a:buNone /></a:pPr><a14:m><m:oMath xmlns:m="http://schemas.openxmlformats.org/officeDocument/2006/math"><m:r><m:t>k</m:t></m:r></m:oMath></a14:m><a:r><a:rPr /><a:t>-means</a:t></a:r></a:p></a:txBody></a:tc></a:tr><a:tr h="0"><a:tc><a:txBody><a:bodyPr /><a:lstStyle /><a:p><a:pPr lvl="0" indent="0" marL="0"><a:buNone /></a:pPr><a:r><a:rPr b="1" /><a:t>9.2</a:t></a:r></a:p></a:txBody></a:tc><a:tc><a:txBody><a:bodyPr /><a:lstStyle /><a:p><a:pPr lvl="0" indent="0" marL="0"><a:buNone /></a:pPr><a:r><a:rPr /><a:t>Hierarchical clustering</a:t></a:r></a:p></a:txBody></a:tc></a:tr><a:tr h="0"><a:tc><a:txBody><a:bodyPr /><a:lstStyle /><a:p><a:pPr lvl="0" indent="0" marL="0"><a:buNone /></a:pPr><a:r><a:rPr b="1" /><a:t>9.3</a:t></a:r></a:p></a:txBody></a:tc><a:tc><a:txBody><a:bodyPr /><a:lstStyle /><a:p><a:pPr lvl="0" indent="0" marL="0"><a:buNone /></a:pPr><a:r><a:rPr /><a:t>Choosing </a:t></a:r><a14:m><m:oMath xmlns:m="http://schemas.openxmlformats.org/officeDocument/2006/math"><m:r><m:t>k</m:t></m:r></m:oMath></a14:m></a:p></a:txBody></a:tc></a:tr><a:tr h="0"><a:tc><a:txBody><a:bodyPr /><a:lstStyle /><a:p><a:pPr lvl="0" indent="0" marL="0"><a:buNone /></a:pPr><a:r><a:rPr b="1" /><a:t>9.4</a:t></a:r></a:p></a:txBody></a:tc><a:tc><a:txBody><a:bodyPr /><a:lstStyle /><a:p><a:pPr lvl="0" indent="0" marL="0"><a:buNone /></a:pPr><a:r><a:rPr /><a:t>Representing text</a:t></a:r></a:p></a:txBody></a:tc></a:tr><a:tr h="0"><a:tc><a:txBody><a:bodyPr /><a:lstStyle /><a:p><a:pPr lvl="0" indent="0" marL="0"><a:buNone /></a:pPr><a:r><a:rPr b="1" /><a:t>9.5</a:t></a:r></a:p></a:txBody></a:tc><a:tc><a:txBody><a:bodyPr /><a:lstStyle /><a:p><a:pPr lvl="0" indent="0" marL="0"><a:buNone /></a:pPr><a:r><a:rPr /><a:t>Validity — the part that is actually hard</a:t></a:r></a:p></a:txBody></a:tc></a:tr></a:tbl></a:graphicData></a:graphic></p:graphicFrame></p:spTree></p:cSld></p:sld>
+</file>
+
+<file path=ppt/slides/slide30.xml><?xml version="1.0" encoding="utf-8"?>
+<p:sld xmlns:a="http://schemas.openxmlformats.org/drawingml/2006/main" xmlns:r="http://schemas.openxmlformats.org/officeDocument/2006/relationships" xmlns:p="http://schemas.openxmlformats.org/presentationml/2006/main">
+  <p:cSld>
+    <p:spTree>
+      <p:nvGrpSpPr>
+        <p:cNvPr id="1" name=""/>
+        <p:cNvGrpSpPr/>
+        <p:nvPr/>
+      </p:nvGrpSpPr>
+      <p:grpSpPr>
+        <a:xfrm>
+          <a:off x="0" y="0"/>
+          <a:ext cx="0" cy="0"/>
+          <a:chOff x="0" y="0"/>
+          <a:chExt cx="0" cy="0"/>
+        </a:xfrm>
+      </p:grpSpPr>
+      <p:sp>
+        <p:nvSpPr>
+          <p:cNvPr id="2" name="Title 1"/>
+          <p:cNvSpPr>
+            <a:spLocks noGrp="1"/>
+          </p:cNvSpPr>
+          <p:nvPr>
+            <p:ph type="title"/>
+          </p:nvPr>
+        </p:nvSpPr>
+        <p:spPr/>
+        <p:txBody>
+          <a:bodyPr/>
+          <a:lstStyle/>
+          <a:p>
+            <a:pPr lvl="0" indent="0" marL="0">
+              <a:buNone/>
+            </a:pPr>
+            <a:r>
+              <a:rPr/>
+              <a:t>The two-minute report</a:t>
+            </a:r>
+          </a:p>
+        </p:txBody>
+      </p:sp>
+      <p:sp>
+        <p:nvSpPr>
+          <p:cNvPr id="3" name="Content Placeholder 2"/>
+          <p:cNvSpPr>
+            <a:spLocks noGrp="1"/>
+          </p:cNvSpPr>
+          <p:nvPr>
+            <p:ph idx="1"/>
+          </p:nvPr>
+        </p:nvSpPr>
+        <p:spPr/>
+        <p:txBody>
+          <a:bodyPr/>
+          <a:lstStyle/>
+          <a:p>
+            <a:pPr lvl="0" indent="-342900" marL="342900">
+              <a:buAutoNum type="arabicPeriod"/>
+            </a:pPr>
+            <a:r>
+              <a:rPr b="1"/>
+              <a:t>What I did</a:t>
+            </a:r>
+            <a:r>
+              <a:rPr/>
+              <a:t> — the representation, the normalisation, the model and version</a:t>
+            </a:r>
+          </a:p>
+          <a:p>
+            <a:pPr lvl="0" indent="-342900" marL="342900">
+              <a:buAutoNum type="arabicPeriod"/>
+            </a:pPr>
+            <a:r>
+              <a:rPr b="1"/>
+              <a:t>The number</a:t>
+            </a:r>
+            <a:r>
+              <a:rPr/>
+              <a:t> — your index, and what it correlates with</a:t>
+            </a:r>
+          </a:p>
+          <a:p>
+            <a:pPr lvl="0" indent="-342900" marL="342900">
+              <a:buAutoNum type="arabicPeriod"/>
+            </a:pPr>
+            <a:r>
+              <a:rPr b="1"/>
+              <a:t>The catch</a:t>
+            </a:r>
+            <a:r>
+              <a:rPr/>
+              <a:t> — say “our index of X”, never “X”</a:t>
+            </a:r>
+          </a:p>
+          <a:p>
+            <a:pPr lvl="0" indent="0" marL="0">
+              <a:buNone/>
+            </a:pPr>
+            <a:r>
+              <a:rPr/>
+              <a:t>Full brief: </a:t>
+            </a:r>
+            <a:r>
+              <a:rPr>
+                <a:hlinkClick r:id="rId2"/>
+                <a:latin typeface="Courier"/>
+              </a:rPr>
+              <a:t>02-lab/README.md</a:t>
+            </a:r>
+          </a:p>
+        </p:txBody>
+      </p:sp>
     </p:spTree>
   </p:cSld>
 </p:sld>
@@ -7519,12 +5907,12 @@
       </p:grpSpPr>
       <p:sp>
         <p:nvSpPr>
-          <p:cNvPr id="2" name="Title 1"/>
-          <p:cNvSpPr>
-            <a:spLocks noGrp="1"/>
-          </p:cNvSpPr>
-          <p:nvPr>
-            <p:ph type="title"/>
+          <p:cNvPr id="3" name="Content Placeholder 2"/>
+          <p:cNvSpPr>
+            <a:spLocks noGrp="1"/>
+          </p:cNvSpPr>
+          <p:nvPr>
+            <p:ph idx="1"/>
           </p:nvPr>
         </p:nvSpPr>
         <p:spPr/>
@@ -7537,70 +5925,18 @@
             </a:pPr>
             <a:r>
               <a:rPr/>
-              <a:t>Before class you read</a:t>
-            </a:r>
-          </a:p>
-        </p:txBody>
-      </p:sp>
-      <p:sp>
-        <p:nvSpPr>
-          <p:cNvPr id="3" name="Content Placeholder 2"/>
-          <p:cNvSpPr>
-            <a:spLocks noGrp="1"/>
-          </p:cNvSpPr>
-          <p:nvPr>
-            <p:ph idx="1"/>
-          </p:nvPr>
-        </p:nvSpPr>
-        <p:spPr/>
-        <p:txBody>
-          <a:bodyPr/>
-          <a:lstStyle/>
-          <a:p>
-            <a:pPr lvl="0" indent="0" marL="0">
-              <a:buNone/>
-            </a:pPr>
-            <a:r>
-              <a:rPr b="1"/>
-              <a:t>Bennani &amp; Romelli</a:t>
-            </a:r>
-            <a:r>
-              <a:rPr/>
-              <a:t>, </a:t>
-            </a:r>
-            <a:r>
-              <a:rPr i="1"/>
-              <a:t>Exploring the informativeness and drivers of tone during committee meetings</a:t>
+              <a:t>Same numbering as </a:t>
+            </a:r>
+            <a:r>
+              <a:rPr>
+                <a:hlinkClick r:id="rId2"/>
+                <a:latin typeface="Courier"/>
+              </a:rPr>
+              <a:t>01-lecture/README.md</a:t>
             </a:r>
             <a:r>
               <a:rPr/>
               <a:t>.</a:t>
-            </a:r>
-          </a:p>
-          <a:p>
-            <a:pPr lvl="0" indent="0" marL="0">
-              <a:buNone/>
-            </a:pPr>
-            <a:r>
-              <a:rPr/>
-              <a:t>Harvard Dataverse, DOI 10.7910/DVN/TZEN38 · CC BY 4.0</a:t>
-            </a:r>
-          </a:p>
-          <a:p>
-            <a:pPr lvl="0" indent="0" marL="0">
-              <a:buNone/>
-            </a:pPr>
-            <a:r>
-              <a:rPr/>
-              <a:t>Read it for the </a:t>
-            </a:r>
-            <a:r>
-              <a:rPr b="1"/>
-              <a:t>measurement argument</a:t>
-            </a:r>
-            <a:r>
-              <a:rPr/>
-              <a:t>, not the results: how do they justify that their tone index measures tone? That question is today’s real subject.</a:t>
             </a:r>
           </a:p>
         </p:txBody>
@@ -7611,139 +5947,6 @@
 </file>
 
 <file path=ppt/slides/slide5.xml><?xml version="1.0" encoding="utf-8"?>
-<p:sld xmlns:a="http://schemas.openxmlformats.org/drawingml/2006/main" xmlns:r="http://schemas.openxmlformats.org/officeDocument/2006/relationships" xmlns:p="http://schemas.openxmlformats.org/presentationml/2006/main">
-  <p:cSld>
-    <p:spTree>
-      <p:nvGrpSpPr>
-        <p:cNvPr id="1" name=""/>
-        <p:cNvGrpSpPr/>
-        <p:nvPr/>
-      </p:nvGrpSpPr>
-      <p:grpSpPr>
-        <a:xfrm>
-          <a:off x="0" y="0"/>
-          <a:ext cx="0" cy="0"/>
-          <a:chOff x="0" y="0"/>
-          <a:chExt cx="0" cy="0"/>
-        </a:xfrm>
-      </p:grpSpPr>
-      <p:sp>
-        <p:nvSpPr>
-          <p:cNvPr id="2" name="Title 1"/>
-          <p:cNvSpPr>
-            <a:spLocks noGrp="1"/>
-          </p:cNvSpPr>
-          <p:nvPr>
-            <p:ph type="title"/>
-          </p:nvPr>
-        </p:nvSpPr>
-        <p:spPr/>
-        <p:txBody>
-          <a:bodyPr/>
-          <a:lstStyle/>
-          <a:p>
-            <a:pPr lvl="0" indent="0" marL="0">
-              <a:buNone/>
-            </a:pPr>
-            <a:r>
-              <a:rPr/>
-              <a:t>Today’s question</a:t>
-            </a:r>
-          </a:p>
-        </p:txBody>
-      </p:sp>
-      <p:sp>
-        <p:nvSpPr>
-          <p:cNvPr id="3" name="Content Placeholder 2"/>
-          <p:cNvSpPr>
-            <a:spLocks noGrp="1"/>
-          </p:cNvSpPr>
-          <p:nvPr>
-            <p:ph idx="1"/>
-          </p:nvPr>
-        </p:nvSpPr>
-        <p:spPr/>
-        <p:txBody>
-          <a:bodyPr/>
-          <a:lstStyle/>
-          <a:p>
-            <a:pPr lvl="0" indent="0" marL="1270000">
-              <a:buNone/>
-            </a:pPr>
-            <a:r>
-              <a:rPr sz="2000" i="1"/>
-              <a:t>Do European economies fall into recognisable types, and does what central banks say track what their economies do?</a:t>
-            </a:r>
-          </a:p>
-          <a:p>
-            <a:pPr lvl="0" indent="0" marL="0">
-              <a:buNone/>
-            </a:pPr>
-            <a:r>
-              <a:rPr/>
-              <a:t>Two unsupervised problems: one on numbers, one on words.</a:t>
-            </a:r>
-          </a:p>
-        </p:txBody>
-      </p:sp>
-    </p:spTree>
-  </p:cSld>
-</p:sld>
-</file>
-
-<file path=ppt/slides/slide6.xml><?xml version="1.0" encoding="utf-8"?>
-<p:sld xmlns:a="http://schemas.openxmlformats.org/drawingml/2006/main" xmlns:r="http://schemas.openxmlformats.org/officeDocument/2006/relationships" xmlns:p="http://schemas.openxmlformats.org/presentationml/2006/main">
-  <p:cSld>
-    <p:spTree>
-      <p:nvGrpSpPr>
-        <p:cNvPr id="1" name=""/>
-        <p:cNvGrpSpPr/>
-        <p:nvPr/>
-      </p:nvGrpSpPr>
-      <p:grpSpPr>
-        <a:xfrm>
-          <a:off x="0" y="0"/>
-          <a:ext cx="0" cy="0"/>
-          <a:chOff x="0" y="0"/>
-          <a:chExt cx="0" cy="0"/>
-        </a:xfrm>
-      </p:grpSpPr>
-      <p:sp>
-        <p:nvSpPr>
-          <p:cNvPr id="2" name="Title 1"/>
-          <p:cNvSpPr>
-            <a:spLocks noGrp="1"/>
-          </p:cNvSpPr>
-          <p:nvPr>
-            <p:ph type="title"/>
-          </p:nvPr>
-        </p:nvSpPr>
-        <p:spPr>
-          <a:xfrm>
-            <a:off x="722313" y="3305176"/>
-            <a:ext cx="7772400" cy="1021556"/>
-          </a:xfrm>
-        </p:spPr>
-        <p:txBody>
-          <a:bodyPr/>
-          <a:lstStyle/>
-          <a:p>
-            <a:pPr lvl="0" indent="0" marL="0">
-              <a:buNone/>
-            </a:pPr>
-            <a:r>
-              <a:rPr/>
-              <a:t>Clustering</a:t>
-            </a:r>
-          </a:p>
-        </p:txBody>
-      </p:sp>
-    </p:spTree>
-  </p:cSld>
-</p:sld>
-</file>
-
-<file path=ppt/slides/slide7.xml><?xml version="1.0" encoding="utf-8"?>
 <p:sld xmlns:a="http://schemas.openxmlformats.org/drawingml/2006/main" xmlns:r="http://schemas.openxmlformats.org/officeDocument/2006/relationships" xmlns:p="http://schemas.openxmlformats.org/presentationml/2006/main">
   <p:cSld>
     <p:spTree>
@@ -7772,7 +5975,12 @@
                 <p:ph type="title"/>
               </p:nvPr>
             </p:nvSpPr>
-            <p:spPr/>
+            <p:spPr>
+              <a:xfrm>
+                <a:off x="722313" y="3305176"/>
+                <a:ext cx="7772400" cy="1021556"/>
+              </a:xfrm>
+            </p:spPr>
             <p:txBody>
               <a:bodyPr/>
               <a:lstStyle/>
@@ -7780,6 +5988,10 @@
                 <a:pPr lvl="0" indent="0" marL="0">
                   <a:buNone/>
                 </a:pPr>
+                <a:r>
+                  <a:rPr/>
+                  <a:t>9.1 </a:t>
+                </a:r>
                 <a14:m>
                   <m:oMath xmlns:m="http://schemas.openxmlformats.org/officeDocument/2006/math">
                     <m:r>
@@ -7796,6 +6008,53 @@
           </p:sp>
         </mc:Choice>
       </mc:AlternateContent>
+    </p:spTree>
+  </p:cSld>
+</p:sld>
+</file>
+
+<file path=ppt/slides/slide6.xml><?xml version="1.0" encoding="utf-8"?>
+<p:sld xmlns:a="http://schemas.openxmlformats.org/drawingml/2006/main" xmlns:r="http://schemas.openxmlformats.org/officeDocument/2006/relationships" xmlns:p="http://schemas.openxmlformats.org/presentationml/2006/main">
+  <p:cSld>
+    <p:spTree>
+      <p:nvGrpSpPr>
+        <p:cNvPr id="1" name=""/>
+        <p:cNvGrpSpPr/>
+        <p:nvPr/>
+      </p:nvGrpSpPr>
+      <p:grpSpPr>
+        <a:xfrm>
+          <a:off x="0" y="0"/>
+          <a:ext cx="0" cy="0"/>
+          <a:chOff x="0" y="0"/>
+          <a:chExt cx="0" cy="0"/>
+        </a:xfrm>
+      </p:grpSpPr>
+      <p:sp>
+        <p:nvSpPr>
+          <p:cNvPr id="2" name="Title 1"/>
+          <p:cNvSpPr>
+            <a:spLocks noGrp="1"/>
+          </p:cNvSpPr>
+          <p:nvPr>
+            <p:ph type="title"/>
+          </p:nvPr>
+        </p:nvSpPr>
+        <p:spPr/>
+        <p:txBody>
+          <a:bodyPr/>
+          <a:lstStyle/>
+          <a:p>
+            <a:pPr lvl="0" indent="0" marL="0">
+              <a:buNone/>
+            </a:pPr>
+            <a:r>
+              <a:rPr/>
+              <a:t>The objective</a:t>
+            </a:r>
+          </a:p>
+        </p:txBody>
+      </p:sp>
       <mc:AlternateContent xmlns:mc="http://schemas.openxmlformats.org/markup-compatibility/2006">
         <mc:Choice xmlns:a14="http://schemas.microsoft.com/office/drawing/2010/main" Requires="a14">
           <p:sp>
@@ -7818,7 +6077,18 @@
                 </a:pPr>
                 <a:r>
                   <a:rPr/>
-                  <a:t>Choose centroids to minimise within-cluster sum of squares:</a:t>
+                  <a:t>Partition observations into </a:t>
+                </a:r>
+                <a14:m>
+                  <m:oMath xmlns:m="http://schemas.openxmlformats.org/officeDocument/2006/math">
+                    <m:r>
+                      <m:t>k</m:t>
+                    </m:r>
+                  </m:oMath>
+                </a14:m>
+                <a:r>
+                  <a:rPr/>
+                  <a:t> clusters minimising within-cluster sum of squares:</a:t>
                 </a:r>
               </a:p>
               <a:p>
@@ -7857,13 +6127,19 @@
                             <m:rPr>
                               <m:sty m:val="p"/>
                             </m:rPr>
-                            <m:t>.</m:t>
+                            <m:t>,</m:t>
                           </m:r>
                           <m:r>
                             <m:rPr>
                               <m:sty m:val="p"/>
                             </m:rPr>
-                            <m:t>.</m:t>
+                            <m:t>…</m:t>
+                          </m:r>
+                          <m:r>
+                            <m:rPr>
+                              <m:sty m:val="p"/>
+                            </m:rPr>
+                            <m:t>,</m:t>
                           </m:r>
                           <m:sSub>
                             <m:e>
@@ -7997,6 +6273,117 @@
                           </m:r>
                         </m:sup>
                       </m:sSup>
+                      <m:r>
+                        <m:rPr>
+                          <m:sty m:val="p"/>
+                        </m:rPr>
+                        <m:t>,</m:t>
+                      </m:r>
+                      <m:r>
+                        <m:t>  </m:t>
+                      </m:r>
+                      <m:sSub>
+                        <m:e>
+                          <m:r>
+                            <m:t>μ</m:t>
+                          </m:r>
+                        </m:e>
+                        <m:sub>
+                          <m:r>
+                            <m:t>j</m:t>
+                          </m:r>
+                        </m:sub>
+                      </m:sSub>
+                      <m:r>
+                        <m:rPr>
+                          <m:sty m:val="p"/>
+                        </m:rPr>
+                        <m:t>=</m:t>
+                      </m:r>
+                      <m:f>
+                        <m:fPr>
+                          <m:type m:val="bar"/>
+                        </m:fPr>
+                        <m:num>
+                          <m:r>
+                            <m:t>1</m:t>
+                          </m:r>
+                        </m:num>
+                        <m:den>
+                          <m:d>
+                            <m:dPr>
+                              <m:begChr m:val="|"/>
+                              <m:sepChr m:val=""/>
+                              <m:endChr m:val="|"/>
+                              <m:grow/>
+                            </m:dPr>
+                            <m:e>
+                              <m:sSub>
+                                <m:e>
+                                  <m:r>
+                                    <m:t>C</m:t>
+                                  </m:r>
+                                </m:e>
+                                <m:sub>
+                                  <m:r>
+                                    <m:t>j</m:t>
+                                  </m:r>
+                                </m:sub>
+                              </m:sSub>
+                            </m:e>
+                          </m:d>
+                        </m:den>
+                      </m:f>
+                      <m:nary>
+                        <m:naryPr>
+                          <m:chr m:val="∑"/>
+                          <m:limLoc m:val="undOvr"/>
+                          <m:subHide m:val="off"/>
+                          <m:supHide m:val="on"/>
+                        </m:naryPr>
+                        <m:sub>
+                          <m:r>
+                            <m:t>i</m:t>
+                          </m:r>
+                          <m:r>
+                            <m:rPr>
+                              <m:sty m:val="p"/>
+                            </m:rPr>
+                            <m:t>∈</m:t>
+                          </m:r>
+                          <m:sSub>
+                            <m:e>
+                              <m:r>
+                                <m:t>C</m:t>
+                              </m:r>
+                            </m:e>
+                            <m:sub>
+                              <m:r>
+                                <m:t>j</m:t>
+                              </m:r>
+                            </m:sub>
+                          </m:sSub>
+                        </m:sub>
+                        <m:sup>
+                          <m:r>
+                            <m:t>​</m:t>
+                          </m:r>
+                        </m:sup>
+                        <m:e>
+                          <m:sSub>
+                            <m:e>
+                              <m:r>
+                                <m:t>x</m:t>
+                              </m:r>
+                            </m:e>
+                            <m:sub>
+                              <m:r>
+                                <m:t>i</m:t>
+                              </m:r>
+                            </m:sub>
+                          </m:sSub>
+                        </m:e>
+                      </m:nary>
                     </m:oMath>
                   </m:oMathPara>
                 </a14:m>
@@ -8007,8 +6394,245 @@
                 </a:pPr>
                 <a:r>
                   <a:rPr/>
-                  <a:t>Iterate: assign each point to its nearest centroid, recompute centroids, repeat.</a:t>
+                  <a:t>The problem is </a:t>
                 </a:r>
+                <a:r>
+                  <a:rPr b="1"/>
+                  <a:t>NP-hard</a:t>
+                </a:r>
+                <a:r>
+                  <a:rPr/>
+                  <a:t>.</a:t>
+                </a:r>
+              </a:p>
+            </p:txBody>
+          </p:sp>
+        </mc:Choice>
+      </mc:AlternateContent>
+    </p:spTree>
+  </p:cSld>
+</p:sld>
+</file>
+
+<file path=ppt/slides/slide7.xml><?xml version="1.0" encoding="utf-8"?>
+<p:sld xmlns:a="http://schemas.openxmlformats.org/drawingml/2006/main" xmlns:r="http://schemas.openxmlformats.org/officeDocument/2006/relationships" xmlns:p="http://schemas.openxmlformats.org/presentationml/2006/main">
+  <p:cSld>
+    <p:spTree>
+      <p:nvGrpSpPr>
+        <p:cNvPr id="1" name=""/>
+        <p:cNvGrpSpPr/>
+        <p:nvPr/>
+      </p:nvGrpSpPr>
+      <p:grpSpPr>
+        <a:xfrm>
+          <a:off x="0" y="0"/>
+          <a:ext cx="0" cy="0"/>
+          <a:chOff x="0" y="0"/>
+          <a:chExt cx="0" cy="0"/>
+        </a:xfrm>
+      </p:grpSpPr>
+      <p:sp>
+        <p:nvSpPr>
+          <p:cNvPr id="2" name="Title 1"/>
+          <p:cNvSpPr>
+            <a:spLocks noGrp="1"/>
+          </p:cNvSpPr>
+          <p:nvPr>
+            <p:ph type="title"/>
+          </p:nvPr>
+        </p:nvSpPr>
+        <p:spPr/>
+        <p:txBody>
+          <a:bodyPr/>
+          <a:lstStyle/>
+          <a:p>
+            <a:pPr lvl="0" indent="0" marL="0">
+              <a:buNone/>
+            </a:pPr>
+            <a:r>
+              <a:rPr/>
+              <a:t>Lloyd’s algorithm</a:t>
+            </a:r>
+          </a:p>
+        </p:txBody>
+      </p:sp>
+      <mc:AlternateContent xmlns:mc="http://schemas.openxmlformats.org/markup-compatibility/2006">
+        <mc:Choice xmlns:a14="http://schemas.microsoft.com/office/drawing/2010/main" Requires="a14">
+          <p:sp>
+            <p:nvSpPr>
+              <p:cNvPr id="3" name="Content Placeholder 2"/>
+              <p:cNvSpPr>
+                <a:spLocks noGrp="1"/>
+              </p:cNvSpPr>
+              <p:nvPr>
+                <p:ph idx="1"/>
+              </p:nvPr>
+            </p:nvSpPr>
+            <p:spPr/>
+            <p:txBody>
+              <a:bodyPr/>
+              <a:lstStyle/>
+              <a:p>
+                <a:pPr lvl="0" indent="0" marL="0">
+                  <a:buNone/>
+                </a:pPr>
+                <a:r>
+                  <a:rPr/>
+                  <a:t>Two steps, each weakly decreasing the objective:</a:t>
+                </a:r>
+              </a:p>
+              <a:p>
+                <a:pPr lvl="0" indent="-342900" marL="342900">
+                  <a:buAutoNum type="arabicPeriod"/>
+                </a:pPr>
+                <a:r>
+                  <a:rPr b="1"/>
+                  <a:t>Assign:</a:t>
+                </a:r>
+                <a:r>
+                  <a:rPr/>
+                  <a:t> </a:t>
+                </a:r>
+                <a14:m>
+                  <m:oMath xmlns:m="http://schemas.openxmlformats.org/officeDocument/2006/math">
+                    <m:sSub>
+                      <m:e>
+                        <m:r>
+                          <m:t>c</m:t>
+                        </m:r>
+                      </m:e>
+                      <m:sub>
+                        <m:r>
+                          <m:t>i</m:t>
+                        </m:r>
+                      </m:sub>
+                    </m:sSub>
+                    <m:r>
+                      <m:rPr>
+                        <m:sty m:val="p"/>
+                      </m:rPr>
+                      <m:t>←</m:t>
+                    </m:r>
+                    <m:r>
+                      <m:rPr>
+                        <m:sty m:val="p"/>
+                      </m:rPr>
+                      <m:t>arg</m:t>
+                    </m:r>
+                    <m:sSub>
+                      <m:e>
+                        <m:r>
+                          <m:rPr>
+                            <m:sty m:val="p"/>
+                          </m:rPr>
+                          <m:t>min</m:t>
+                        </m:r>
+                      </m:e>
+                      <m:sub>
+                        <m:r>
+                          <m:t>j</m:t>
+                        </m:r>
+                      </m:sub>
+                    </m:sSub>
+                    <m:r>
+                      <m:rPr>
+                        <m:sty m:val="p"/>
+                      </m:rPr>
+                      <m:t>∥</m:t>
+                    </m:r>
+                    <m:sSub>
+                      <m:e>
+                        <m:r>
+                          <m:t>x</m:t>
+                        </m:r>
+                      </m:e>
+                      <m:sub>
+                        <m:r>
+                          <m:t>i</m:t>
+                        </m:r>
+                      </m:sub>
+                    </m:sSub>
+                    <m:r>
+                      <m:rPr>
+                        <m:sty m:val="p"/>
+                      </m:rPr>
+                      <m:t>−</m:t>
+                    </m:r>
+                    <m:sSub>
+                      <m:e>
+                        <m:r>
+                          <m:t>μ</m:t>
+                        </m:r>
+                      </m:e>
+                      <m:sub>
+                        <m:r>
+                          <m:t>j</m:t>
+                        </m:r>
+                      </m:sub>
+                    </m:sSub>
+                    <m:sSup>
+                      <m:e>
+                        <m:r>
+                          <m:rPr>
+                            <m:sty m:val="p"/>
+                          </m:rPr>
+                          <m:t>∥</m:t>
+                        </m:r>
+                      </m:e>
+                      <m:sup>
+                        <m:r>
+                          <m:t>2</m:t>
+                        </m:r>
+                      </m:sup>
+                    </m:sSup>
+                  </m:oMath>
+                </a14:m>
+              </a:p>
+              <a:p>
+                <a:pPr lvl="0" indent="-342900" marL="342900">
+                  <a:buAutoNum type="arabicPeriod"/>
+                </a:pPr>
+                <a:r>
+                  <a:rPr b="1"/>
+                  <a:t>Update:</a:t>
+                </a:r>
+                <a:r>
+                  <a:rPr/>
+                  <a:t> </a:t>
+                </a:r>
+                <a14:m>
+                  <m:oMath xmlns:m="http://schemas.openxmlformats.org/officeDocument/2006/math">
+                    <m:sSub>
+                      <m:e>
+                        <m:r>
+                          <m:t>μ</m:t>
+                        </m:r>
+                      </m:e>
+                      <m:sub>
+                        <m:r>
+                          <m:t>j</m:t>
+                        </m:r>
+                      </m:sub>
+                    </m:sSub>
+                    <m:r>
+                      <m:rPr>
+                        <m:sty m:val="p"/>
+                      </m:rPr>
+                      <m:t>←</m:t>
+                    </m:r>
+                  </m:oMath>
+                </a14:m>
+                <a:r>
+                  <a:rPr/>
+                  <a:t> mean of points assigned to </a:t>
+                </a:r>
+                <a14:m>
+                  <m:oMath xmlns:m="http://schemas.openxmlformats.org/officeDocument/2006/math">
+                    <m:r>
+                      <m:t>j</m:t>
+                    </m:r>
+                  </m:oMath>
+                </a14:m>
               </a:p>
               <a:p>
                 <a:pPr lvl="0" indent="0" marL="0">
@@ -8016,25 +6640,27 @@
                 </a:pPr>
                 <a:r>
                   <a:rPr/>
-                  <a:t>The objective is </a:t>
+                  <a:t>Step 2 is optimal given assignments (differentiate in </a:t>
                 </a:r>
-                <a:r>
-                  <a:rPr b="1"/>
-                  <a:t>non-convex</a:t>
-                </a:r>
+                <a14:m>
+                  <m:oMath xmlns:m="http://schemas.openxmlformats.org/officeDocument/2006/math">
+                    <m:sSub>
+                      <m:e>
+                        <m:r>
+                          <m:t>μ</m:t>
+                        </m:r>
+                      </m:e>
+                      <m:sub>
+                        <m:r>
+                          <m:t>j</m:t>
+                        </m:r>
+                      </m:sub>
+                    </m:sSub>
+                  </m:oMath>
+                </a14:m>
                 <a:r>
                   <a:rPr/>
-                  <a:t>. You converge to a local optimum that depends on the initialisation. Always run multiple restarts — </a:t>
-                </a:r>
-                <a:r>
-                  <a:rPr>
-                    <a:latin typeface="Courier"/>
-                  </a:rPr>
-                  <a:t>n_init=20</a:t>
-                </a:r>
-                <a:r>
-                  <a:rPr/>
-                  <a:t>, not the default.</a:t>
+                  <a:t>, set to zero); step 1 is optimal given centroids.</a:t>
                 </a:r>
               </a:p>
             </p:txBody>
@@ -8063,46 +6689,31 @@
           <a:chExt cx="0" cy="0"/>
         </a:xfrm>
       </p:grpSpPr>
-      <mc:AlternateContent xmlns:mc="http://schemas.openxmlformats.org/markup-compatibility/2006">
-        <mc:Choice xmlns:a14="http://schemas.microsoft.com/office/drawing/2010/main" Requires="a14">
-          <p:sp>
-            <p:nvSpPr>
-              <p:cNvPr id="2" name="Title 1"/>
-              <p:cNvSpPr>
-                <a:spLocks noGrp="1"/>
-              </p:cNvSpPr>
-              <p:nvPr>
-                <p:ph type="title"/>
-              </p:nvPr>
-            </p:nvSpPr>
-            <p:spPr/>
-            <p:txBody>
-              <a:bodyPr/>
-              <a:lstStyle/>
-              <a:p>
-                <a:pPr lvl="0" indent="0" marL="0">
-                  <a:buNone/>
-                </a:pPr>
-                <a:r>
-                  <a:rPr/>
-                  <a:t>What </a:t>
-                </a:r>
-                <a14:m>
-                  <m:oMath xmlns:m="http://schemas.openxmlformats.org/officeDocument/2006/math">
-                    <m:r>
-                      <m:t>k</m:t>
-                    </m:r>
-                  </m:oMath>
-                </a14:m>
-                <a:r>
-                  <a:rPr/>
-                  <a:t>-means assumes</a:t>
-                </a:r>
-              </a:p>
-            </p:txBody>
-          </p:sp>
-        </mc:Choice>
-      </mc:AlternateContent>
+      <p:sp>
+        <p:nvSpPr>
+          <p:cNvPr id="2" name="Title 1"/>
+          <p:cNvSpPr>
+            <a:spLocks noGrp="1"/>
+          </p:cNvSpPr>
+          <p:nvPr>
+            <p:ph type="title"/>
+          </p:nvPr>
+        </p:nvSpPr>
+        <p:spPr/>
+        <p:txBody>
+          <a:bodyPr/>
+          <a:lstStyle/>
+          <a:p>
+            <a:pPr lvl="0" indent="0" marL="0">
+              <a:buNone/>
+            </a:pPr>
+            <a:r>
+              <a:rPr/>
+              <a:t>Why it terminates — and where</a:t>
+            </a:r>
+          </a:p>
+        </p:txBody>
+      </p:sp>
       <mc:AlternateContent xmlns:mc="http://schemas.openxmlformats.org/markup-compatibility/2006">
         <mc:Choice xmlns:a14="http://schemas.microsoft.com/office/drawing/2010/main" Requires="a14">
           <p:sp>
@@ -8120,50 +6731,20 @@
               <a:bodyPr/>
               <a:lstStyle/>
               <a:p>
-                <a:pPr lvl="0"/>
+                <a:pPr lvl="0" indent="0" marL="0">
+                  <a:buNone/>
+                </a:pPr>
                 <a:r>
                   <a:rPr/>
-                  <a:t>Clusters are </a:t>
+                  <a:t>The objective decreases monotonically and there are finitely many partitions, so the algorithm terminates — </a:t>
                 </a:r>
                 <a:r>
                   <a:rPr b="1"/>
-                  <a:t>spherical</a:t>
+                  <a:t>at a local minimum</a:t>
                 </a:r>
                 <a:r>
                   <a:rPr/>
-                  <a:t> and of similar spread</a:t>
-                </a:r>
-              </a:p>
-              <a:p>
-                <a:pPr lvl="0"/>
-                <a:r>
-                  <a:rPr/>
-                  <a:t>Distance is meaningful — so </a:t>
-                </a:r>
-                <a:r>
-                  <a:rPr b="1"/>
-                  <a:t>standardise first</a:t>
-                </a:r>
-              </a:p>
-              <a:p>
-                <a:pPr lvl="0"/>
-                <a:r>
-                  <a:rPr/>
-                  <a:t>Every point belongs to exactly one cluster</a:t>
-                </a:r>
-              </a:p>
-              <a:p>
-                <a:pPr lvl="0"/>
-                <a14:m>
-                  <m:oMath xmlns:m="http://schemas.openxmlformats.org/officeDocument/2006/math">
-                    <m:r>
-                      <m:t>k</m:t>
-                    </m:r>
-                  </m:oMath>
-                </a14:m>
-                <a:r>
-                  <a:rPr/>
-                  <a:t> is known</a:t>
+                  <a:t>.</a:t>
                 </a:r>
               </a:p>
               <a:p>
@@ -8172,7 +6753,55 @@
                 </a:pPr>
                 <a:r>
                   <a:rPr/>
-                  <a:t>Economic data rarely satisfy the first. That is not fatal; it means the clusters are a summary, not a discovery.</a:t>
+                  <a:t>Run it many times from different starts (</a:t>
+                </a:r>
+                <a:r>
+                  <a:rPr>
+                    <a:latin typeface="Courier"/>
+                  </a:rPr>
+                  <a:t>n_init</a:t>
+                </a:r>
+                <a:r>
+                  <a:rPr/>
+                  <a:t>), or use </a:t>
+                </a:r>
+                <a:r>
+                  <a:rPr b="1"/>
+                  <a:t>k-means++</a:t>
+                </a:r>
+                <a:r>
+                  <a:rPr/>
+                  <a:t>, which seeds centroids with probability proportional to squared distance from the nearest existing centroid and gives an </a:t>
+                </a:r>
+                <a14:m>
+                  <m:oMath xmlns:m="http://schemas.openxmlformats.org/officeDocument/2006/math">
+                    <m:r>
+                      <m:t>O</m:t>
+                    </m:r>
+                    <m:d>
+                      <m:dPr>
+                        <m:begChr m:val="("/>
+                        <m:sepChr m:val=""/>
+                        <m:endChr m:val=")"/>
+                        <m:grow/>
+                      </m:dPr>
+                      <m:e>
+                        <m:r>
+                          <m:rPr>
+                            <m:sty m:val="p"/>
+                          </m:rPr>
+                          <m:t>log</m:t>
+                        </m:r>
+                        <m:r>
+                          <m:t>k</m:t>
+                        </m:r>
+                      </m:e>
+                    </m:d>
+                  </m:oMath>
+                </a14:m>
+                <a:r>
+                  <a:rPr/>
+                  <a:t>-competitive guarantee in expectation.</a:t>
                 </a:r>
               </a:p>
             </p:txBody>
@@ -8201,232 +6830,94 @@
           <a:chExt cx="0" cy="0"/>
         </a:xfrm>
       </p:grpSpPr>
-      <mc:AlternateContent xmlns:mc="http://schemas.openxmlformats.org/markup-compatibility/2006">
-        <mc:Choice xmlns:a14="http://schemas.microsoft.com/office/drawing/2010/main" Requires="a14">
-          <p:sp>
-            <p:nvSpPr>
-              <p:cNvPr id="2" name="Title 1"/>
-              <p:cNvSpPr>
-                <a:spLocks noGrp="1"/>
-              </p:cNvSpPr>
-              <p:nvPr>
-                <p:ph type="title"/>
-              </p:nvPr>
-            </p:nvSpPr>
-            <p:spPr/>
-            <p:txBody>
-              <a:bodyPr/>
-              <a:lstStyle/>
-              <a:p>
-                <a:pPr lvl="0" indent="0" marL="0">
-                  <a:buNone/>
-                </a:pPr>
-                <a:r>
-                  <a:rPr/>
-                  <a:t>Choosing </a:t>
-                </a:r>
-                <a14:m>
-                  <m:oMath xmlns:m="http://schemas.openxmlformats.org/officeDocument/2006/math">
-                    <m:r>
-                      <m:t>k</m:t>
-                    </m:r>
-                  </m:oMath>
-                </a14:m>
-              </a:p>
-            </p:txBody>
-          </p:sp>
-        </mc:Choice>
-      </mc:AlternateContent>
-      <p:graphicFrame>
-        <p:nvGraphicFramePr>
-          <p:cNvPr id="6" name="Content Placeholder 5"/>
-          <p:cNvGraphicFramePr>
-            <a:graphicFrameLocks noGrp="1"/>
-          </p:cNvGraphicFramePr>
+      <p:sp>
+        <p:nvSpPr>
+          <p:cNvPr id="2" name="Title 1"/>
+          <p:cNvSpPr>
+            <a:spLocks noGrp="1"/>
+          </p:cNvSpPr>
+          <p:nvPr>
+            <p:ph type="title"/>
+          </p:nvPr>
+        </p:nvSpPr>
+        <p:spPr/>
+        <p:txBody>
+          <a:bodyPr/>
+          <a:lstStyle/>
+          <a:p>
+            <a:pPr lvl="0" indent="0" marL="0">
+              <a:buNone/>
+            </a:pPr>
+            <a:r>
+              <a:rPr/>
+              <a:t>What the Euclidean objective assumes</a:t>
+            </a:r>
+          </a:p>
+        </p:txBody>
+      </p:sp>
+      <p:sp>
+        <p:nvSpPr>
+          <p:cNvPr id="3" name="Content Placeholder 2"/>
+          <p:cNvSpPr>
+            <a:spLocks noGrp="1"/>
+          </p:cNvSpPr>
           <p:nvPr>
             <p:ph idx="1"/>
           </p:nvPr>
-        </p:nvGraphicFramePr>
-        <p:xfrm>
-          <a:off x="457200" y="1193800"/>
-          <a:ext cx="8229600" cy="3390900"/>
-        </p:xfrm>
-        <a:graphic>
-          <a:graphicData uri="http://schemas.openxmlformats.org/drawingml/2006/table">
-            <a:tbl>
-              <a:tblPr firstRow="1" bandRow="1">
-                <a:tableStyleId>{5C22544A-7EE6-4342-B048-85BDC9FD1C3A}</a:tableStyleId>
-              </a:tblPr>
-              <a:tblGrid>
-                <a:gridCol w="4114800"/>
-                <a:gridCol w="4114800"/>
-              </a:tblGrid>
-              <a:tr h="0">
-                <a:tc>
-                  <a:txBody>
-                    <a:bodyPr/>
-                    <a:lstStyle/>
-                    <a:p>
-                      <a:pPr lvl="0" indent="0" marL="0">
-                        <a:buNone/>
-                      </a:pPr>
-                      <a:r>
-                        <a:rPr/>
-                        <a:t>Method</a:t>
-                      </a:r>
-                    </a:p>
-                  </a:txBody>
-                  <a:tcPr/>
-                </a:tc>
-                <a:tc>
-                  <a:txBody>
-                    <a:bodyPr/>
-                    <a:lstStyle/>
-                    <a:p>
-                      <a:pPr lvl="0" indent="0" marL="0">
-                        <a:buNone/>
-                      </a:pPr>
-                      <a:r>
-                        <a:rPr/>
-                        <a:t>Reads</a:t>
-                      </a:r>
-                    </a:p>
-                  </a:txBody>
-                  <a:tcPr/>
-                </a:tc>
-              </a:tr>
-              <a:tr h="0">
-                <a:tc>
-                  <a:txBody>
-                    <a:bodyPr/>
-                    <a:lstStyle/>
-                    <a:p>
-                      <a:pPr lvl="0" indent="0" marL="0">
-                        <a:buNone/>
-                      </a:pPr>
-                      <a:r>
-                        <a:rPr b="1"/>
-                        <a:t>Elbow</a:t>
-                      </a:r>
-                    </a:p>
-                  </a:txBody>
-                </a:tc>
-                <a:tc>
-                  <a:txBody>
-                    <a:bodyPr/>
-                    <a:lstStyle/>
-                    <a:p>
-                      <a:pPr lvl="0" indent="0" marL="0">
-                        <a:buNone/>
-                      </a:pPr>
-                      <a:r>
-                        <a:rPr/>
-                        <a:t>Where WCSS stops falling fast. Often no elbow exists.</a:t>
-                      </a:r>
-                    </a:p>
-                  </a:txBody>
-                </a:tc>
-              </a:tr>
-              <a:tr h="0">
-                <a:tc>
-                  <a:txBody>
-                    <a:bodyPr/>
-                    <a:lstStyle/>
-                    <a:p>
-                      <a:pPr lvl="0" indent="0" marL="0">
-                        <a:buNone/>
-                      </a:pPr>
-                      <a:r>
-                        <a:rPr b="1"/>
-                        <a:t>Silhouette</a:t>
-                      </a:r>
-                    </a:p>
-                  </a:txBody>
-                </a:tc>
-                <a:tc>
-                  <a:txBody>
-                    <a:bodyPr/>
-                    <a:lstStyle/>
-                    <a:p>
-                      <a:pPr lvl="0" indent="0" marL="0">
-                        <a:buNone/>
-                      </a:pPr>
-                      <a:r>
-                        <a:rPr/>
-                        <a:t>How much closer a point is to its own cluster than the next.</a:t>
-                      </a:r>
-                    </a:p>
-                  </a:txBody>
-                </a:tc>
-              </a:tr>
-              <a:tr h="0">
-                <a:tc>
-                  <a:txBody>
-                    <a:bodyPr/>
-                    <a:lstStyle/>
-                    <a:p>
-                      <a:pPr lvl="0" indent="0" marL="0">
-                        <a:buNone/>
-                      </a:pPr>
-                      <a:r>
-                        <a:rPr b="1"/>
-                        <a:t>Gap statistic</a:t>
-                      </a:r>
-                    </a:p>
-                  </a:txBody>
-                </a:tc>
-                <a:tc>
-                  <a:txBody>
-                    <a:bodyPr/>
-                    <a:lstStyle/>
-                    <a:p>
-                      <a:pPr lvl="0" indent="0" marL="0">
-                        <a:buNone/>
-                      </a:pPr>
-                      <a:r>
-                        <a:rPr/>
-                        <a:t>Compares WCSS with that of uniform random data.</a:t>
-                      </a:r>
-                    </a:p>
-                  </a:txBody>
-                </a:tc>
-              </a:tr>
-              <a:tr h="0">
-                <a:tc>
-                  <a:txBody>
-                    <a:bodyPr/>
-                    <a:lstStyle/>
-                    <a:p>
-                      <a:pPr lvl="0" indent="0" marL="0">
-                        <a:buNone/>
-                      </a:pPr>
-                      <a:r>
-                        <a:rPr b="1"/>
-                        <a:t>Stability</a:t>
-                      </a:r>
-                    </a:p>
-                  </a:txBody>
-                </a:tc>
-                <a:tc>
-                  <a:txBody>
-                    <a:bodyPr/>
-                    <a:lstStyle/>
-                    <a:p>
-                      <a:pPr lvl="0" indent="0" marL="0">
-                        <a:buNone/>
-                      </a:pPr>
-                      <a:r>
-                        <a:rPr/>
-                        <a:t>Do the clusters survive resampling?</a:t>
-                      </a:r>
-                    </a:p>
-                  </a:txBody>
-                </a:tc>
-              </a:tr>
-            </a:tbl>
-          </a:graphicData>
-        </a:graphic>
-      </p:graphicFrame>
+        </p:nvSpPr>
+        <p:spPr/>
+        <p:txBody>
+          <a:bodyPr/>
+          <a:lstStyle/>
+          <a:p>
+            <a:pPr lvl="0" indent="0" marL="0">
+              <a:buNone/>
+            </a:pPr>
+            <a:r>
+              <a:rPr/>
+              <a:t>Because clusters are defined by nearest-centroid, the decision boundaries are the perpendicular bisectors between centroids — a </a:t>
+            </a:r>
+            <a:r>
+              <a:rPr b="1"/>
+              <a:t>Voronoi tessellation</a:t>
+            </a:r>
+            <a:r>
+              <a:rPr/>
+              <a:t>.</a:t>
+            </a:r>
+          </a:p>
+          <a:p>
+            <a:pPr lvl="0" indent="0" marL="0">
+              <a:buNone/>
+            </a:pPr>
+            <a:r>
+              <a:rPr/>
+              <a:t>This </a:t>
+            </a:r>
+            <a:r>
+              <a:rPr i="1"/>
+              <a:t>forces</a:t>
+            </a:r>
+            <a:r>
+              <a:rPr/>
+              <a:t> convex, roughly spherical, similarly-sized clusters. Elongated or nested structures will be cut incorrectly </a:t>
+            </a:r>
+            <a:r>
+              <a:rPr b="1"/>
+              <a:t>no matter how well you optimise.</a:t>
+            </a:r>
+          </a:p>
+          <a:p>
+            <a:pPr lvl="0" indent="0" marL="0">
+              <a:buNone/>
+            </a:pPr>
+            <a:r>
+              <a:rPr/>
+              <a:t>If that assumption is wrong: a Gaussian mixture (covariance structure, soft assignments via EM), or DBSCAN / spectral clustering for non-convex shapes.</a:t>
+            </a:r>
+          </a:p>
+        </p:txBody>
+      </p:sp>
     </p:spTree>
   </p:cSld>
 </p:sld>

--- a/09-clustering-and-text-as-data/slides.pptx
+++ b/09-clustering-and-text-as-data/slides.pptx
@@ -5696,7 +5696,7 @@
                 </a:pPr>
                 <a:r>
                   <a:rPr/>
-                  <a:t>Cluster your angle’s units; report </a:t>
+                  <a:t>Cluster your project’s units; report </a:t>
                 </a:r>
                 <a:r>
                   <a:rPr b="1"/>

--- a/09-clustering-and-text-as-data/slides.pptx
+++ b/09-clustering-and-text-as-data/slides.pptx
@@ -5132,7 +5132,7 @@
             </a:r>
             <a:r>
               <a:rPr/>
-              <a:t> in the lab.</a:t>
+              <a:t> in the practice session.</a:t>
             </a:r>
           </a:p>
           <a:p>
@@ -5622,7 +5622,7 @@
             </a:pPr>
             <a:r>
               <a:rPr/>
-              <a:t>The lab</a:t>
+              <a:t>The practice</a:t>
             </a:r>
           </a:p>
         </p:txBody>
@@ -5878,7 +5878,7 @@
                 <a:hlinkClick r:id="rId2"/>
                 <a:latin typeface="Courier"/>
               </a:rPr>
-              <a:t>02-lab/README.md</a:t>
+              <a:t>02-practice/README.md</a:t>
             </a:r>
           </a:p>
         </p:txBody>

--- a/09-clustering-and-text-as-data/slides.pptx
+++ b/09-clustering-and-text-as-data/slides.pptx
@@ -935,15 +935,15 @@
         </p:nvSpPr>
         <p:spPr>
           <a:xfrm>
-            <a:off x="722313" y="3305176"/>
-            <a:ext cx="7772400" cy="1021556"/>
+            <a:off x="722313" y="1850000"/>
+            <a:ext cx="7772400" cy="1300000"/>
           </a:xfrm>
         </p:spPr>
         <p:txBody>
           <a:bodyPr anchor="t"/>
           <a:lstStyle>
             <a:lvl1pPr algn="l">
-              <a:defRPr sz="1850" b="1" cap="all"/>
+              <a:defRPr sz="2800" b="1" cap="none"/>
             </a:lvl1pPr>
           </a:lstStyle>
           <a:p>
@@ -966,8 +966,8 @@
         </p:nvSpPr>
         <p:spPr>
           <a:xfrm>
-            <a:off x="722313" y="2180035"/>
-            <a:ext cx="7772400" cy="1125140"/>
+            <a:off x="722313" y="3250000"/>
+            <a:ext cx="7772400" cy="700000"/>
           </a:xfrm>
         </p:spPr>
         <p:txBody>
@@ -3310,8 +3310,8 @@
         </p:nvSpPr>
         <p:spPr>
           <a:xfrm>
-            <a:off x="722313" y="3305176"/>
-            <a:ext cx="7772400" cy="1021556"/>
+            <a:off x="722313" y="1850000"/>
+            <a:ext cx="7772400" cy="1300000"/>
           </a:xfrm>
         </p:spPr>
         <p:txBody>
@@ -3500,8 +3500,8 @@
             </p:nvSpPr>
             <p:spPr>
               <a:xfrm>
-                <a:off x="722313" y="3305176"/>
-                <a:ext cx="7772400" cy="1021556"/>
+                <a:off x="722313" y="1850000"/>
+                <a:ext cx="7772400" cy="1300000"/>
               </a:xfrm>
             </p:spPr>
             <p:txBody>
@@ -4248,8 +4248,8 @@
         </p:nvSpPr>
         <p:spPr>
           <a:xfrm>
-            <a:off x="722313" y="3305176"/>
-            <a:ext cx="7772400" cy="1021556"/>
+            <a:off x="722313" y="1850000"/>
+            <a:ext cx="7772400" cy="1300000"/>
           </a:xfrm>
         </p:spPr>
         <p:txBody>
@@ -5281,8 +5281,8 @@
         </p:nvSpPr>
         <p:spPr>
           <a:xfrm>
-            <a:off x="722313" y="3305176"/>
-            <a:ext cx="7772400" cy="1021556"/>
+            <a:off x="722313" y="1850000"/>
+            <a:ext cx="7772400" cy="1300000"/>
           </a:xfrm>
         </p:spPr>
         <p:txBody>
@@ -5609,8 +5609,8 @@
         </p:nvSpPr>
         <p:spPr>
           <a:xfrm>
-            <a:off x="722313" y="3305176"/>
-            <a:ext cx="7772400" cy="1021556"/>
+            <a:off x="722313" y="1850000"/>
+            <a:ext cx="7772400" cy="1300000"/>
           </a:xfrm>
         </p:spPr>
         <p:txBody>
@@ -5977,8 +5977,8 @@
             </p:nvSpPr>
             <p:spPr>
               <a:xfrm>
-                <a:off x="722313" y="3305176"/>
-                <a:ext cx="7772400" cy="1021556"/>
+                <a:off x="722313" y="1850000"/>
+                <a:ext cx="7772400" cy="1300000"/>
               </a:xfrm>
             </p:spPr>
             <p:txBody>
